--- a/How AI Coding Assistants Are Changing Software Development.pptx
+++ b/How AI Coding Assistants Are Changing Software Development.pptx
@@ -5,10 +5,10 @@
     <p:sldMasterId id="2147483648" r:id="rId4"/>
   </p:sldMasterIdLst>
   <p:notesMasterIdLst>
-    <p:notesMasterId r:id="rId20"/>
+    <p:notesMasterId r:id="rId10"/>
   </p:notesMasterIdLst>
   <p:handoutMasterIdLst>
-    <p:handoutMasterId r:id="rId21"/>
+    <p:handoutMasterId r:id="rId11"/>
   </p:handoutMasterIdLst>
   <p:sldIdLst>
     <p:sldId id="340" r:id="rId5"/>
@@ -16,16 +16,6 @@
     <p:sldId id="343" r:id="rId7"/>
     <p:sldId id="356" r:id="rId8"/>
     <p:sldId id="342" r:id="rId9"/>
-    <p:sldId id="344" r:id="rId10"/>
-    <p:sldId id="346" r:id="rId11"/>
-    <p:sldId id="347" r:id="rId12"/>
-    <p:sldId id="348" r:id="rId13"/>
-    <p:sldId id="350" r:id="rId14"/>
-    <p:sldId id="351" r:id="rId15"/>
-    <p:sldId id="352" r:id="rId16"/>
-    <p:sldId id="353" r:id="rId17"/>
-    <p:sldId id="354" r:id="rId18"/>
-    <p:sldId id="355" r:id="rId19"/>
   </p:sldIdLst>
   <p:sldSz cx="12192000" cy="6858000"/>
   <p:notesSz cx="6858000" cy="9144000"/>
@@ -141,3973 +131,88 @@
 </p188:authorLst>
 </file>
 
-<file path=ppt/diagrams/colors1.xml><?xml version="1.0" encoding="utf-8"?>
-<dgm:colorsDef xmlns:dgm="http://schemas.openxmlformats.org/drawingml/2006/diagram" xmlns:a="http://schemas.openxmlformats.org/drawingml/2006/main" uniqueId="urn:microsoft.com/office/officeart/2005/8/colors/accent4_1">
-  <dgm:title val=""/>
-  <dgm:desc val=""/>
-  <dgm:catLst>
-    <dgm:cat type="accent4" pri="11100"/>
-  </dgm:catLst>
-  <dgm:styleLbl name="node0">
-    <dgm:fillClrLst meth="repeat">
-      <a:schemeClr val="lt1"/>
-    </dgm:fillClrLst>
-    <dgm:linClrLst meth="repeat">
-      <a:schemeClr val="accent4">
-        <a:shade val="80000"/>
-      </a:schemeClr>
-    </dgm:linClrLst>
-    <dgm:effectClrLst/>
-    <dgm:txLinClrLst/>
-    <dgm:txFillClrLst meth="repeat">
-      <a:schemeClr val="dk1"/>
-    </dgm:txFillClrLst>
-    <dgm:txEffectClrLst/>
-  </dgm:styleLbl>
-  <dgm:styleLbl name="node1">
-    <dgm:fillClrLst meth="repeat">
-      <a:schemeClr val="lt1"/>
-    </dgm:fillClrLst>
-    <dgm:linClrLst meth="repeat">
-      <a:schemeClr val="accent4">
-        <a:shade val="80000"/>
-      </a:schemeClr>
-    </dgm:linClrLst>
-    <dgm:effectClrLst/>
-    <dgm:txLinClrLst/>
-    <dgm:txFillClrLst meth="repeat">
-      <a:schemeClr val="dk1"/>
-    </dgm:txFillClrLst>
-    <dgm:txEffectClrLst/>
-  </dgm:styleLbl>
-  <dgm:styleLbl name="alignNode1">
-    <dgm:fillClrLst meth="repeat">
-      <a:schemeClr val="lt1"/>
-    </dgm:fillClrLst>
-    <dgm:linClrLst meth="repeat">
-      <a:schemeClr val="accent4">
-        <a:shade val="80000"/>
-      </a:schemeClr>
-    </dgm:linClrLst>
-    <dgm:effectClrLst/>
-    <dgm:txLinClrLst/>
-    <dgm:txFillClrLst meth="repeat">
-      <a:schemeClr val="dk1"/>
-    </dgm:txFillClrLst>
-    <dgm:txEffectClrLst/>
-  </dgm:styleLbl>
-  <dgm:styleLbl name="lnNode1">
-    <dgm:fillClrLst meth="repeat">
-      <a:schemeClr val="lt1"/>
-    </dgm:fillClrLst>
-    <dgm:linClrLst meth="repeat">
-      <a:schemeClr val="accent4">
-        <a:shade val="80000"/>
-      </a:schemeClr>
-    </dgm:linClrLst>
-    <dgm:effectClrLst/>
-    <dgm:txLinClrLst/>
-    <dgm:txFillClrLst meth="repeat">
-      <a:schemeClr val="dk1"/>
-    </dgm:txFillClrLst>
-    <dgm:txEffectClrLst/>
-  </dgm:styleLbl>
-  <dgm:styleLbl name="vennNode1">
-    <dgm:fillClrLst meth="repeat">
-      <a:schemeClr val="lt1">
-        <a:alpha val="50000"/>
-      </a:schemeClr>
-    </dgm:fillClrLst>
-    <dgm:linClrLst meth="repeat">
-      <a:schemeClr val="accent4">
-        <a:shade val="80000"/>
-      </a:schemeClr>
-    </dgm:linClrLst>
-    <dgm:effectClrLst/>
-    <dgm:txLinClrLst/>
-    <dgm:txFillClrLst/>
-    <dgm:txEffectClrLst/>
-  </dgm:styleLbl>
-  <dgm:styleLbl name="node2">
-    <dgm:fillClrLst meth="repeat">
-      <a:schemeClr val="lt1"/>
-    </dgm:fillClrLst>
-    <dgm:linClrLst meth="repeat">
-      <a:schemeClr val="accent4">
-        <a:shade val="80000"/>
-      </a:schemeClr>
-    </dgm:linClrLst>
-    <dgm:effectClrLst/>
-    <dgm:txLinClrLst/>
-    <dgm:txFillClrLst meth="repeat">
-      <a:schemeClr val="dk1"/>
-    </dgm:txFillClrLst>
-    <dgm:txEffectClrLst/>
-  </dgm:styleLbl>
-  <dgm:styleLbl name="node3">
-    <dgm:fillClrLst meth="repeat">
-      <a:schemeClr val="lt1"/>
-    </dgm:fillClrLst>
-    <dgm:linClrLst meth="repeat">
-      <a:schemeClr val="accent4">
-        <a:shade val="80000"/>
-      </a:schemeClr>
-    </dgm:linClrLst>
-    <dgm:effectClrLst/>
-    <dgm:txLinClrLst/>
-    <dgm:txFillClrLst meth="repeat">
-      <a:schemeClr val="dk1"/>
-    </dgm:txFillClrLst>
-    <dgm:txEffectClrLst/>
-  </dgm:styleLbl>
-  <dgm:styleLbl name="node4">
-    <dgm:fillClrLst meth="repeat">
-      <a:schemeClr val="lt1"/>
-    </dgm:fillClrLst>
-    <dgm:linClrLst meth="repeat">
-      <a:schemeClr val="accent4">
-        <a:shade val="80000"/>
-      </a:schemeClr>
-    </dgm:linClrLst>
-    <dgm:effectClrLst/>
-    <dgm:txLinClrLst/>
-    <dgm:txFillClrLst meth="repeat">
-      <a:schemeClr val="dk1"/>
-    </dgm:txFillClrLst>
-    <dgm:txEffectClrLst/>
-  </dgm:styleLbl>
-  <dgm:styleLbl name="fgImgPlace1">
-    <dgm:fillClrLst meth="repeat">
-      <a:schemeClr val="accent4">
-        <a:tint val="40000"/>
-      </a:schemeClr>
-    </dgm:fillClrLst>
-    <dgm:linClrLst meth="repeat">
-      <a:schemeClr val="accent4">
-        <a:shade val="80000"/>
-      </a:schemeClr>
-    </dgm:linClrLst>
-    <dgm:effectClrLst/>
-    <dgm:txLinClrLst/>
-    <dgm:txFillClrLst meth="repeat">
-      <a:schemeClr val="lt1"/>
-    </dgm:txFillClrLst>
-    <dgm:txEffectClrLst/>
-  </dgm:styleLbl>
-  <dgm:styleLbl name="alignImgPlace1">
-    <dgm:fillClrLst meth="repeat">
-      <a:schemeClr val="accent4">
-        <a:tint val="40000"/>
-      </a:schemeClr>
-    </dgm:fillClrLst>
-    <dgm:linClrLst meth="repeat">
-      <a:schemeClr val="accent4">
-        <a:shade val="80000"/>
-      </a:schemeClr>
-    </dgm:linClrLst>
-    <dgm:effectClrLst/>
-    <dgm:txLinClrLst/>
-    <dgm:txFillClrLst meth="repeat">
-      <a:schemeClr val="lt1"/>
-    </dgm:txFillClrLst>
-    <dgm:txEffectClrLst/>
-  </dgm:styleLbl>
-  <dgm:styleLbl name="bgImgPlace1">
-    <dgm:fillClrLst meth="repeat">
-      <a:schemeClr val="accent4">
-        <a:tint val="40000"/>
-      </a:schemeClr>
-    </dgm:fillClrLst>
-    <dgm:linClrLst meth="repeat">
-      <a:schemeClr val="accent4">
-        <a:shade val="80000"/>
-      </a:schemeClr>
-    </dgm:linClrLst>
-    <dgm:effectClrLst/>
-    <dgm:txLinClrLst/>
-    <dgm:txFillClrLst meth="repeat">
-      <a:schemeClr val="lt1"/>
-    </dgm:txFillClrLst>
-    <dgm:txEffectClrLst/>
-  </dgm:styleLbl>
-  <dgm:styleLbl name="sibTrans2D1">
-    <dgm:fillClrLst meth="repeat">
-      <a:schemeClr val="accent4">
-        <a:tint val="60000"/>
-      </a:schemeClr>
-    </dgm:fillClrLst>
-    <dgm:linClrLst meth="repeat">
-      <a:schemeClr val="accent4">
-        <a:tint val="60000"/>
-      </a:schemeClr>
-    </dgm:linClrLst>
-    <dgm:effectClrLst/>
-    <dgm:txLinClrLst/>
-    <dgm:txFillClrLst meth="repeat">
-      <a:schemeClr val="dk1"/>
-    </dgm:txFillClrLst>
-    <dgm:txEffectClrLst/>
-  </dgm:styleLbl>
-  <dgm:styleLbl name="fgSibTrans2D1">
-    <dgm:fillClrLst meth="repeat">
-      <a:schemeClr val="accent4">
-        <a:tint val="60000"/>
-      </a:schemeClr>
-    </dgm:fillClrLst>
-    <dgm:linClrLst meth="repeat">
-      <a:schemeClr val="accent4">
-        <a:tint val="60000"/>
-      </a:schemeClr>
-    </dgm:linClrLst>
-    <dgm:effectClrLst/>
-    <dgm:txLinClrLst/>
-    <dgm:txFillClrLst meth="repeat">
-      <a:schemeClr val="dk1"/>
-    </dgm:txFillClrLst>
-    <dgm:txEffectClrLst/>
-  </dgm:styleLbl>
-  <dgm:styleLbl name="bgSibTrans2D1">
-    <dgm:fillClrLst meth="repeat">
-      <a:schemeClr val="accent4">
-        <a:tint val="60000"/>
-      </a:schemeClr>
-    </dgm:fillClrLst>
-    <dgm:linClrLst meth="repeat">
-      <a:schemeClr val="accent4">
-        <a:tint val="60000"/>
-      </a:schemeClr>
-    </dgm:linClrLst>
-    <dgm:effectClrLst/>
-    <dgm:txLinClrLst/>
-    <dgm:txFillClrLst meth="repeat">
-      <a:schemeClr val="dk1"/>
-    </dgm:txFillClrLst>
-    <dgm:txEffectClrLst/>
-  </dgm:styleLbl>
-  <dgm:styleLbl name="sibTrans1D1">
-    <dgm:fillClrLst meth="repeat">
-      <a:schemeClr val="accent4"/>
-    </dgm:fillClrLst>
-    <dgm:linClrLst meth="repeat">
-      <a:schemeClr val="accent4"/>
-    </dgm:linClrLst>
-    <dgm:effectClrLst/>
-    <dgm:txLinClrLst/>
-    <dgm:txFillClrLst meth="repeat">
-      <a:schemeClr val="tx1"/>
-    </dgm:txFillClrLst>
-    <dgm:txEffectClrLst/>
-  </dgm:styleLbl>
-  <dgm:styleLbl name="callout">
-    <dgm:fillClrLst meth="repeat">
-      <a:schemeClr val="accent4"/>
-    </dgm:fillClrLst>
-    <dgm:linClrLst meth="repeat">
-      <a:schemeClr val="accent4"/>
-    </dgm:linClrLst>
-    <dgm:effectClrLst/>
-    <dgm:txLinClrLst/>
-    <dgm:txFillClrLst meth="repeat">
-      <a:schemeClr val="tx1"/>
-    </dgm:txFillClrLst>
-    <dgm:txEffectClrLst/>
-  </dgm:styleLbl>
-  <dgm:styleLbl name="asst0">
-    <dgm:fillClrLst meth="repeat">
-      <a:schemeClr val="lt1"/>
-    </dgm:fillClrLst>
-    <dgm:linClrLst meth="repeat">
-      <a:schemeClr val="accent4">
-        <a:shade val="80000"/>
-      </a:schemeClr>
-    </dgm:linClrLst>
-    <dgm:effectClrLst/>
-    <dgm:txLinClrLst/>
-    <dgm:txFillClrLst meth="repeat">
-      <a:schemeClr val="dk1"/>
-    </dgm:txFillClrLst>
-    <dgm:txEffectClrLst/>
-  </dgm:styleLbl>
-  <dgm:styleLbl name="asst1">
-    <dgm:fillClrLst meth="repeat">
-      <a:schemeClr val="lt1"/>
-    </dgm:fillClrLst>
-    <dgm:linClrLst meth="repeat">
-      <a:schemeClr val="accent4">
-        <a:shade val="80000"/>
-      </a:schemeClr>
-    </dgm:linClrLst>
-    <dgm:effectClrLst/>
-    <dgm:txLinClrLst/>
-    <dgm:txFillClrLst meth="repeat">
-      <a:schemeClr val="dk1"/>
-    </dgm:txFillClrLst>
-    <dgm:txEffectClrLst/>
-  </dgm:styleLbl>
-  <dgm:styleLbl name="asst2">
-    <dgm:fillClrLst meth="repeat">
-      <a:schemeClr val="lt1"/>
-    </dgm:fillClrLst>
-    <dgm:linClrLst meth="repeat">
-      <a:schemeClr val="accent4">
-        <a:shade val="80000"/>
-      </a:schemeClr>
-    </dgm:linClrLst>
-    <dgm:effectClrLst/>
-    <dgm:txLinClrLst/>
-    <dgm:txFillClrLst meth="repeat">
-      <a:schemeClr val="dk1"/>
-    </dgm:txFillClrLst>
-    <dgm:txEffectClrLst/>
-  </dgm:styleLbl>
-  <dgm:styleLbl name="asst3">
-    <dgm:fillClrLst meth="repeat">
-      <a:schemeClr val="lt1"/>
-    </dgm:fillClrLst>
-    <dgm:linClrLst meth="repeat">
-      <a:schemeClr val="accent4">
-        <a:shade val="80000"/>
-      </a:schemeClr>
-    </dgm:linClrLst>
-    <dgm:effectClrLst/>
-    <dgm:txLinClrLst/>
-    <dgm:txFillClrLst meth="repeat">
-      <a:schemeClr val="dk1"/>
-    </dgm:txFillClrLst>
-    <dgm:txEffectClrLst/>
-  </dgm:styleLbl>
-  <dgm:styleLbl name="asst4">
-    <dgm:fillClrLst meth="repeat">
-      <a:schemeClr val="lt1"/>
-    </dgm:fillClrLst>
-    <dgm:linClrLst meth="repeat">
-      <a:schemeClr val="accent4">
-        <a:shade val="80000"/>
-      </a:schemeClr>
-    </dgm:linClrLst>
-    <dgm:effectClrLst/>
-    <dgm:txLinClrLst/>
-    <dgm:txFillClrLst meth="repeat">
-      <a:schemeClr val="dk1"/>
-    </dgm:txFillClrLst>
-    <dgm:txEffectClrLst/>
-  </dgm:styleLbl>
-  <dgm:styleLbl name="parChTrans2D1">
-    <dgm:fillClrLst meth="repeat">
-      <a:schemeClr val="accent4">
-        <a:tint val="60000"/>
-      </a:schemeClr>
-    </dgm:fillClrLst>
-    <dgm:linClrLst meth="repeat">
-      <a:schemeClr val="accent4">
-        <a:tint val="60000"/>
-      </a:schemeClr>
-    </dgm:linClrLst>
-    <dgm:effectClrLst/>
-    <dgm:txLinClrLst/>
-    <dgm:txFillClrLst/>
-    <dgm:txEffectClrLst/>
-  </dgm:styleLbl>
-  <dgm:styleLbl name="parChTrans2D2">
-    <dgm:fillClrLst meth="repeat">
-      <a:schemeClr val="accent4"/>
-    </dgm:fillClrLst>
-    <dgm:linClrLst meth="repeat">
-      <a:schemeClr val="accent4"/>
-    </dgm:linClrLst>
-    <dgm:effectClrLst/>
-    <dgm:txLinClrLst/>
-    <dgm:txFillClrLst/>
-    <dgm:txEffectClrLst/>
-  </dgm:styleLbl>
-  <dgm:styleLbl name="parChTrans2D3">
-    <dgm:fillClrLst meth="repeat">
-      <a:schemeClr val="accent4"/>
-    </dgm:fillClrLst>
-    <dgm:linClrLst meth="repeat">
-      <a:schemeClr val="accent4"/>
-    </dgm:linClrLst>
-    <dgm:effectClrLst/>
-    <dgm:txLinClrLst/>
-    <dgm:txFillClrLst/>
-    <dgm:txEffectClrLst/>
-  </dgm:styleLbl>
-  <dgm:styleLbl name="parChTrans2D4">
-    <dgm:fillClrLst meth="repeat">
-      <a:schemeClr val="accent4"/>
-    </dgm:fillClrLst>
-    <dgm:linClrLst meth="repeat">
-      <a:schemeClr val="accent4"/>
-    </dgm:linClrLst>
-    <dgm:effectClrLst/>
-    <dgm:txLinClrLst/>
-    <dgm:txFillClrLst meth="repeat">
-      <a:schemeClr val="lt1"/>
-    </dgm:txFillClrLst>
-    <dgm:txEffectClrLst/>
-  </dgm:styleLbl>
-  <dgm:styleLbl name="parChTrans1D1">
-    <dgm:fillClrLst meth="repeat">
-      <a:schemeClr val="accent4"/>
-    </dgm:fillClrLst>
-    <dgm:linClrLst meth="repeat">
-      <a:schemeClr val="accent4">
-        <a:shade val="60000"/>
-      </a:schemeClr>
-    </dgm:linClrLst>
-    <dgm:effectClrLst/>
-    <dgm:txLinClrLst/>
-    <dgm:txFillClrLst meth="repeat">
-      <a:schemeClr val="tx1"/>
-    </dgm:txFillClrLst>
-    <dgm:txEffectClrLst/>
-  </dgm:styleLbl>
-  <dgm:styleLbl name="parChTrans1D2">
-    <dgm:fillClrLst meth="repeat">
-      <a:schemeClr val="accent4"/>
-    </dgm:fillClrLst>
-    <dgm:linClrLst meth="repeat">
-      <a:schemeClr val="accent4">
-        <a:shade val="60000"/>
-      </a:schemeClr>
-    </dgm:linClrLst>
-    <dgm:effectClrLst/>
-    <dgm:txLinClrLst/>
-    <dgm:txFillClrLst meth="repeat">
-      <a:schemeClr val="tx1"/>
-    </dgm:txFillClrLst>
-    <dgm:txEffectClrLst/>
-  </dgm:styleLbl>
-  <dgm:styleLbl name="parChTrans1D3">
-    <dgm:fillClrLst meth="repeat">
-      <a:schemeClr val="accent4"/>
-    </dgm:fillClrLst>
-    <dgm:linClrLst meth="repeat">
-      <a:schemeClr val="accent4">
-        <a:shade val="80000"/>
-      </a:schemeClr>
-    </dgm:linClrLst>
-    <dgm:effectClrLst/>
-    <dgm:txLinClrLst/>
-    <dgm:txFillClrLst meth="repeat">
-      <a:schemeClr val="tx1"/>
-    </dgm:txFillClrLst>
-    <dgm:txEffectClrLst/>
-  </dgm:styleLbl>
-  <dgm:styleLbl name="parChTrans1D4">
-    <dgm:fillClrLst meth="repeat">
-      <a:schemeClr val="accent4"/>
-    </dgm:fillClrLst>
-    <dgm:linClrLst meth="repeat">
-      <a:schemeClr val="accent4">
-        <a:shade val="80000"/>
-      </a:schemeClr>
-    </dgm:linClrLst>
-    <dgm:effectClrLst/>
-    <dgm:txLinClrLst/>
-    <dgm:txFillClrLst meth="repeat">
-      <a:schemeClr val="tx1"/>
-    </dgm:txFillClrLst>
-    <dgm:txEffectClrLst/>
-  </dgm:styleLbl>
-  <dgm:styleLbl name="fgAcc1">
-    <dgm:fillClrLst meth="repeat">
-      <a:schemeClr val="accent4">
-        <a:alpha val="90000"/>
-        <a:tint val="40000"/>
-      </a:schemeClr>
-    </dgm:fillClrLst>
-    <dgm:linClrLst meth="repeat">
-      <a:schemeClr val="accent4"/>
-    </dgm:linClrLst>
-    <dgm:effectClrLst/>
-    <dgm:txLinClrLst/>
-    <dgm:txFillClrLst meth="repeat">
-      <a:schemeClr val="dk1"/>
-    </dgm:txFillClrLst>
-    <dgm:txEffectClrLst/>
-  </dgm:styleLbl>
-  <dgm:styleLbl name="conFgAcc1">
-    <dgm:fillClrLst meth="repeat">
-      <a:schemeClr val="accent4">
-        <a:alpha val="90000"/>
-        <a:tint val="40000"/>
-      </a:schemeClr>
-    </dgm:fillClrLst>
-    <dgm:linClrLst meth="repeat">
-      <a:schemeClr val="accent4"/>
-    </dgm:linClrLst>
-    <dgm:effectClrLst/>
-    <dgm:txLinClrLst/>
-    <dgm:txFillClrLst meth="repeat">
-      <a:schemeClr val="dk1"/>
-    </dgm:txFillClrLst>
-    <dgm:txEffectClrLst/>
-  </dgm:styleLbl>
-  <dgm:styleLbl name="alignAcc1">
-    <dgm:fillClrLst meth="repeat">
-      <a:schemeClr val="accent4">
-        <a:alpha val="90000"/>
-        <a:tint val="40000"/>
-      </a:schemeClr>
-    </dgm:fillClrLst>
-    <dgm:linClrLst meth="repeat">
-      <a:schemeClr val="accent4"/>
-    </dgm:linClrLst>
-    <dgm:effectClrLst/>
-    <dgm:txLinClrLst/>
-    <dgm:txFillClrLst meth="repeat">
-      <a:schemeClr val="dk1"/>
-    </dgm:txFillClrLst>
-    <dgm:txEffectClrLst/>
-  </dgm:styleLbl>
-  <dgm:styleLbl name="trAlignAcc1">
-    <dgm:fillClrLst meth="repeat">
-      <a:schemeClr val="accent4">
-        <a:alpha val="40000"/>
-        <a:tint val="40000"/>
-      </a:schemeClr>
-    </dgm:fillClrLst>
-    <dgm:linClrLst meth="repeat">
-      <a:schemeClr val="accent4"/>
-    </dgm:linClrLst>
-    <dgm:effectClrLst/>
-    <dgm:txLinClrLst/>
-    <dgm:txFillClrLst meth="repeat">
-      <a:schemeClr val="dk1"/>
-    </dgm:txFillClrLst>
-    <dgm:txEffectClrLst/>
-  </dgm:styleLbl>
-  <dgm:styleLbl name="bgAcc1">
-    <dgm:fillClrLst meth="repeat">
-      <a:schemeClr val="accent4">
-        <a:alpha val="90000"/>
-        <a:tint val="40000"/>
-      </a:schemeClr>
-    </dgm:fillClrLst>
-    <dgm:linClrLst meth="repeat">
-      <a:schemeClr val="accent4"/>
-    </dgm:linClrLst>
-    <dgm:effectClrLst/>
-    <dgm:txLinClrLst/>
-    <dgm:txFillClrLst meth="repeat">
-      <a:schemeClr val="dk1"/>
-    </dgm:txFillClrLst>
-    <dgm:txEffectClrLst/>
-  </dgm:styleLbl>
-  <dgm:styleLbl name="solidFgAcc1">
-    <dgm:fillClrLst meth="repeat">
-      <a:schemeClr val="lt1"/>
-    </dgm:fillClrLst>
-    <dgm:linClrLst meth="repeat">
-      <a:schemeClr val="accent4"/>
-    </dgm:linClrLst>
-    <dgm:effectClrLst/>
-    <dgm:txLinClrLst/>
-    <dgm:txFillClrLst meth="repeat">
-      <a:schemeClr val="dk1"/>
-    </dgm:txFillClrLst>
-    <dgm:txEffectClrLst/>
-  </dgm:styleLbl>
-  <dgm:styleLbl name="solidAlignAcc1">
-    <dgm:fillClrLst meth="repeat">
-      <a:schemeClr val="lt1"/>
-    </dgm:fillClrLst>
-    <dgm:linClrLst meth="repeat">
-      <a:schemeClr val="accent4"/>
-    </dgm:linClrLst>
-    <dgm:effectClrLst/>
-    <dgm:txLinClrLst/>
-    <dgm:txFillClrLst meth="repeat">
-      <a:schemeClr val="dk1"/>
-    </dgm:txFillClrLst>
-    <dgm:txEffectClrLst/>
-  </dgm:styleLbl>
-  <dgm:styleLbl name="solidBgAcc1">
-    <dgm:fillClrLst meth="repeat">
-      <a:schemeClr val="lt1"/>
-    </dgm:fillClrLst>
-    <dgm:linClrLst meth="repeat">
-      <a:schemeClr val="accent4"/>
-    </dgm:linClrLst>
-    <dgm:effectClrLst/>
-    <dgm:txLinClrLst/>
-    <dgm:txFillClrLst meth="repeat">
-      <a:schemeClr val="dk1"/>
-    </dgm:txFillClrLst>
-    <dgm:txEffectClrLst/>
-  </dgm:styleLbl>
-  <dgm:styleLbl name="fgAccFollowNode1">
-    <dgm:fillClrLst meth="repeat">
-      <a:schemeClr val="lt1">
-        <a:alpha val="90000"/>
-        <a:tint val="40000"/>
-      </a:schemeClr>
-    </dgm:fillClrLst>
-    <dgm:linClrLst meth="repeat">
-      <a:schemeClr val="accent4">
-        <a:alpha val="90000"/>
-      </a:schemeClr>
-    </dgm:linClrLst>
-    <dgm:effectClrLst/>
-    <dgm:txLinClrLst/>
-    <dgm:txFillClrLst meth="repeat">
-      <a:schemeClr val="dk1"/>
-    </dgm:txFillClrLst>
-    <dgm:txEffectClrLst/>
-  </dgm:styleLbl>
-  <dgm:styleLbl name="alignAccFollowNode1">
-    <dgm:fillClrLst meth="repeat">
-      <a:schemeClr val="lt1">
-        <a:alpha val="90000"/>
-        <a:tint val="40000"/>
-      </a:schemeClr>
-    </dgm:fillClrLst>
-    <dgm:linClrLst meth="repeat">
-      <a:schemeClr val="accent4">
-        <a:alpha val="90000"/>
-      </a:schemeClr>
-    </dgm:linClrLst>
-    <dgm:effectClrLst/>
-    <dgm:txLinClrLst/>
-    <dgm:txFillClrLst meth="repeat">
-      <a:schemeClr val="dk1"/>
-    </dgm:txFillClrLst>
-    <dgm:txEffectClrLst/>
-  </dgm:styleLbl>
-  <dgm:styleLbl name="bgAccFollowNode1">
-    <dgm:fillClrLst meth="repeat">
-      <a:schemeClr val="lt1">
-        <a:alpha val="90000"/>
-        <a:tint val="40000"/>
-      </a:schemeClr>
-    </dgm:fillClrLst>
-    <dgm:linClrLst meth="repeat">
-      <a:schemeClr val="accent4">
-        <a:alpha val="90000"/>
-      </a:schemeClr>
-    </dgm:linClrLst>
-    <dgm:effectClrLst/>
-    <dgm:txLinClrLst/>
-    <dgm:txFillClrLst meth="repeat">
-      <a:schemeClr val="dk1"/>
-    </dgm:txFillClrLst>
-    <dgm:txEffectClrLst/>
-  </dgm:styleLbl>
-  <dgm:styleLbl name="fgAcc0">
-    <dgm:fillClrLst meth="repeat">
-      <a:schemeClr val="accent4">
-        <a:alpha val="90000"/>
-        <a:tint val="40000"/>
-      </a:schemeClr>
-    </dgm:fillClrLst>
-    <dgm:linClrLst meth="repeat">
-      <a:schemeClr val="accent4"/>
-    </dgm:linClrLst>
-    <dgm:effectClrLst/>
-    <dgm:txLinClrLst/>
-    <dgm:txFillClrLst meth="repeat">
-      <a:schemeClr val="dk1"/>
-    </dgm:txFillClrLst>
-    <dgm:txEffectClrLst/>
-  </dgm:styleLbl>
-  <dgm:styleLbl name="fgAcc2">
-    <dgm:fillClrLst meth="repeat">
-      <a:schemeClr val="accent4">
-        <a:alpha val="90000"/>
-        <a:tint val="40000"/>
-      </a:schemeClr>
-    </dgm:fillClrLst>
-    <dgm:linClrLst meth="repeat">
-      <a:schemeClr val="accent4"/>
-    </dgm:linClrLst>
-    <dgm:effectClrLst/>
-    <dgm:txLinClrLst/>
-    <dgm:txFillClrLst meth="repeat">
-      <a:schemeClr val="dk1"/>
-    </dgm:txFillClrLst>
-    <dgm:txEffectClrLst/>
-  </dgm:styleLbl>
-  <dgm:styleLbl name="fgAcc3">
-    <dgm:fillClrLst meth="repeat">
-      <a:schemeClr val="accent4">
-        <a:alpha val="90000"/>
-        <a:tint val="40000"/>
-      </a:schemeClr>
-    </dgm:fillClrLst>
-    <dgm:linClrLst meth="repeat">
-      <a:schemeClr val="accent4"/>
-    </dgm:linClrLst>
-    <dgm:effectClrLst/>
-    <dgm:txLinClrLst/>
-    <dgm:txFillClrLst meth="repeat">
-      <a:schemeClr val="dk1"/>
-    </dgm:txFillClrLst>
-    <dgm:txEffectClrLst/>
-  </dgm:styleLbl>
-  <dgm:styleLbl name="fgAcc4">
-    <dgm:fillClrLst meth="repeat">
-      <a:schemeClr val="accent4">
-        <a:alpha val="90000"/>
-        <a:tint val="40000"/>
-      </a:schemeClr>
-    </dgm:fillClrLst>
-    <dgm:linClrLst meth="repeat">
-      <a:schemeClr val="accent4"/>
-    </dgm:linClrLst>
-    <dgm:effectClrLst/>
-    <dgm:txLinClrLst/>
-    <dgm:txFillClrLst meth="repeat">
-      <a:schemeClr val="dk1"/>
-    </dgm:txFillClrLst>
-    <dgm:txEffectClrLst/>
-  </dgm:styleLbl>
-  <dgm:styleLbl name="bgShp">
-    <dgm:fillClrLst meth="repeat">
-      <a:schemeClr val="accent4">
-        <a:tint val="40000"/>
-      </a:schemeClr>
-    </dgm:fillClrLst>
-    <dgm:linClrLst meth="repeat">
-      <a:schemeClr val="accent4"/>
-    </dgm:linClrLst>
-    <dgm:effectClrLst/>
-    <dgm:txLinClrLst/>
-    <dgm:txFillClrLst meth="repeat">
-      <a:schemeClr val="dk1"/>
-    </dgm:txFillClrLst>
-    <dgm:txEffectClrLst/>
-  </dgm:styleLbl>
-  <dgm:styleLbl name="dkBgShp">
-    <dgm:fillClrLst meth="repeat">
-      <a:schemeClr val="accent4">
-        <a:shade val="80000"/>
-      </a:schemeClr>
-    </dgm:fillClrLst>
-    <dgm:linClrLst meth="repeat">
-      <a:schemeClr val="accent4"/>
-    </dgm:linClrLst>
-    <dgm:effectClrLst/>
-    <dgm:txLinClrLst/>
-    <dgm:txFillClrLst meth="repeat">
-      <a:schemeClr val="lt1"/>
-    </dgm:txFillClrLst>
-    <dgm:txEffectClrLst/>
-  </dgm:styleLbl>
-  <dgm:styleLbl name="trBgShp">
-    <dgm:fillClrLst meth="repeat">
-      <a:schemeClr val="accent4">
-        <a:tint val="50000"/>
-        <a:alpha val="40000"/>
-      </a:schemeClr>
-    </dgm:fillClrLst>
-    <dgm:linClrLst meth="repeat">
-      <a:schemeClr val="accent4"/>
-    </dgm:linClrLst>
-    <dgm:effectClrLst/>
-    <dgm:txLinClrLst/>
-    <dgm:txFillClrLst meth="repeat">
-      <a:schemeClr val="lt1"/>
-    </dgm:txFillClrLst>
-    <dgm:txEffectClrLst/>
-  </dgm:styleLbl>
-  <dgm:styleLbl name="fgShp">
-    <dgm:fillClrLst meth="repeat">
-      <a:schemeClr val="accent4">
-        <a:tint val="60000"/>
-      </a:schemeClr>
-    </dgm:fillClrLst>
-    <dgm:linClrLst meth="repeat">
-      <a:schemeClr val="lt1"/>
-    </dgm:linClrLst>
-    <dgm:effectClrLst/>
-    <dgm:txLinClrLst/>
-    <dgm:txFillClrLst meth="repeat">
-      <a:schemeClr val="dk1"/>
-    </dgm:txFillClrLst>
-    <dgm:txEffectClrLst/>
-  </dgm:styleLbl>
-  <dgm:styleLbl name="revTx">
-    <dgm:fillClrLst meth="repeat">
-      <a:schemeClr val="lt1">
-        <a:alpha val="0"/>
-      </a:schemeClr>
-    </dgm:fillClrLst>
-    <dgm:linClrLst meth="repeat">
-      <a:schemeClr val="dk1">
-        <a:alpha val="0"/>
-      </a:schemeClr>
-    </dgm:linClrLst>
-    <dgm:effectClrLst/>
-    <dgm:txLinClrLst/>
-    <dgm:txFillClrLst meth="repeat">
-      <a:schemeClr val="tx1"/>
-    </dgm:txFillClrLst>
-    <dgm:txEffectClrLst/>
-  </dgm:styleLbl>
-</dgm:colorsDef>
-</file>
-
-<file path=ppt/diagrams/data1.xml><?xml version="1.0" encoding="utf-8"?>
-<dgm:dataModel xmlns:dgm="http://schemas.openxmlformats.org/drawingml/2006/diagram" xmlns:a="http://schemas.openxmlformats.org/drawingml/2006/main">
-  <dgm:ptLst>
-    <dgm:pt modelId="{A66480AC-C0DE-4E5E-9ECD-9AE37E3FCB79}" type="doc">
-      <dgm:prSet loTypeId="urn:microsoft.com/office/officeart/2016/7/layout/BasicTimeline" loCatId="timeline" qsTypeId="urn:microsoft.com/office/officeart/2005/8/quickstyle/simple1" qsCatId="simple" csTypeId="urn:microsoft.com/office/officeart/2005/8/colors/accent4_1" csCatId="accent4" phldr="1"/>
-      <dgm:spPr/>
-      <dgm:t>
-        <a:bodyPr/>
-        <a:lstStyle/>
-        <a:p>
-          <a:endParaRPr lang="en-US"/>
-        </a:p>
-      </dgm:t>
-    </dgm:pt>
-    <dgm:pt modelId="{A8C03FBB-4A75-4460-AEA6-DEAEB9C61496}">
-      <dgm:prSet phldrT="[Text]" phldr="0" custT="1"/>
-      <dgm:spPr/>
-      <dgm:t>
-        <a:bodyPr/>
-        <a:lstStyle/>
-        <a:p>
-          <a:pPr>
-            <a:defRPr b="1"/>
-          </a:pPr>
-          <a:r>
-            <a:rPr lang="en-US" sz="1800" dirty="0">
-              <a:latin typeface="+mj-lt"/>
-            </a:rPr>
-            <a:t>Q3</a:t>
-          </a:r>
-        </a:p>
-      </dgm:t>
-    </dgm:pt>
-    <dgm:pt modelId="{4E972F7F-4B1B-47AA-A25B-1FFC561F1C76}" type="parTrans" cxnId="{D3D81948-D963-4D1E-AE16-9705EAF510FC}">
-      <dgm:prSet/>
-      <dgm:spPr/>
-      <dgm:t>
-        <a:bodyPr/>
-        <a:lstStyle/>
-        <a:p>
-          <a:endParaRPr lang="en-US" sz="1800">
-            <a:latin typeface="+mj-lt"/>
-          </a:endParaRPr>
-        </a:p>
-      </dgm:t>
-    </dgm:pt>
-    <dgm:pt modelId="{67361508-930A-4A23-8CFC-BB56DA645C3C}" type="sibTrans" cxnId="{D3D81948-D963-4D1E-AE16-9705EAF510FC}">
-      <dgm:prSet/>
-      <dgm:spPr/>
-      <dgm:t>
-        <a:bodyPr/>
-        <a:lstStyle/>
-        <a:p>
-          <a:endParaRPr lang="en-US" sz="1800">
-            <a:latin typeface="+mj-lt"/>
-          </a:endParaRPr>
-        </a:p>
-      </dgm:t>
-    </dgm:pt>
-    <dgm:pt modelId="{5E71F362-34DF-4EEC-92A3-0EFE450E05E4}">
-      <dgm:prSet phldrT="[Text]" phldr="0" custT="1"/>
-      <dgm:spPr/>
-      <dgm:t>
-        <a:bodyPr/>
-        <a:lstStyle/>
-        <a:p>
-          <a:pPr algn="ctr"/>
-          <a:r>
-            <a:rPr lang="en-US" sz="1800" dirty="0">
-              <a:latin typeface="+mj-lt"/>
-            </a:rPr>
-            <a:t>Market research</a:t>
-          </a:r>
-        </a:p>
-      </dgm:t>
-    </dgm:pt>
-    <dgm:pt modelId="{8E5EE4D1-908E-455C-B8B3-281AD42DEC9A}" type="parTrans" cxnId="{B99CA6C9-28D1-4DDB-B8EC-AED73AD115CA}">
-      <dgm:prSet/>
-      <dgm:spPr/>
-      <dgm:t>
-        <a:bodyPr/>
-        <a:lstStyle/>
-        <a:p>
-          <a:endParaRPr lang="en-US" sz="1800">
-            <a:latin typeface="+mj-lt"/>
-          </a:endParaRPr>
-        </a:p>
-      </dgm:t>
-    </dgm:pt>
-    <dgm:pt modelId="{B208B24A-E9FD-40A9-B764-FB7C2B7ED8B9}" type="sibTrans" cxnId="{B99CA6C9-28D1-4DDB-B8EC-AED73AD115CA}">
-      <dgm:prSet/>
-      <dgm:spPr/>
-      <dgm:t>
-        <a:bodyPr/>
-        <a:lstStyle/>
-        <a:p>
-          <a:endParaRPr lang="en-US" sz="1800">
-            <a:latin typeface="+mj-lt"/>
-          </a:endParaRPr>
-        </a:p>
-      </dgm:t>
-    </dgm:pt>
-    <dgm:pt modelId="{91969DED-4CB8-4A14-A50B-3F7B848E46B5}">
-      <dgm:prSet phldrT="[Text]" phldr="0" custT="1"/>
-      <dgm:spPr/>
-      <dgm:t>
-        <a:bodyPr/>
-        <a:lstStyle/>
-        <a:p>
-          <a:pPr>
-            <a:defRPr b="1"/>
-          </a:pPr>
-          <a:r>
-            <a:rPr lang="en-US" sz="1800" dirty="0">
-              <a:latin typeface="+mj-lt"/>
-            </a:rPr>
-            <a:t>Q4</a:t>
-          </a:r>
-        </a:p>
-      </dgm:t>
-    </dgm:pt>
-    <dgm:pt modelId="{441CD73D-85E1-42A6-BCF8-362A3247E2F3}" type="parTrans" cxnId="{537F2ED0-8BD0-4AD5-B60D-89B660EDA1AC}">
-      <dgm:prSet/>
-      <dgm:spPr/>
-      <dgm:t>
-        <a:bodyPr/>
-        <a:lstStyle/>
-        <a:p>
-          <a:endParaRPr lang="en-US" sz="1800">
-            <a:latin typeface="+mj-lt"/>
-          </a:endParaRPr>
-        </a:p>
-      </dgm:t>
-    </dgm:pt>
-    <dgm:pt modelId="{81CA8AA2-C0C3-4381-BA8B-413EDD578B83}" type="sibTrans" cxnId="{537F2ED0-8BD0-4AD5-B60D-89B660EDA1AC}">
-      <dgm:prSet/>
-      <dgm:spPr/>
-      <dgm:t>
-        <a:bodyPr/>
-        <a:lstStyle/>
-        <a:p>
-          <a:endParaRPr lang="en-US" sz="1800">
-            <a:latin typeface="+mj-lt"/>
-          </a:endParaRPr>
-        </a:p>
-      </dgm:t>
-    </dgm:pt>
-    <dgm:pt modelId="{8A04F340-E8E1-4146-9905-E7ADCAEAABD7}">
-      <dgm:prSet phldrT="[Text]" phldr="0" custT="1"/>
-      <dgm:spPr/>
-      <dgm:t>
-        <a:bodyPr/>
-        <a:lstStyle/>
-        <a:p>
-          <a:pPr algn="ctr"/>
-          <a:r>
-            <a:rPr lang="en-US" sz="1800" dirty="0">
-              <a:latin typeface="+mj-lt"/>
-            </a:rPr>
-            <a:t>Product development</a:t>
-          </a:r>
-        </a:p>
-      </dgm:t>
-    </dgm:pt>
-    <dgm:pt modelId="{4EBD5EC2-45ED-4ED6-8376-97D155A911AE}" type="parTrans" cxnId="{E636BFFB-0404-4D4B-B3F0-C64FDFD9DDEF}">
-      <dgm:prSet/>
-      <dgm:spPr/>
-      <dgm:t>
-        <a:bodyPr/>
-        <a:lstStyle/>
-        <a:p>
-          <a:endParaRPr lang="en-US" sz="1800">
-            <a:latin typeface="+mj-lt"/>
-          </a:endParaRPr>
-        </a:p>
-      </dgm:t>
-    </dgm:pt>
-    <dgm:pt modelId="{F9CD2A04-6A34-4104-A971-391788B88F55}" type="sibTrans" cxnId="{E636BFFB-0404-4D4B-B3F0-C64FDFD9DDEF}">
-      <dgm:prSet/>
-      <dgm:spPr/>
-      <dgm:t>
-        <a:bodyPr/>
-        <a:lstStyle/>
-        <a:p>
-          <a:endParaRPr lang="en-US" sz="1800">
-            <a:latin typeface="+mj-lt"/>
-          </a:endParaRPr>
-        </a:p>
-      </dgm:t>
-    </dgm:pt>
-    <dgm:pt modelId="{3CC73758-10C1-47F8-AFA7-1A986D4DDD60}">
-      <dgm:prSet phldrT="[Text]" phldr="0" custT="1"/>
-      <dgm:spPr/>
-      <dgm:t>
-        <a:bodyPr/>
-        <a:lstStyle/>
-        <a:p>
-          <a:pPr>
-            <a:defRPr b="1"/>
-          </a:pPr>
-          <a:r>
-            <a:rPr lang="en-US" sz="1800" dirty="0">
-              <a:latin typeface="+mj-lt"/>
-            </a:rPr>
-            <a:t>Q1</a:t>
-          </a:r>
-        </a:p>
-      </dgm:t>
-    </dgm:pt>
-    <dgm:pt modelId="{FF6AE4B6-4A2F-49EE-9316-9AF55E77838B}" type="parTrans" cxnId="{4A69F85D-5C15-48FD-893A-B3050E1BADEB}">
-      <dgm:prSet/>
-      <dgm:spPr/>
-      <dgm:t>
-        <a:bodyPr/>
-        <a:lstStyle/>
-        <a:p>
-          <a:endParaRPr lang="en-US" sz="1800">
-            <a:latin typeface="+mj-lt"/>
-          </a:endParaRPr>
-        </a:p>
-      </dgm:t>
-    </dgm:pt>
-    <dgm:pt modelId="{D8170BBA-6035-4773-8431-FEDD687647FF}" type="sibTrans" cxnId="{4A69F85D-5C15-48FD-893A-B3050E1BADEB}">
-      <dgm:prSet/>
-      <dgm:spPr/>
-      <dgm:t>
-        <a:bodyPr/>
-        <a:lstStyle/>
-        <a:p>
-          <a:endParaRPr lang="en-US" sz="1800">
-            <a:latin typeface="+mj-lt"/>
-          </a:endParaRPr>
-        </a:p>
-      </dgm:t>
-    </dgm:pt>
-    <dgm:pt modelId="{FD9CA14A-483C-4869-B0C1-7C5FB7EEDBCC}">
-      <dgm:prSet phldrT="[Text]" phldr="0" custT="1"/>
-      <dgm:spPr/>
-      <dgm:t>
-        <a:bodyPr/>
-        <a:lstStyle/>
-        <a:p>
-          <a:pPr algn="ctr"/>
-          <a:r>
-            <a:rPr lang="en-US" sz="1800" dirty="0">
-              <a:latin typeface="+mj-lt"/>
-            </a:rPr>
-            <a:t> User testing</a:t>
-          </a:r>
-        </a:p>
-      </dgm:t>
-    </dgm:pt>
-    <dgm:pt modelId="{8182A92F-45BA-4CD1-8E43-0B0810A50FEB}" type="parTrans" cxnId="{5EDA943F-300F-408A-A52E-3D5140FD5C22}">
-      <dgm:prSet/>
-      <dgm:spPr/>
-      <dgm:t>
-        <a:bodyPr/>
-        <a:lstStyle/>
-        <a:p>
-          <a:endParaRPr lang="en-US" sz="1800">
-            <a:latin typeface="+mj-lt"/>
-          </a:endParaRPr>
-        </a:p>
-      </dgm:t>
-    </dgm:pt>
-    <dgm:pt modelId="{914BB93C-EA8A-4B5B-8F06-30DA7C7F4B7B}" type="sibTrans" cxnId="{5EDA943F-300F-408A-A52E-3D5140FD5C22}">
-      <dgm:prSet/>
-      <dgm:spPr/>
-      <dgm:t>
-        <a:bodyPr/>
-        <a:lstStyle/>
-        <a:p>
-          <a:endParaRPr lang="en-US" sz="1800">
-            <a:latin typeface="+mj-lt"/>
-          </a:endParaRPr>
-        </a:p>
-      </dgm:t>
-    </dgm:pt>
-    <dgm:pt modelId="{D2FE027B-4161-41E1-B4D4-02AECB2E3FA0}">
-      <dgm:prSet phldrT="[Text]" phldr="0" custT="1"/>
-      <dgm:spPr/>
-      <dgm:t>
-        <a:bodyPr/>
-        <a:lstStyle/>
-        <a:p>
-          <a:pPr>
-            <a:defRPr b="1"/>
-          </a:pPr>
-          <a:r>
-            <a:rPr lang="en-US" sz="1800" dirty="0">
-              <a:latin typeface="+mj-lt"/>
-            </a:rPr>
-            <a:t>Q2</a:t>
-          </a:r>
-        </a:p>
-      </dgm:t>
-    </dgm:pt>
-    <dgm:pt modelId="{88680CFE-3CE0-4842-B3D3-716D3B671238}" type="parTrans" cxnId="{4F4F82A2-02F1-492B-96C1-46C070BEFCE3}">
-      <dgm:prSet/>
-      <dgm:spPr/>
-      <dgm:t>
-        <a:bodyPr/>
-        <a:lstStyle/>
-        <a:p>
-          <a:endParaRPr lang="en-US" sz="1800">
-            <a:latin typeface="+mj-lt"/>
-          </a:endParaRPr>
-        </a:p>
-      </dgm:t>
-    </dgm:pt>
-    <dgm:pt modelId="{4D59E06B-629C-40B5-96D3-423B7A56C945}" type="sibTrans" cxnId="{4F4F82A2-02F1-492B-96C1-46C070BEFCE3}">
-      <dgm:prSet/>
-      <dgm:spPr/>
-      <dgm:t>
-        <a:bodyPr/>
-        <a:lstStyle/>
-        <a:p>
-          <a:endParaRPr lang="en-US" sz="1800">
-            <a:latin typeface="+mj-lt"/>
-          </a:endParaRPr>
-        </a:p>
-      </dgm:t>
-    </dgm:pt>
-    <dgm:pt modelId="{2BE415B7-7185-4956-8487-237B40BC0EE5}">
-      <dgm:prSet phldrT="[Text]" phldr="0" custT="1"/>
-      <dgm:spPr/>
-      <dgm:t>
-        <a:bodyPr/>
-        <a:lstStyle/>
-        <a:p>
-          <a:pPr algn="ctr"/>
-          <a:r>
-            <a:rPr lang="en-US" sz="1800" dirty="0">
-              <a:latin typeface="+mj-lt"/>
-            </a:rPr>
-            <a:t>Product launch</a:t>
-          </a:r>
-        </a:p>
-      </dgm:t>
-    </dgm:pt>
-    <dgm:pt modelId="{A38E847E-0D1D-4F40-9A71-4D5999ADE08B}" type="parTrans" cxnId="{CB32A309-9CA9-4554-941D-519A91A9E733}">
-      <dgm:prSet/>
-      <dgm:spPr/>
-      <dgm:t>
-        <a:bodyPr/>
-        <a:lstStyle/>
-        <a:p>
-          <a:endParaRPr lang="en-US" sz="1800">
-            <a:latin typeface="+mj-lt"/>
-          </a:endParaRPr>
-        </a:p>
-      </dgm:t>
-    </dgm:pt>
-    <dgm:pt modelId="{F0D1C61C-E3F2-49BA-A2D8-C04A81308E5D}" type="sibTrans" cxnId="{CB32A309-9CA9-4554-941D-519A91A9E733}">
-      <dgm:prSet/>
-      <dgm:spPr/>
-      <dgm:t>
-        <a:bodyPr/>
-        <a:lstStyle/>
-        <a:p>
-          <a:endParaRPr lang="en-US" sz="1800">
-            <a:latin typeface="+mj-lt"/>
-          </a:endParaRPr>
-        </a:p>
-      </dgm:t>
-    </dgm:pt>
-    <dgm:pt modelId="{9FFA803F-EA25-49D8-A073-96E9747E345F}" type="pres">
-      <dgm:prSet presAssocID="{A66480AC-C0DE-4E5E-9ECD-9AE37E3FCB79}" presName="root" presStyleCnt="0">
-        <dgm:presLayoutVars>
-          <dgm:chMax/>
-          <dgm:chPref/>
-          <dgm:animLvl val="lvl"/>
-        </dgm:presLayoutVars>
-      </dgm:prSet>
-      <dgm:spPr/>
-    </dgm:pt>
-    <dgm:pt modelId="{EE0E6265-BE99-48D1-8879-DB5A75D6D78E}" type="pres">
-      <dgm:prSet presAssocID="{A66480AC-C0DE-4E5E-9ECD-9AE37E3FCB79}" presName="divider" presStyleLbl="fgAccFollowNode1" presStyleIdx="0" presStyleCnt="1"/>
-      <dgm:spPr>
-        <a:solidFill>
-          <a:schemeClr val="lt1">
-            <a:alpha val="90000"/>
-            <a:tint val="40000"/>
-            <a:hueOff val="0"/>
-            <a:satOff val="0"/>
-            <a:lumOff val="0"/>
-            <a:alphaOff val="0"/>
-          </a:schemeClr>
-        </a:solidFill>
-        <a:ln w="15875" cap="rnd" cmpd="sng" algn="ctr">
-          <a:solidFill>
-            <a:schemeClr val="accent4">
-              <a:alpha val="90000"/>
-              <a:hueOff val="0"/>
-              <a:satOff val="0"/>
-              <a:lumOff val="0"/>
-              <a:alphaOff val="0"/>
-            </a:schemeClr>
-          </a:solidFill>
-          <a:prstDash val="solid"/>
-          <a:tailEnd type="triangle" w="lg" len="lg"/>
-        </a:ln>
-        <a:effectLst/>
-      </dgm:spPr>
-    </dgm:pt>
-    <dgm:pt modelId="{BDA8F949-88B8-486D-9E41-ABA1463A8926}" type="pres">
-      <dgm:prSet presAssocID="{A66480AC-C0DE-4E5E-9ECD-9AE37E3FCB79}" presName="nodes" presStyleCnt="0">
-        <dgm:presLayoutVars>
-          <dgm:chMax/>
-          <dgm:chPref/>
-          <dgm:animLvl val="lvl"/>
-        </dgm:presLayoutVars>
-      </dgm:prSet>
-      <dgm:spPr/>
-    </dgm:pt>
-    <dgm:pt modelId="{A41AEE8D-8763-4311-BB07-B499A93D76EA}" type="pres">
-      <dgm:prSet presAssocID="{A8C03FBB-4A75-4460-AEA6-DEAEB9C61496}" presName="composite" presStyleCnt="0"/>
-      <dgm:spPr/>
-    </dgm:pt>
-    <dgm:pt modelId="{FE5C7F33-9326-49FB-89A3-8A20163AD994}" type="pres">
-      <dgm:prSet presAssocID="{A8C03FBB-4A75-4460-AEA6-DEAEB9C61496}" presName="L1TextContainer" presStyleLbl="revTx" presStyleIdx="0" presStyleCnt="4">
-        <dgm:presLayoutVars>
-          <dgm:chMax val="1"/>
-          <dgm:chPref val="1"/>
-          <dgm:bulletEnabled val="1"/>
-        </dgm:presLayoutVars>
-      </dgm:prSet>
-      <dgm:spPr/>
-    </dgm:pt>
-    <dgm:pt modelId="{C51067AB-548D-47E7-B9DD-C7A4C9600F8C}" type="pres">
-      <dgm:prSet presAssocID="{A8C03FBB-4A75-4460-AEA6-DEAEB9C61496}" presName="L2TextContainerWrapper" presStyleCnt="0">
-        <dgm:presLayoutVars>
-          <dgm:chMax val="0"/>
-          <dgm:chPref val="0"/>
-          <dgm:bulletEnabled val="1"/>
-        </dgm:presLayoutVars>
-      </dgm:prSet>
-      <dgm:spPr/>
-    </dgm:pt>
-    <dgm:pt modelId="{BA29120C-7C6B-4F62-9079-4AD528BC0744}" type="pres">
-      <dgm:prSet presAssocID="{A8C03FBB-4A75-4460-AEA6-DEAEB9C61496}" presName="L2TextContainer" presStyleLbl="bgAcc1" presStyleIdx="0" presStyleCnt="4"/>
-      <dgm:spPr/>
-    </dgm:pt>
-    <dgm:pt modelId="{617B6CDA-9351-44EF-9011-41758FE93851}" type="pres">
-      <dgm:prSet presAssocID="{A8C03FBB-4A75-4460-AEA6-DEAEB9C61496}" presName="FlexibleEmptyPlaceHolder" presStyleCnt="0"/>
-      <dgm:spPr/>
-    </dgm:pt>
-    <dgm:pt modelId="{A95DB80B-444A-4D69-B205-3A801BB8524A}" type="pres">
-      <dgm:prSet presAssocID="{A8C03FBB-4A75-4460-AEA6-DEAEB9C61496}" presName="ConnectLine" presStyleLbl="sibTrans1D1" presStyleIdx="0" presStyleCnt="4"/>
-      <dgm:spPr>
-        <a:noFill/>
-        <a:ln w="9525" cap="rnd" cmpd="sng" algn="ctr">
-          <a:solidFill>
-            <a:schemeClr val="accent4">
-              <a:hueOff val="0"/>
-              <a:satOff val="0"/>
-              <a:lumOff val="0"/>
-              <a:alphaOff val="0"/>
-            </a:schemeClr>
-          </a:solidFill>
-          <a:prstDash val="dash"/>
-        </a:ln>
-        <a:effectLst/>
-      </dgm:spPr>
-    </dgm:pt>
-    <dgm:pt modelId="{FA19A0AA-8B0B-4AA8-A80D-08CFFDD3F112}" type="pres">
-      <dgm:prSet presAssocID="{A8C03FBB-4A75-4460-AEA6-DEAEB9C61496}" presName="ConnectorPoint" presStyleLbl="alignNode1" presStyleIdx="0" presStyleCnt="4"/>
-      <dgm:spPr/>
-    </dgm:pt>
-    <dgm:pt modelId="{C298CC98-EF08-4D23-94A2-F58DEE6D7DE4}" type="pres">
-      <dgm:prSet presAssocID="{A8C03FBB-4A75-4460-AEA6-DEAEB9C61496}" presName="EmptyPlaceHolder" presStyleCnt="0"/>
-      <dgm:spPr/>
-    </dgm:pt>
-    <dgm:pt modelId="{F3D981F8-7433-4E93-99E6-2B447306B973}" type="pres">
-      <dgm:prSet presAssocID="{67361508-930A-4A23-8CFC-BB56DA645C3C}" presName="spaceBetweenRectangles" presStyleCnt="0"/>
-      <dgm:spPr/>
-    </dgm:pt>
-    <dgm:pt modelId="{7D29DFA7-018B-45C9-AC1C-5CFC82FEE150}" type="pres">
-      <dgm:prSet presAssocID="{91969DED-4CB8-4A14-A50B-3F7B848E46B5}" presName="composite" presStyleCnt="0"/>
-      <dgm:spPr/>
-    </dgm:pt>
-    <dgm:pt modelId="{60D0713D-AF69-4AF8-B071-F65622790886}" type="pres">
-      <dgm:prSet presAssocID="{91969DED-4CB8-4A14-A50B-3F7B848E46B5}" presName="L1TextContainer" presStyleLbl="revTx" presStyleIdx="1" presStyleCnt="4">
-        <dgm:presLayoutVars>
-          <dgm:chMax val="1"/>
-          <dgm:chPref val="1"/>
-          <dgm:bulletEnabled val="1"/>
-        </dgm:presLayoutVars>
-      </dgm:prSet>
-      <dgm:spPr/>
-    </dgm:pt>
-    <dgm:pt modelId="{5DAA1547-FEA7-4F69-96D3-0E3A07601B1E}" type="pres">
-      <dgm:prSet presAssocID="{91969DED-4CB8-4A14-A50B-3F7B848E46B5}" presName="L2TextContainerWrapper" presStyleCnt="0">
-        <dgm:presLayoutVars>
-          <dgm:chMax val="0"/>
-          <dgm:chPref val="0"/>
-          <dgm:bulletEnabled val="1"/>
-        </dgm:presLayoutVars>
-      </dgm:prSet>
-      <dgm:spPr/>
-    </dgm:pt>
-    <dgm:pt modelId="{DADAA0C9-3E42-4088-8622-30E9F6EA139A}" type="pres">
-      <dgm:prSet presAssocID="{91969DED-4CB8-4A14-A50B-3F7B848E46B5}" presName="L2TextContainer" presStyleLbl="bgAcc1" presStyleIdx="1" presStyleCnt="4"/>
-      <dgm:spPr/>
-    </dgm:pt>
-    <dgm:pt modelId="{D2E61EE0-F306-43AF-AFF9-74A14B9CF379}" type="pres">
-      <dgm:prSet presAssocID="{91969DED-4CB8-4A14-A50B-3F7B848E46B5}" presName="FlexibleEmptyPlaceHolder" presStyleCnt="0"/>
-      <dgm:spPr/>
-    </dgm:pt>
-    <dgm:pt modelId="{DBD74D6B-057A-432C-9067-BF618C19EB2A}" type="pres">
-      <dgm:prSet presAssocID="{91969DED-4CB8-4A14-A50B-3F7B848E46B5}" presName="ConnectLine" presStyleLbl="sibTrans1D1" presStyleIdx="1" presStyleCnt="4"/>
-      <dgm:spPr>
-        <a:noFill/>
-        <a:ln w="9525" cap="rnd" cmpd="sng" algn="ctr">
-          <a:solidFill>
-            <a:schemeClr val="accent4">
-              <a:hueOff val="0"/>
-              <a:satOff val="0"/>
-              <a:lumOff val="0"/>
-              <a:alphaOff val="0"/>
-            </a:schemeClr>
-          </a:solidFill>
-          <a:prstDash val="dash"/>
-        </a:ln>
-        <a:effectLst/>
-      </dgm:spPr>
-    </dgm:pt>
-    <dgm:pt modelId="{0F979253-FD39-4920-BFCA-78C564B167EA}" type="pres">
-      <dgm:prSet presAssocID="{91969DED-4CB8-4A14-A50B-3F7B848E46B5}" presName="ConnectorPoint" presStyleLbl="alignNode1" presStyleIdx="1" presStyleCnt="4"/>
-      <dgm:spPr/>
-    </dgm:pt>
-    <dgm:pt modelId="{C9B4B298-E04C-4317-856D-E345FE5EC64B}" type="pres">
-      <dgm:prSet presAssocID="{91969DED-4CB8-4A14-A50B-3F7B848E46B5}" presName="EmptyPlaceHolder" presStyleCnt="0"/>
-      <dgm:spPr/>
-    </dgm:pt>
-    <dgm:pt modelId="{9B636147-AF19-40E0-BE7D-3BE8148CC024}" type="pres">
-      <dgm:prSet presAssocID="{81CA8AA2-C0C3-4381-BA8B-413EDD578B83}" presName="spaceBetweenRectangles" presStyleCnt="0"/>
-      <dgm:spPr/>
-    </dgm:pt>
-    <dgm:pt modelId="{76CB18D4-86E2-467C-A2CF-3ED9EFE66BEA}" type="pres">
-      <dgm:prSet presAssocID="{3CC73758-10C1-47F8-AFA7-1A986D4DDD60}" presName="composite" presStyleCnt="0"/>
-      <dgm:spPr/>
-    </dgm:pt>
-    <dgm:pt modelId="{E712D073-0B15-4887-9DCE-A27BCACBC178}" type="pres">
-      <dgm:prSet presAssocID="{3CC73758-10C1-47F8-AFA7-1A986D4DDD60}" presName="L1TextContainer" presStyleLbl="revTx" presStyleIdx="2" presStyleCnt="4">
-        <dgm:presLayoutVars>
-          <dgm:chMax val="1"/>
-          <dgm:chPref val="1"/>
-          <dgm:bulletEnabled val="1"/>
-        </dgm:presLayoutVars>
-      </dgm:prSet>
-      <dgm:spPr/>
-    </dgm:pt>
-    <dgm:pt modelId="{4C57E835-21E8-44E9-8CE3-1E2D478ECB2B}" type="pres">
-      <dgm:prSet presAssocID="{3CC73758-10C1-47F8-AFA7-1A986D4DDD60}" presName="L2TextContainerWrapper" presStyleCnt="0">
-        <dgm:presLayoutVars>
-          <dgm:chMax val="0"/>
-          <dgm:chPref val="0"/>
-          <dgm:bulletEnabled val="1"/>
-        </dgm:presLayoutVars>
-      </dgm:prSet>
-      <dgm:spPr/>
-    </dgm:pt>
-    <dgm:pt modelId="{E0D48281-565D-47A3-9B6C-576231178549}" type="pres">
-      <dgm:prSet presAssocID="{3CC73758-10C1-47F8-AFA7-1A986D4DDD60}" presName="L2TextContainer" presStyleLbl="bgAcc1" presStyleIdx="2" presStyleCnt="4"/>
-      <dgm:spPr/>
-    </dgm:pt>
-    <dgm:pt modelId="{E0365E95-CAD6-4660-956D-E490447A5CB4}" type="pres">
-      <dgm:prSet presAssocID="{3CC73758-10C1-47F8-AFA7-1A986D4DDD60}" presName="FlexibleEmptyPlaceHolder" presStyleCnt="0"/>
-      <dgm:spPr/>
-    </dgm:pt>
-    <dgm:pt modelId="{DCAE8A46-752C-4E82-84CE-E790E1F2918E}" type="pres">
-      <dgm:prSet presAssocID="{3CC73758-10C1-47F8-AFA7-1A986D4DDD60}" presName="ConnectLine" presStyleLbl="sibTrans1D1" presStyleIdx="2" presStyleCnt="4"/>
-      <dgm:spPr>
-        <a:noFill/>
-        <a:ln w="9525" cap="rnd" cmpd="sng" algn="ctr">
-          <a:solidFill>
-            <a:schemeClr val="accent4">
-              <a:hueOff val="0"/>
-              <a:satOff val="0"/>
-              <a:lumOff val="0"/>
-              <a:alphaOff val="0"/>
-            </a:schemeClr>
-          </a:solidFill>
-          <a:prstDash val="dash"/>
-        </a:ln>
-        <a:effectLst/>
-      </dgm:spPr>
-    </dgm:pt>
-    <dgm:pt modelId="{B6459BF8-D2C3-4018-9C28-98667DC203F4}" type="pres">
-      <dgm:prSet presAssocID="{3CC73758-10C1-47F8-AFA7-1A986D4DDD60}" presName="ConnectorPoint" presStyleLbl="alignNode1" presStyleIdx="2" presStyleCnt="4"/>
-      <dgm:spPr/>
-    </dgm:pt>
-    <dgm:pt modelId="{EAB0CCC2-BFF9-432D-BA8E-7ECAF2D92AF2}" type="pres">
-      <dgm:prSet presAssocID="{3CC73758-10C1-47F8-AFA7-1A986D4DDD60}" presName="EmptyPlaceHolder" presStyleCnt="0"/>
-      <dgm:spPr/>
-    </dgm:pt>
-    <dgm:pt modelId="{07073103-04B7-4C74-9AC8-048764100B10}" type="pres">
-      <dgm:prSet presAssocID="{D8170BBA-6035-4773-8431-FEDD687647FF}" presName="spaceBetweenRectangles" presStyleCnt="0"/>
-      <dgm:spPr/>
-    </dgm:pt>
-    <dgm:pt modelId="{C68762A5-E9DF-484F-B385-6C7E07325E98}" type="pres">
-      <dgm:prSet presAssocID="{D2FE027B-4161-41E1-B4D4-02AECB2E3FA0}" presName="composite" presStyleCnt="0"/>
-      <dgm:spPr/>
-    </dgm:pt>
-    <dgm:pt modelId="{F782935D-BBBD-4420-826A-F71C517659B6}" type="pres">
-      <dgm:prSet presAssocID="{D2FE027B-4161-41E1-B4D4-02AECB2E3FA0}" presName="L1TextContainer" presStyleLbl="revTx" presStyleIdx="3" presStyleCnt="4">
-        <dgm:presLayoutVars>
-          <dgm:chMax val="1"/>
-          <dgm:chPref val="1"/>
-          <dgm:bulletEnabled val="1"/>
-        </dgm:presLayoutVars>
-      </dgm:prSet>
-      <dgm:spPr/>
-    </dgm:pt>
-    <dgm:pt modelId="{3C71E446-482E-4CAC-8D42-2D4AC020412B}" type="pres">
-      <dgm:prSet presAssocID="{D2FE027B-4161-41E1-B4D4-02AECB2E3FA0}" presName="L2TextContainerWrapper" presStyleCnt="0">
-        <dgm:presLayoutVars>
-          <dgm:chMax val="0"/>
-          <dgm:chPref val="0"/>
-          <dgm:bulletEnabled val="1"/>
-        </dgm:presLayoutVars>
-      </dgm:prSet>
-      <dgm:spPr/>
-    </dgm:pt>
-    <dgm:pt modelId="{6C3A59BD-6D45-4573-B098-8CB5207F194D}" type="pres">
-      <dgm:prSet presAssocID="{D2FE027B-4161-41E1-B4D4-02AECB2E3FA0}" presName="L2TextContainer" presStyleLbl="bgAcc1" presStyleIdx="3" presStyleCnt="4"/>
-      <dgm:spPr/>
-    </dgm:pt>
-    <dgm:pt modelId="{8EB042C8-D666-4667-A1E4-E0C87151B72F}" type="pres">
-      <dgm:prSet presAssocID="{D2FE027B-4161-41E1-B4D4-02AECB2E3FA0}" presName="FlexibleEmptyPlaceHolder" presStyleCnt="0"/>
-      <dgm:spPr/>
-    </dgm:pt>
-    <dgm:pt modelId="{086FB9B1-82B2-4197-8B33-6E7FF94F8D2E}" type="pres">
-      <dgm:prSet presAssocID="{D2FE027B-4161-41E1-B4D4-02AECB2E3FA0}" presName="ConnectLine" presStyleLbl="sibTrans1D1" presStyleIdx="3" presStyleCnt="4"/>
-      <dgm:spPr>
-        <a:noFill/>
-        <a:ln w="9525" cap="rnd" cmpd="sng" algn="ctr">
-          <a:solidFill>
-            <a:schemeClr val="accent4">
-              <a:hueOff val="0"/>
-              <a:satOff val="0"/>
-              <a:lumOff val="0"/>
-              <a:alphaOff val="0"/>
-            </a:schemeClr>
-          </a:solidFill>
-          <a:prstDash val="dash"/>
-        </a:ln>
-        <a:effectLst/>
-      </dgm:spPr>
-    </dgm:pt>
-    <dgm:pt modelId="{3F359E8B-7C7E-4FD9-B106-36CCBFC731D5}" type="pres">
-      <dgm:prSet presAssocID="{D2FE027B-4161-41E1-B4D4-02AECB2E3FA0}" presName="ConnectorPoint" presStyleLbl="alignNode1" presStyleIdx="3" presStyleCnt="4"/>
-      <dgm:spPr/>
-    </dgm:pt>
-    <dgm:pt modelId="{34434334-A935-4057-946F-93B826088F38}" type="pres">
-      <dgm:prSet presAssocID="{D2FE027B-4161-41E1-B4D4-02AECB2E3FA0}" presName="EmptyPlaceHolder" presStyleCnt="0"/>
-      <dgm:spPr/>
-    </dgm:pt>
-  </dgm:ptLst>
-  <dgm:cxnLst>
-    <dgm:cxn modelId="{CB32A309-9CA9-4554-941D-519A91A9E733}" srcId="{D2FE027B-4161-41E1-B4D4-02AECB2E3FA0}" destId="{2BE415B7-7185-4956-8487-237B40BC0EE5}" srcOrd="0" destOrd="0" parTransId="{A38E847E-0D1D-4F40-9A71-4D5999ADE08B}" sibTransId="{F0D1C61C-E3F2-49BA-A2D8-C04A81308E5D}"/>
-    <dgm:cxn modelId="{64516513-C9B3-4B52-A434-6178ACAB3599}" type="presOf" srcId="{91969DED-4CB8-4A14-A50B-3F7B848E46B5}" destId="{60D0713D-AF69-4AF8-B071-F65622790886}" srcOrd="0" destOrd="0" presId="urn:microsoft.com/office/officeart/2016/7/layout/BasicTimeline"/>
-    <dgm:cxn modelId="{3760A536-08D8-4D45-9A8D-A21E58E17F8A}" type="presOf" srcId="{D2FE027B-4161-41E1-B4D4-02AECB2E3FA0}" destId="{F782935D-BBBD-4420-826A-F71C517659B6}" srcOrd="0" destOrd="0" presId="urn:microsoft.com/office/officeart/2016/7/layout/BasicTimeline"/>
-    <dgm:cxn modelId="{5EDA943F-300F-408A-A52E-3D5140FD5C22}" srcId="{3CC73758-10C1-47F8-AFA7-1A986D4DDD60}" destId="{FD9CA14A-483C-4869-B0C1-7C5FB7EEDBCC}" srcOrd="0" destOrd="0" parTransId="{8182A92F-45BA-4CD1-8E43-0B0810A50FEB}" sibTransId="{914BB93C-EA8A-4B5B-8F06-30DA7C7F4B7B}"/>
-    <dgm:cxn modelId="{4A69F85D-5C15-48FD-893A-B3050E1BADEB}" srcId="{A66480AC-C0DE-4E5E-9ECD-9AE37E3FCB79}" destId="{3CC73758-10C1-47F8-AFA7-1A986D4DDD60}" srcOrd="2" destOrd="0" parTransId="{FF6AE4B6-4A2F-49EE-9316-9AF55E77838B}" sibTransId="{D8170BBA-6035-4773-8431-FEDD687647FF}"/>
-    <dgm:cxn modelId="{D3D81948-D963-4D1E-AE16-9705EAF510FC}" srcId="{A66480AC-C0DE-4E5E-9ECD-9AE37E3FCB79}" destId="{A8C03FBB-4A75-4460-AEA6-DEAEB9C61496}" srcOrd="0" destOrd="0" parTransId="{4E972F7F-4B1B-47AA-A25B-1FFC561F1C76}" sibTransId="{67361508-930A-4A23-8CFC-BB56DA645C3C}"/>
-    <dgm:cxn modelId="{41643976-DEF5-44B7-B9E7-888F3AEFC45F}" type="presOf" srcId="{3CC73758-10C1-47F8-AFA7-1A986D4DDD60}" destId="{E712D073-0B15-4887-9DCE-A27BCACBC178}" srcOrd="0" destOrd="0" presId="urn:microsoft.com/office/officeart/2016/7/layout/BasicTimeline"/>
-    <dgm:cxn modelId="{2D36C892-88AC-490F-8E33-2C73C0E22FF5}" type="presOf" srcId="{2BE415B7-7185-4956-8487-237B40BC0EE5}" destId="{6C3A59BD-6D45-4573-B098-8CB5207F194D}" srcOrd="0" destOrd="0" presId="urn:microsoft.com/office/officeart/2016/7/layout/BasicTimeline"/>
-    <dgm:cxn modelId="{E5C7B693-D4EE-4A4E-97D1-4621CA0D3E91}" type="presOf" srcId="{A8C03FBB-4A75-4460-AEA6-DEAEB9C61496}" destId="{FE5C7F33-9326-49FB-89A3-8A20163AD994}" srcOrd="0" destOrd="0" presId="urn:microsoft.com/office/officeart/2016/7/layout/BasicTimeline"/>
-    <dgm:cxn modelId="{4F4F82A2-02F1-492B-96C1-46C070BEFCE3}" srcId="{A66480AC-C0DE-4E5E-9ECD-9AE37E3FCB79}" destId="{D2FE027B-4161-41E1-B4D4-02AECB2E3FA0}" srcOrd="3" destOrd="0" parTransId="{88680CFE-3CE0-4842-B3D3-716D3B671238}" sibTransId="{4D59E06B-629C-40B5-96D3-423B7A56C945}"/>
-    <dgm:cxn modelId="{4CE397A6-DB48-4AAE-BCFB-3D992789379D}" type="presOf" srcId="{5E71F362-34DF-4EEC-92A3-0EFE450E05E4}" destId="{BA29120C-7C6B-4F62-9079-4AD528BC0744}" srcOrd="0" destOrd="0" presId="urn:microsoft.com/office/officeart/2016/7/layout/BasicTimeline"/>
-    <dgm:cxn modelId="{B99CA6C9-28D1-4DDB-B8EC-AED73AD115CA}" srcId="{A8C03FBB-4A75-4460-AEA6-DEAEB9C61496}" destId="{5E71F362-34DF-4EEC-92A3-0EFE450E05E4}" srcOrd="0" destOrd="0" parTransId="{8E5EE4D1-908E-455C-B8B3-281AD42DEC9A}" sibTransId="{B208B24A-E9FD-40A9-B764-FB7C2B7ED8B9}"/>
-    <dgm:cxn modelId="{537F2ED0-8BD0-4AD5-B60D-89B660EDA1AC}" srcId="{A66480AC-C0DE-4E5E-9ECD-9AE37E3FCB79}" destId="{91969DED-4CB8-4A14-A50B-3F7B848E46B5}" srcOrd="1" destOrd="0" parTransId="{441CD73D-85E1-42A6-BCF8-362A3247E2F3}" sibTransId="{81CA8AA2-C0C3-4381-BA8B-413EDD578B83}"/>
-    <dgm:cxn modelId="{403E30EA-CA23-4A5A-9D22-DF82F93CFF08}" type="presOf" srcId="{A66480AC-C0DE-4E5E-9ECD-9AE37E3FCB79}" destId="{9FFA803F-EA25-49D8-A073-96E9747E345F}" srcOrd="0" destOrd="0" presId="urn:microsoft.com/office/officeart/2016/7/layout/BasicTimeline"/>
-    <dgm:cxn modelId="{252B4FF4-6466-43C7-8436-08B55881B5BC}" type="presOf" srcId="{FD9CA14A-483C-4869-B0C1-7C5FB7EEDBCC}" destId="{E0D48281-565D-47A3-9B6C-576231178549}" srcOrd="0" destOrd="0" presId="urn:microsoft.com/office/officeart/2016/7/layout/BasicTimeline"/>
-    <dgm:cxn modelId="{9488AFF6-9066-454E-B3C3-57C8BC68F549}" type="presOf" srcId="{8A04F340-E8E1-4146-9905-E7ADCAEAABD7}" destId="{DADAA0C9-3E42-4088-8622-30E9F6EA139A}" srcOrd="0" destOrd="0" presId="urn:microsoft.com/office/officeart/2016/7/layout/BasicTimeline"/>
-    <dgm:cxn modelId="{E636BFFB-0404-4D4B-B3F0-C64FDFD9DDEF}" srcId="{91969DED-4CB8-4A14-A50B-3F7B848E46B5}" destId="{8A04F340-E8E1-4146-9905-E7ADCAEAABD7}" srcOrd="0" destOrd="0" parTransId="{4EBD5EC2-45ED-4ED6-8376-97D155A911AE}" sibTransId="{F9CD2A04-6A34-4104-A971-391788B88F55}"/>
-    <dgm:cxn modelId="{9C5E351C-4F83-42C9-8766-363923817116}" type="presParOf" srcId="{9FFA803F-EA25-49D8-A073-96E9747E345F}" destId="{EE0E6265-BE99-48D1-8879-DB5A75D6D78E}" srcOrd="0" destOrd="0" presId="urn:microsoft.com/office/officeart/2016/7/layout/BasicTimeline"/>
-    <dgm:cxn modelId="{F4A239D2-791C-4FA7-8885-B0E1A7FEAC48}" type="presParOf" srcId="{9FFA803F-EA25-49D8-A073-96E9747E345F}" destId="{BDA8F949-88B8-486D-9E41-ABA1463A8926}" srcOrd="1" destOrd="0" presId="urn:microsoft.com/office/officeart/2016/7/layout/BasicTimeline"/>
-    <dgm:cxn modelId="{14D4DBE1-C56F-48BE-A66B-2B0E85E7B755}" type="presParOf" srcId="{BDA8F949-88B8-486D-9E41-ABA1463A8926}" destId="{A41AEE8D-8763-4311-BB07-B499A93D76EA}" srcOrd="0" destOrd="0" presId="urn:microsoft.com/office/officeart/2016/7/layout/BasicTimeline"/>
-    <dgm:cxn modelId="{2868F0B4-2D8C-4E60-A800-D7753FFE1445}" type="presParOf" srcId="{A41AEE8D-8763-4311-BB07-B499A93D76EA}" destId="{FE5C7F33-9326-49FB-89A3-8A20163AD994}" srcOrd="0" destOrd="0" presId="urn:microsoft.com/office/officeart/2016/7/layout/BasicTimeline"/>
-    <dgm:cxn modelId="{6F72394A-7E16-45AE-B5C9-6D1224450F0E}" type="presParOf" srcId="{A41AEE8D-8763-4311-BB07-B499A93D76EA}" destId="{C51067AB-548D-47E7-B9DD-C7A4C9600F8C}" srcOrd="1" destOrd="0" presId="urn:microsoft.com/office/officeart/2016/7/layout/BasicTimeline"/>
-    <dgm:cxn modelId="{2BF023E2-BD82-4543-9797-FF9FAF55B2A5}" type="presParOf" srcId="{C51067AB-548D-47E7-B9DD-C7A4C9600F8C}" destId="{BA29120C-7C6B-4F62-9079-4AD528BC0744}" srcOrd="0" destOrd="0" presId="urn:microsoft.com/office/officeart/2016/7/layout/BasicTimeline"/>
-    <dgm:cxn modelId="{2E1DF8FC-1E3D-407B-8B7F-074787FD4D73}" type="presParOf" srcId="{C51067AB-548D-47E7-B9DD-C7A4C9600F8C}" destId="{617B6CDA-9351-44EF-9011-41758FE93851}" srcOrd="1" destOrd="0" presId="urn:microsoft.com/office/officeart/2016/7/layout/BasicTimeline"/>
-    <dgm:cxn modelId="{4C3C8707-33EB-4053-85D9-0C1CF04E32CD}" type="presParOf" srcId="{A41AEE8D-8763-4311-BB07-B499A93D76EA}" destId="{A95DB80B-444A-4D69-B205-3A801BB8524A}" srcOrd="2" destOrd="0" presId="urn:microsoft.com/office/officeart/2016/7/layout/BasicTimeline"/>
-    <dgm:cxn modelId="{1FE3BD8D-0AF3-46A6-AB51-EDAEC9EB4D89}" type="presParOf" srcId="{A41AEE8D-8763-4311-BB07-B499A93D76EA}" destId="{FA19A0AA-8B0B-4AA8-A80D-08CFFDD3F112}" srcOrd="3" destOrd="0" presId="urn:microsoft.com/office/officeart/2016/7/layout/BasicTimeline"/>
-    <dgm:cxn modelId="{B5FDF500-80BD-45C8-BBEB-575AA1DAADE7}" type="presParOf" srcId="{A41AEE8D-8763-4311-BB07-B499A93D76EA}" destId="{C298CC98-EF08-4D23-94A2-F58DEE6D7DE4}" srcOrd="4" destOrd="0" presId="urn:microsoft.com/office/officeart/2016/7/layout/BasicTimeline"/>
-    <dgm:cxn modelId="{90EDA9D9-5363-433C-811E-5513B52588D1}" type="presParOf" srcId="{BDA8F949-88B8-486D-9E41-ABA1463A8926}" destId="{F3D981F8-7433-4E93-99E6-2B447306B973}" srcOrd="1" destOrd="0" presId="urn:microsoft.com/office/officeart/2016/7/layout/BasicTimeline"/>
-    <dgm:cxn modelId="{7935889E-4736-4C7F-8622-A330C126F16B}" type="presParOf" srcId="{BDA8F949-88B8-486D-9E41-ABA1463A8926}" destId="{7D29DFA7-018B-45C9-AC1C-5CFC82FEE150}" srcOrd="2" destOrd="0" presId="urn:microsoft.com/office/officeart/2016/7/layout/BasicTimeline"/>
-    <dgm:cxn modelId="{EB2658D4-3F40-4748-AE39-624B8E620A96}" type="presParOf" srcId="{7D29DFA7-018B-45C9-AC1C-5CFC82FEE150}" destId="{60D0713D-AF69-4AF8-B071-F65622790886}" srcOrd="0" destOrd="0" presId="urn:microsoft.com/office/officeart/2016/7/layout/BasicTimeline"/>
-    <dgm:cxn modelId="{51E99B0B-8CC3-4BC2-8250-4C73AF5F12E8}" type="presParOf" srcId="{7D29DFA7-018B-45C9-AC1C-5CFC82FEE150}" destId="{5DAA1547-FEA7-4F69-96D3-0E3A07601B1E}" srcOrd="1" destOrd="0" presId="urn:microsoft.com/office/officeart/2016/7/layout/BasicTimeline"/>
-    <dgm:cxn modelId="{9826AAC2-4AE6-4C22-826D-5672547E59BD}" type="presParOf" srcId="{5DAA1547-FEA7-4F69-96D3-0E3A07601B1E}" destId="{DADAA0C9-3E42-4088-8622-30E9F6EA139A}" srcOrd="0" destOrd="0" presId="urn:microsoft.com/office/officeart/2016/7/layout/BasicTimeline"/>
-    <dgm:cxn modelId="{EC270DFB-5C5B-40C9-8196-FC46A9C21D19}" type="presParOf" srcId="{5DAA1547-FEA7-4F69-96D3-0E3A07601B1E}" destId="{D2E61EE0-F306-43AF-AFF9-74A14B9CF379}" srcOrd="1" destOrd="0" presId="urn:microsoft.com/office/officeart/2016/7/layout/BasicTimeline"/>
-    <dgm:cxn modelId="{CB792D24-F02F-48C4-AC1D-366893851161}" type="presParOf" srcId="{7D29DFA7-018B-45C9-AC1C-5CFC82FEE150}" destId="{DBD74D6B-057A-432C-9067-BF618C19EB2A}" srcOrd="2" destOrd="0" presId="urn:microsoft.com/office/officeart/2016/7/layout/BasicTimeline"/>
-    <dgm:cxn modelId="{0B13E8C1-0B1E-425B-8D83-92D34782753B}" type="presParOf" srcId="{7D29DFA7-018B-45C9-AC1C-5CFC82FEE150}" destId="{0F979253-FD39-4920-BFCA-78C564B167EA}" srcOrd="3" destOrd="0" presId="urn:microsoft.com/office/officeart/2016/7/layout/BasicTimeline"/>
-    <dgm:cxn modelId="{6B60A5F4-2BAC-4F3F-A227-CB4F69F166D3}" type="presParOf" srcId="{7D29DFA7-018B-45C9-AC1C-5CFC82FEE150}" destId="{C9B4B298-E04C-4317-856D-E345FE5EC64B}" srcOrd="4" destOrd="0" presId="urn:microsoft.com/office/officeart/2016/7/layout/BasicTimeline"/>
-    <dgm:cxn modelId="{F632D135-41E2-43A9-9B84-8A9C50BA663F}" type="presParOf" srcId="{BDA8F949-88B8-486D-9E41-ABA1463A8926}" destId="{9B636147-AF19-40E0-BE7D-3BE8148CC024}" srcOrd="3" destOrd="0" presId="urn:microsoft.com/office/officeart/2016/7/layout/BasicTimeline"/>
-    <dgm:cxn modelId="{3411521A-E802-4A42-B7EC-D46E6B3B7C96}" type="presParOf" srcId="{BDA8F949-88B8-486D-9E41-ABA1463A8926}" destId="{76CB18D4-86E2-467C-A2CF-3ED9EFE66BEA}" srcOrd="4" destOrd="0" presId="urn:microsoft.com/office/officeart/2016/7/layout/BasicTimeline"/>
-    <dgm:cxn modelId="{88CD890C-B8E8-4CDA-B032-3A9A3F32FD79}" type="presParOf" srcId="{76CB18D4-86E2-467C-A2CF-3ED9EFE66BEA}" destId="{E712D073-0B15-4887-9DCE-A27BCACBC178}" srcOrd="0" destOrd="0" presId="urn:microsoft.com/office/officeart/2016/7/layout/BasicTimeline"/>
-    <dgm:cxn modelId="{AB1754FF-81F0-4ADB-A662-440DA0FBE430}" type="presParOf" srcId="{76CB18D4-86E2-467C-A2CF-3ED9EFE66BEA}" destId="{4C57E835-21E8-44E9-8CE3-1E2D478ECB2B}" srcOrd="1" destOrd="0" presId="urn:microsoft.com/office/officeart/2016/7/layout/BasicTimeline"/>
-    <dgm:cxn modelId="{03EB58B1-E5D1-49BD-8FE7-FF1A8E5CDD51}" type="presParOf" srcId="{4C57E835-21E8-44E9-8CE3-1E2D478ECB2B}" destId="{E0D48281-565D-47A3-9B6C-576231178549}" srcOrd="0" destOrd="0" presId="urn:microsoft.com/office/officeart/2016/7/layout/BasicTimeline"/>
-    <dgm:cxn modelId="{C7D8A92C-6CBF-4FA3-931B-5668E18C280C}" type="presParOf" srcId="{4C57E835-21E8-44E9-8CE3-1E2D478ECB2B}" destId="{E0365E95-CAD6-4660-956D-E490447A5CB4}" srcOrd="1" destOrd="0" presId="urn:microsoft.com/office/officeart/2016/7/layout/BasicTimeline"/>
-    <dgm:cxn modelId="{57009207-8976-4EFD-876A-EF1C91AB599A}" type="presParOf" srcId="{76CB18D4-86E2-467C-A2CF-3ED9EFE66BEA}" destId="{DCAE8A46-752C-4E82-84CE-E790E1F2918E}" srcOrd="2" destOrd="0" presId="urn:microsoft.com/office/officeart/2016/7/layout/BasicTimeline"/>
-    <dgm:cxn modelId="{A5FB4889-2275-4DD2-ADF0-583A5D1AE1ED}" type="presParOf" srcId="{76CB18D4-86E2-467C-A2CF-3ED9EFE66BEA}" destId="{B6459BF8-D2C3-4018-9C28-98667DC203F4}" srcOrd="3" destOrd="0" presId="urn:microsoft.com/office/officeart/2016/7/layout/BasicTimeline"/>
-    <dgm:cxn modelId="{8B3418BE-680A-4C04-AD26-F21B02D832B0}" type="presParOf" srcId="{76CB18D4-86E2-467C-A2CF-3ED9EFE66BEA}" destId="{EAB0CCC2-BFF9-432D-BA8E-7ECAF2D92AF2}" srcOrd="4" destOrd="0" presId="urn:microsoft.com/office/officeart/2016/7/layout/BasicTimeline"/>
-    <dgm:cxn modelId="{A9042F53-7838-4B89-A14A-DC86E7759451}" type="presParOf" srcId="{BDA8F949-88B8-486D-9E41-ABA1463A8926}" destId="{07073103-04B7-4C74-9AC8-048764100B10}" srcOrd="5" destOrd="0" presId="urn:microsoft.com/office/officeart/2016/7/layout/BasicTimeline"/>
-    <dgm:cxn modelId="{5290B18C-985B-476F-80AB-B000D2E28F60}" type="presParOf" srcId="{BDA8F949-88B8-486D-9E41-ABA1463A8926}" destId="{C68762A5-E9DF-484F-B385-6C7E07325E98}" srcOrd="6" destOrd="0" presId="urn:microsoft.com/office/officeart/2016/7/layout/BasicTimeline"/>
-    <dgm:cxn modelId="{819C616E-63F8-4599-9A66-512521E8E9F5}" type="presParOf" srcId="{C68762A5-E9DF-484F-B385-6C7E07325E98}" destId="{F782935D-BBBD-4420-826A-F71C517659B6}" srcOrd="0" destOrd="0" presId="urn:microsoft.com/office/officeart/2016/7/layout/BasicTimeline"/>
-    <dgm:cxn modelId="{8C54E232-1B89-4DC9-8E05-4736E6F4C528}" type="presParOf" srcId="{C68762A5-E9DF-484F-B385-6C7E07325E98}" destId="{3C71E446-482E-4CAC-8D42-2D4AC020412B}" srcOrd="1" destOrd="0" presId="urn:microsoft.com/office/officeart/2016/7/layout/BasicTimeline"/>
-    <dgm:cxn modelId="{BC353777-539A-4864-BB21-346D8C4360C1}" type="presParOf" srcId="{3C71E446-482E-4CAC-8D42-2D4AC020412B}" destId="{6C3A59BD-6D45-4573-B098-8CB5207F194D}" srcOrd="0" destOrd="0" presId="urn:microsoft.com/office/officeart/2016/7/layout/BasicTimeline"/>
-    <dgm:cxn modelId="{53E54228-74E4-4F6A-AAD7-71EB44BEEB36}" type="presParOf" srcId="{3C71E446-482E-4CAC-8D42-2D4AC020412B}" destId="{8EB042C8-D666-4667-A1E4-E0C87151B72F}" srcOrd="1" destOrd="0" presId="urn:microsoft.com/office/officeart/2016/7/layout/BasicTimeline"/>
-    <dgm:cxn modelId="{CD2E3F26-566B-4E8C-9927-C3B42B77551C}" type="presParOf" srcId="{C68762A5-E9DF-484F-B385-6C7E07325E98}" destId="{086FB9B1-82B2-4197-8B33-6E7FF94F8D2E}" srcOrd="2" destOrd="0" presId="urn:microsoft.com/office/officeart/2016/7/layout/BasicTimeline"/>
-    <dgm:cxn modelId="{7571835A-7BAA-40A1-945B-B991B049CBA7}" type="presParOf" srcId="{C68762A5-E9DF-484F-B385-6C7E07325E98}" destId="{3F359E8B-7C7E-4FD9-B106-36CCBFC731D5}" srcOrd="3" destOrd="0" presId="urn:microsoft.com/office/officeart/2016/7/layout/BasicTimeline"/>
-    <dgm:cxn modelId="{7083DB71-225A-4FBD-A8B2-9CBA2B2F1649}" type="presParOf" srcId="{C68762A5-E9DF-484F-B385-6C7E07325E98}" destId="{34434334-A935-4057-946F-93B826088F38}" srcOrd="4" destOrd="0" presId="urn:microsoft.com/office/officeart/2016/7/layout/BasicTimeline"/>
-  </dgm:cxnLst>
-  <dgm:bg/>
-  <dgm:whole/>
-  <dgm:extLst>
-    <a:ext uri="http://schemas.microsoft.com/office/drawing/2008/diagram">
-      <dsp:dataModelExt xmlns:dsp="http://schemas.microsoft.com/office/drawing/2008/diagram" relId="rId7" minVer="http://schemas.openxmlformats.org/drawingml/2006/diagram"/>
-    </a:ext>
-  </dgm:extLst>
-</dgm:dataModel>
-</file>
-
-<file path=ppt/diagrams/drawing1.xml><?xml version="1.0" encoding="utf-8"?>
-<dsp:drawing xmlns:dgm="http://schemas.openxmlformats.org/drawingml/2006/diagram" xmlns:dsp="http://schemas.microsoft.com/office/drawing/2008/diagram" xmlns:a="http://schemas.openxmlformats.org/drawingml/2006/main">
-  <dsp:spTree>
-    <dsp:nvGrpSpPr>
-      <dsp:cNvPr id="0" name=""/>
-      <dsp:cNvGrpSpPr/>
-    </dsp:nvGrpSpPr>
-    <dsp:grpSpPr/>
-    <dsp:sp modelId="{EE0E6265-BE99-48D1-8879-DB5A75D6D78E}">
-      <dsp:nvSpPr>
-        <dsp:cNvPr id="0" name=""/>
-        <dsp:cNvSpPr/>
-      </dsp:nvSpPr>
-      <dsp:spPr>
-        <a:xfrm>
-          <a:off x="0" y="2580481"/>
-          <a:ext cx="5972175" cy="0"/>
-        </a:xfrm>
-        <a:prstGeom prst="line">
-          <a:avLst/>
-        </a:prstGeom>
-        <a:solidFill>
-          <a:schemeClr val="lt1">
-            <a:alpha val="90000"/>
-            <a:tint val="40000"/>
-            <a:hueOff val="0"/>
-            <a:satOff val="0"/>
-            <a:lumOff val="0"/>
-            <a:alphaOff val="0"/>
-          </a:schemeClr>
-        </a:solidFill>
-        <a:ln w="15875" cap="rnd" cmpd="sng" algn="ctr">
-          <a:solidFill>
-            <a:schemeClr val="accent4">
-              <a:alpha val="90000"/>
-              <a:hueOff val="0"/>
-              <a:satOff val="0"/>
-              <a:lumOff val="0"/>
-              <a:alphaOff val="0"/>
-            </a:schemeClr>
-          </a:solidFill>
-          <a:prstDash val="solid"/>
-          <a:tailEnd type="triangle" w="lg" len="lg"/>
-        </a:ln>
-        <a:effectLst/>
-      </dsp:spPr>
-      <dsp:style>
-        <a:lnRef idx="2">
-          <a:scrgbClr r="0" g="0" b="0"/>
-        </a:lnRef>
-        <a:fillRef idx="1">
-          <a:scrgbClr r="0" g="0" b="0"/>
-        </a:fillRef>
-        <a:effectRef idx="0">
-          <a:scrgbClr r="0" g="0" b="0"/>
-        </a:effectRef>
-        <a:fontRef idx="minor"/>
-      </dsp:style>
-    </dsp:sp>
-    <dsp:sp modelId="{FE5C7F33-9326-49FB-89A3-8A20163AD994}">
-      <dsp:nvSpPr>
-        <dsp:cNvPr id="0" name=""/>
-        <dsp:cNvSpPr/>
-      </dsp:nvSpPr>
-      <dsp:spPr>
-        <a:xfrm>
-          <a:off x="132478" y="2771437"/>
-          <a:ext cx="1916928" cy="583188"/>
-        </a:xfrm>
-        <a:prstGeom prst="rect">
-          <a:avLst/>
-        </a:prstGeom>
-        <a:noFill/>
-        <a:ln>
-          <a:noFill/>
-        </a:ln>
-        <a:effectLst/>
-      </dsp:spPr>
-      <dsp:style>
-        <a:lnRef idx="0">
-          <a:scrgbClr r="0" g="0" b="0"/>
-        </a:lnRef>
-        <a:fillRef idx="0">
-          <a:scrgbClr r="0" g="0" b="0"/>
-        </a:fillRef>
-        <a:effectRef idx="0">
-          <a:scrgbClr r="0" g="0" b="0"/>
-        </a:effectRef>
-        <a:fontRef idx="minor"/>
-      </dsp:style>
-      <dsp:txBody>
-        <a:bodyPr spcFirstLastPara="0" vert="horz" wrap="square" lIns="0" tIns="0" rIns="0" bIns="0" numCol="1" spcCol="1270" anchor="t" anchorCtr="1">
-          <a:noAutofit/>
-        </a:bodyPr>
-        <a:lstStyle/>
-        <a:p>
-          <a:pPr marL="0" lvl="0" indent="0" algn="ctr" defTabSz="800100">
-            <a:lnSpc>
-              <a:spcPct val="90000"/>
-            </a:lnSpc>
-            <a:spcBef>
-              <a:spcPct val="0"/>
-            </a:spcBef>
-            <a:spcAft>
-              <a:spcPct val="35000"/>
-            </a:spcAft>
-            <a:buNone/>
-            <a:defRPr b="1"/>
-          </a:pPr>
-          <a:r>
-            <a:rPr lang="en-US" sz="1800" kern="1200" dirty="0">
-              <a:latin typeface="+mj-lt"/>
-            </a:rPr>
-            <a:t>Q3</a:t>
-          </a:r>
-        </a:p>
-      </dsp:txBody>
-      <dsp:txXfrm>
-        <a:off x="132478" y="2771437"/>
-        <a:ext cx="1916928" cy="583188"/>
-      </dsp:txXfrm>
-    </dsp:sp>
-    <dsp:sp modelId="{BA29120C-7C6B-4F62-9079-4AD528BC0744}">
-      <dsp:nvSpPr>
-        <dsp:cNvPr id="0" name=""/>
-        <dsp:cNvSpPr/>
-      </dsp:nvSpPr>
-      <dsp:spPr>
-        <a:xfrm>
-          <a:off x="1778" y="664957"/>
-          <a:ext cx="2178327" cy="934940"/>
-        </a:xfrm>
-        <a:prstGeom prst="roundRect">
-          <a:avLst/>
-        </a:prstGeom>
-        <a:solidFill>
-          <a:schemeClr val="accent4">
-            <a:alpha val="90000"/>
-            <a:tint val="40000"/>
-            <a:hueOff val="0"/>
-            <a:satOff val="0"/>
-            <a:lumOff val="0"/>
-            <a:alphaOff val="0"/>
-          </a:schemeClr>
-        </a:solidFill>
-        <a:ln w="15875" cap="rnd" cmpd="sng" algn="ctr">
-          <a:solidFill>
-            <a:schemeClr val="accent4">
-              <a:hueOff val="0"/>
-              <a:satOff val="0"/>
-              <a:lumOff val="0"/>
-              <a:alphaOff val="0"/>
-            </a:schemeClr>
-          </a:solidFill>
-          <a:prstDash val="solid"/>
-        </a:ln>
-        <a:effectLst/>
-      </dsp:spPr>
-      <dsp:style>
-        <a:lnRef idx="2">
-          <a:scrgbClr r="0" g="0" b="0"/>
-        </a:lnRef>
-        <a:fillRef idx="1">
-          <a:scrgbClr r="0" g="0" b="0"/>
-        </a:fillRef>
-        <a:effectRef idx="0">
-          <a:scrgbClr r="0" g="0" b="0"/>
-        </a:effectRef>
-        <a:fontRef idx="minor"/>
-      </dsp:style>
-      <dsp:txBody>
-        <a:bodyPr spcFirstLastPara="0" vert="horz" wrap="square" lIns="160020" tIns="160020" rIns="160020" bIns="160020" numCol="1" spcCol="1270" anchor="ctr" anchorCtr="0">
-          <a:noAutofit/>
-        </a:bodyPr>
-        <a:lstStyle/>
-        <a:p>
-          <a:pPr marL="0" lvl="0" indent="0" algn="ctr" defTabSz="800100">
-            <a:lnSpc>
-              <a:spcPct val="90000"/>
-            </a:lnSpc>
-            <a:spcBef>
-              <a:spcPct val="0"/>
-            </a:spcBef>
-            <a:spcAft>
-              <a:spcPct val="35000"/>
-            </a:spcAft>
-            <a:buNone/>
-          </a:pPr>
-          <a:r>
-            <a:rPr lang="en-US" sz="1800" kern="1200" dirty="0">
-              <a:latin typeface="+mj-lt"/>
-            </a:rPr>
-            <a:t>Market research</a:t>
-          </a:r>
-        </a:p>
-      </dsp:txBody>
-      <dsp:txXfrm>
-        <a:off x="47418" y="710597"/>
-        <a:ext cx="2087047" cy="843660"/>
-      </dsp:txXfrm>
-    </dsp:sp>
-    <dsp:sp modelId="{A95DB80B-444A-4D69-B205-3A801BB8524A}">
-      <dsp:nvSpPr>
-        <dsp:cNvPr id="0" name=""/>
-        <dsp:cNvSpPr/>
-      </dsp:nvSpPr>
-      <dsp:spPr>
-        <a:xfrm>
-          <a:off x="1090942" y="1599898"/>
-          <a:ext cx="0" cy="980582"/>
-        </a:xfrm>
-        <a:prstGeom prst="line">
-          <a:avLst/>
-        </a:prstGeom>
-        <a:noFill/>
-        <a:ln w="9525" cap="rnd" cmpd="sng" algn="ctr">
-          <a:solidFill>
-            <a:schemeClr val="accent4">
-              <a:hueOff val="0"/>
-              <a:satOff val="0"/>
-              <a:lumOff val="0"/>
-              <a:alphaOff val="0"/>
-            </a:schemeClr>
-          </a:solidFill>
-          <a:prstDash val="dash"/>
-        </a:ln>
-        <a:effectLst/>
-      </dsp:spPr>
-      <dsp:style>
-        <a:lnRef idx="1">
-          <a:scrgbClr r="0" g="0" b="0"/>
-        </a:lnRef>
-        <a:fillRef idx="0">
-          <a:scrgbClr r="0" g="0" b="0"/>
-        </a:fillRef>
-        <a:effectRef idx="0">
-          <a:scrgbClr r="0" g="0" b="0"/>
-        </a:effectRef>
-        <a:fontRef idx="minor"/>
-      </dsp:style>
-    </dsp:sp>
-    <dsp:sp modelId="{60D0713D-AF69-4AF8-B071-F65622790886}">
-      <dsp:nvSpPr>
-        <dsp:cNvPr id="0" name=""/>
-        <dsp:cNvSpPr/>
-      </dsp:nvSpPr>
-      <dsp:spPr>
-        <a:xfrm>
-          <a:off x="1395908" y="1806337"/>
-          <a:ext cx="1916928" cy="583188"/>
-        </a:xfrm>
-        <a:prstGeom prst="rect">
-          <a:avLst/>
-        </a:prstGeom>
-        <a:noFill/>
-        <a:ln>
-          <a:noFill/>
-        </a:ln>
-        <a:effectLst/>
-      </dsp:spPr>
-      <dsp:style>
-        <a:lnRef idx="0">
-          <a:scrgbClr r="0" g="0" b="0"/>
-        </a:lnRef>
-        <a:fillRef idx="0">
-          <a:scrgbClr r="0" g="0" b="0"/>
-        </a:fillRef>
-        <a:effectRef idx="0">
-          <a:scrgbClr r="0" g="0" b="0"/>
-        </a:effectRef>
-        <a:fontRef idx="minor"/>
-      </dsp:style>
-      <dsp:txBody>
-        <a:bodyPr spcFirstLastPara="0" vert="horz" wrap="square" lIns="0" tIns="0" rIns="0" bIns="0" numCol="1" spcCol="1270" anchor="b" anchorCtr="1">
-          <a:noAutofit/>
-        </a:bodyPr>
-        <a:lstStyle/>
-        <a:p>
-          <a:pPr marL="0" lvl="0" indent="0" algn="ctr" defTabSz="800100">
-            <a:lnSpc>
-              <a:spcPct val="90000"/>
-            </a:lnSpc>
-            <a:spcBef>
-              <a:spcPct val="0"/>
-            </a:spcBef>
-            <a:spcAft>
-              <a:spcPct val="35000"/>
-            </a:spcAft>
-            <a:buNone/>
-            <a:defRPr b="1"/>
-          </a:pPr>
-          <a:r>
-            <a:rPr lang="en-US" sz="1800" kern="1200" dirty="0">
-              <a:latin typeface="+mj-lt"/>
-            </a:rPr>
-            <a:t>Q4</a:t>
-          </a:r>
-        </a:p>
-      </dsp:txBody>
-      <dsp:txXfrm>
-        <a:off x="1395908" y="1806337"/>
-        <a:ext cx="1916928" cy="583188"/>
-      </dsp:txXfrm>
-    </dsp:sp>
-    <dsp:sp modelId="{FA19A0AA-8B0B-4AA8-A80D-08CFFDD3F112}">
-      <dsp:nvSpPr>
-        <dsp:cNvPr id="0" name=""/>
-        <dsp:cNvSpPr/>
-      </dsp:nvSpPr>
-      <dsp:spPr>
-        <a:xfrm>
-          <a:off x="1052235" y="2541774"/>
-          <a:ext cx="77414" cy="77414"/>
-        </a:xfrm>
-        <a:prstGeom prst="ellipse">
-          <a:avLst/>
-        </a:prstGeom>
-        <a:solidFill>
-          <a:schemeClr val="lt1">
-            <a:hueOff val="0"/>
-            <a:satOff val="0"/>
-            <a:lumOff val="0"/>
-            <a:alphaOff val="0"/>
-          </a:schemeClr>
-        </a:solidFill>
-        <a:ln w="15875" cap="rnd" cmpd="sng" algn="ctr">
-          <a:solidFill>
-            <a:schemeClr val="accent4">
-              <a:shade val="80000"/>
-              <a:hueOff val="0"/>
-              <a:satOff val="0"/>
-              <a:lumOff val="0"/>
-              <a:alphaOff val="0"/>
-            </a:schemeClr>
-          </a:solidFill>
-          <a:prstDash val="solid"/>
-        </a:ln>
-        <a:effectLst/>
-      </dsp:spPr>
-      <dsp:style>
-        <a:lnRef idx="2">
-          <a:scrgbClr r="0" g="0" b="0"/>
-        </a:lnRef>
-        <a:fillRef idx="1">
-          <a:scrgbClr r="0" g="0" b="0"/>
-        </a:fillRef>
-        <a:effectRef idx="0">
-          <a:scrgbClr r="0" g="0" b="0"/>
-        </a:effectRef>
-        <a:fontRef idx="minor">
-          <a:schemeClr val="lt1"/>
-        </a:fontRef>
-      </dsp:style>
-    </dsp:sp>
-    <dsp:sp modelId="{DADAA0C9-3E42-4088-8622-30E9F6EA139A}">
-      <dsp:nvSpPr>
-        <dsp:cNvPr id="0" name=""/>
-        <dsp:cNvSpPr/>
-      </dsp:nvSpPr>
-      <dsp:spPr>
-        <a:xfrm>
-          <a:off x="1265208" y="3561064"/>
-          <a:ext cx="2178327" cy="934940"/>
-        </a:xfrm>
-        <a:prstGeom prst="roundRect">
-          <a:avLst/>
-        </a:prstGeom>
-        <a:solidFill>
-          <a:schemeClr val="accent4">
-            <a:alpha val="90000"/>
-            <a:tint val="40000"/>
-            <a:hueOff val="0"/>
-            <a:satOff val="0"/>
-            <a:lumOff val="0"/>
-            <a:alphaOff val="0"/>
-          </a:schemeClr>
-        </a:solidFill>
-        <a:ln w="15875" cap="rnd" cmpd="sng" algn="ctr">
-          <a:solidFill>
-            <a:schemeClr val="accent4">
-              <a:hueOff val="0"/>
-              <a:satOff val="0"/>
-              <a:lumOff val="0"/>
-              <a:alphaOff val="0"/>
-            </a:schemeClr>
-          </a:solidFill>
-          <a:prstDash val="solid"/>
-        </a:ln>
-        <a:effectLst/>
-      </dsp:spPr>
-      <dsp:style>
-        <a:lnRef idx="2">
-          <a:scrgbClr r="0" g="0" b="0"/>
-        </a:lnRef>
-        <a:fillRef idx="1">
-          <a:scrgbClr r="0" g="0" b="0"/>
-        </a:fillRef>
-        <a:effectRef idx="0">
-          <a:scrgbClr r="0" g="0" b="0"/>
-        </a:effectRef>
-        <a:fontRef idx="minor"/>
-      </dsp:style>
-      <dsp:txBody>
-        <a:bodyPr spcFirstLastPara="0" vert="horz" wrap="square" lIns="160020" tIns="160020" rIns="160020" bIns="160020" numCol="1" spcCol="1270" anchor="ctr" anchorCtr="0">
-          <a:noAutofit/>
-        </a:bodyPr>
-        <a:lstStyle/>
-        <a:p>
-          <a:pPr marL="0" lvl="0" indent="0" algn="ctr" defTabSz="800100">
-            <a:lnSpc>
-              <a:spcPct val="90000"/>
-            </a:lnSpc>
-            <a:spcBef>
-              <a:spcPct val="0"/>
-            </a:spcBef>
-            <a:spcAft>
-              <a:spcPct val="35000"/>
-            </a:spcAft>
-            <a:buNone/>
-          </a:pPr>
-          <a:r>
-            <a:rPr lang="en-US" sz="1800" kern="1200" dirty="0">
-              <a:latin typeface="+mj-lt"/>
-            </a:rPr>
-            <a:t>Product development</a:t>
-          </a:r>
-        </a:p>
-      </dsp:txBody>
-      <dsp:txXfrm>
-        <a:off x="1310848" y="3606704"/>
-        <a:ext cx="2087047" cy="843660"/>
-      </dsp:txXfrm>
-    </dsp:sp>
-    <dsp:sp modelId="{DBD74D6B-057A-432C-9067-BF618C19EB2A}">
-      <dsp:nvSpPr>
-        <dsp:cNvPr id="0" name=""/>
-        <dsp:cNvSpPr/>
-      </dsp:nvSpPr>
-      <dsp:spPr>
-        <a:xfrm>
-          <a:off x="2354372" y="2580481"/>
-          <a:ext cx="0" cy="980582"/>
-        </a:xfrm>
-        <a:prstGeom prst="line">
-          <a:avLst/>
-        </a:prstGeom>
-        <a:noFill/>
-        <a:ln w="9525" cap="rnd" cmpd="sng" algn="ctr">
-          <a:solidFill>
-            <a:schemeClr val="accent4">
-              <a:hueOff val="0"/>
-              <a:satOff val="0"/>
-              <a:lumOff val="0"/>
-              <a:alphaOff val="0"/>
-            </a:schemeClr>
-          </a:solidFill>
-          <a:prstDash val="dash"/>
-        </a:ln>
-        <a:effectLst/>
-      </dsp:spPr>
-      <dsp:style>
-        <a:lnRef idx="1">
-          <a:scrgbClr r="0" g="0" b="0"/>
-        </a:lnRef>
-        <a:fillRef idx="0">
-          <a:scrgbClr r="0" g="0" b="0"/>
-        </a:fillRef>
-        <a:effectRef idx="0">
-          <a:scrgbClr r="0" g="0" b="0"/>
-        </a:effectRef>
-        <a:fontRef idx="minor"/>
-      </dsp:style>
-    </dsp:sp>
-    <dsp:sp modelId="{E712D073-0B15-4887-9DCE-A27BCACBC178}">
-      <dsp:nvSpPr>
-        <dsp:cNvPr id="0" name=""/>
-        <dsp:cNvSpPr/>
-      </dsp:nvSpPr>
-      <dsp:spPr>
-        <a:xfrm>
-          <a:off x="2659338" y="2771437"/>
-          <a:ext cx="1916928" cy="583188"/>
-        </a:xfrm>
-        <a:prstGeom prst="rect">
-          <a:avLst/>
-        </a:prstGeom>
-        <a:noFill/>
-        <a:ln>
-          <a:noFill/>
-        </a:ln>
-        <a:effectLst/>
-      </dsp:spPr>
-      <dsp:style>
-        <a:lnRef idx="0">
-          <a:scrgbClr r="0" g="0" b="0"/>
-        </a:lnRef>
-        <a:fillRef idx="0">
-          <a:scrgbClr r="0" g="0" b="0"/>
-        </a:fillRef>
-        <a:effectRef idx="0">
-          <a:scrgbClr r="0" g="0" b="0"/>
-        </a:effectRef>
-        <a:fontRef idx="minor"/>
-      </dsp:style>
-      <dsp:txBody>
-        <a:bodyPr spcFirstLastPara="0" vert="horz" wrap="square" lIns="0" tIns="0" rIns="0" bIns="0" numCol="1" spcCol="1270" anchor="t" anchorCtr="1">
-          <a:noAutofit/>
-        </a:bodyPr>
-        <a:lstStyle/>
-        <a:p>
-          <a:pPr marL="0" lvl="0" indent="0" algn="ctr" defTabSz="800100">
-            <a:lnSpc>
-              <a:spcPct val="90000"/>
-            </a:lnSpc>
-            <a:spcBef>
-              <a:spcPct val="0"/>
-            </a:spcBef>
-            <a:spcAft>
-              <a:spcPct val="35000"/>
-            </a:spcAft>
-            <a:buNone/>
-            <a:defRPr b="1"/>
-          </a:pPr>
-          <a:r>
-            <a:rPr lang="en-US" sz="1800" kern="1200" dirty="0">
-              <a:latin typeface="+mj-lt"/>
-            </a:rPr>
-            <a:t>Q1</a:t>
-          </a:r>
-        </a:p>
-      </dsp:txBody>
-      <dsp:txXfrm>
-        <a:off x="2659338" y="2771437"/>
-        <a:ext cx="1916928" cy="583188"/>
-      </dsp:txXfrm>
-    </dsp:sp>
-    <dsp:sp modelId="{0F979253-FD39-4920-BFCA-78C564B167EA}">
-      <dsp:nvSpPr>
-        <dsp:cNvPr id="0" name=""/>
-        <dsp:cNvSpPr/>
-      </dsp:nvSpPr>
-      <dsp:spPr>
-        <a:xfrm>
-          <a:off x="2315665" y="2541774"/>
-          <a:ext cx="77414" cy="77414"/>
-        </a:xfrm>
-        <a:prstGeom prst="ellipse">
-          <a:avLst/>
-        </a:prstGeom>
-        <a:solidFill>
-          <a:schemeClr val="lt1">
-            <a:hueOff val="0"/>
-            <a:satOff val="0"/>
-            <a:lumOff val="0"/>
-            <a:alphaOff val="0"/>
-          </a:schemeClr>
-        </a:solidFill>
-        <a:ln w="15875" cap="rnd" cmpd="sng" algn="ctr">
-          <a:solidFill>
-            <a:schemeClr val="accent4">
-              <a:shade val="80000"/>
-              <a:hueOff val="0"/>
-              <a:satOff val="0"/>
-              <a:lumOff val="0"/>
-              <a:alphaOff val="0"/>
-            </a:schemeClr>
-          </a:solidFill>
-          <a:prstDash val="solid"/>
-        </a:ln>
-        <a:effectLst/>
-      </dsp:spPr>
-      <dsp:style>
-        <a:lnRef idx="2">
-          <a:scrgbClr r="0" g="0" b="0"/>
-        </a:lnRef>
-        <a:fillRef idx="1">
-          <a:scrgbClr r="0" g="0" b="0"/>
-        </a:fillRef>
-        <a:effectRef idx="0">
-          <a:scrgbClr r="0" g="0" b="0"/>
-        </a:effectRef>
-        <a:fontRef idx="minor">
-          <a:schemeClr val="lt1"/>
-        </a:fontRef>
-      </dsp:style>
-    </dsp:sp>
-    <dsp:sp modelId="{E0D48281-565D-47A3-9B6C-576231178549}">
-      <dsp:nvSpPr>
-        <dsp:cNvPr id="0" name=""/>
-        <dsp:cNvSpPr/>
-      </dsp:nvSpPr>
-      <dsp:spPr>
-        <a:xfrm>
-          <a:off x="2528638" y="719954"/>
-          <a:ext cx="2178327" cy="879944"/>
-        </a:xfrm>
-        <a:prstGeom prst="roundRect">
-          <a:avLst/>
-        </a:prstGeom>
-        <a:solidFill>
-          <a:schemeClr val="accent4">
-            <a:alpha val="90000"/>
-            <a:tint val="40000"/>
-            <a:hueOff val="0"/>
-            <a:satOff val="0"/>
-            <a:lumOff val="0"/>
-            <a:alphaOff val="0"/>
-          </a:schemeClr>
-        </a:solidFill>
-        <a:ln w="15875" cap="rnd" cmpd="sng" algn="ctr">
-          <a:solidFill>
-            <a:schemeClr val="accent4">
-              <a:hueOff val="0"/>
-              <a:satOff val="0"/>
-              <a:lumOff val="0"/>
-              <a:alphaOff val="0"/>
-            </a:schemeClr>
-          </a:solidFill>
-          <a:prstDash val="solid"/>
-        </a:ln>
-        <a:effectLst/>
-      </dsp:spPr>
-      <dsp:style>
-        <a:lnRef idx="2">
-          <a:scrgbClr r="0" g="0" b="0"/>
-        </a:lnRef>
-        <a:fillRef idx="1">
-          <a:scrgbClr r="0" g="0" b="0"/>
-        </a:fillRef>
-        <a:effectRef idx="0">
-          <a:scrgbClr r="0" g="0" b="0"/>
-        </a:effectRef>
-        <a:fontRef idx="minor"/>
-      </dsp:style>
-      <dsp:txBody>
-        <a:bodyPr spcFirstLastPara="0" vert="horz" wrap="square" lIns="160020" tIns="160020" rIns="160020" bIns="160020" numCol="1" spcCol="1270" anchor="ctr" anchorCtr="0">
-          <a:noAutofit/>
-        </a:bodyPr>
-        <a:lstStyle/>
-        <a:p>
-          <a:pPr marL="0" lvl="0" indent="0" algn="ctr" defTabSz="800100">
-            <a:lnSpc>
-              <a:spcPct val="90000"/>
-            </a:lnSpc>
-            <a:spcBef>
-              <a:spcPct val="0"/>
-            </a:spcBef>
-            <a:spcAft>
-              <a:spcPct val="35000"/>
-            </a:spcAft>
-            <a:buNone/>
-          </a:pPr>
-          <a:r>
-            <a:rPr lang="en-US" sz="1800" kern="1200" dirty="0">
-              <a:latin typeface="+mj-lt"/>
-            </a:rPr>
-            <a:t> User testing</a:t>
-          </a:r>
-        </a:p>
-      </dsp:txBody>
-      <dsp:txXfrm>
-        <a:off x="2571593" y="762909"/>
-        <a:ext cx="2092417" cy="794034"/>
-      </dsp:txXfrm>
-    </dsp:sp>
-    <dsp:sp modelId="{DCAE8A46-752C-4E82-84CE-E790E1F2918E}">
-      <dsp:nvSpPr>
-        <dsp:cNvPr id="0" name=""/>
-        <dsp:cNvSpPr/>
-      </dsp:nvSpPr>
-      <dsp:spPr>
-        <a:xfrm>
-          <a:off x="3617802" y="1599898"/>
-          <a:ext cx="0" cy="980582"/>
-        </a:xfrm>
-        <a:prstGeom prst="line">
-          <a:avLst/>
-        </a:prstGeom>
-        <a:noFill/>
-        <a:ln w="9525" cap="rnd" cmpd="sng" algn="ctr">
-          <a:solidFill>
-            <a:schemeClr val="accent4">
-              <a:hueOff val="0"/>
-              <a:satOff val="0"/>
-              <a:lumOff val="0"/>
-              <a:alphaOff val="0"/>
-            </a:schemeClr>
-          </a:solidFill>
-          <a:prstDash val="dash"/>
-        </a:ln>
-        <a:effectLst/>
-      </dsp:spPr>
-      <dsp:style>
-        <a:lnRef idx="1">
-          <a:scrgbClr r="0" g="0" b="0"/>
-        </a:lnRef>
-        <a:fillRef idx="0">
-          <a:scrgbClr r="0" g="0" b="0"/>
-        </a:fillRef>
-        <a:effectRef idx="0">
-          <a:scrgbClr r="0" g="0" b="0"/>
-        </a:effectRef>
-        <a:fontRef idx="minor"/>
-      </dsp:style>
-    </dsp:sp>
-    <dsp:sp modelId="{F782935D-BBBD-4420-826A-F71C517659B6}">
-      <dsp:nvSpPr>
-        <dsp:cNvPr id="0" name=""/>
-        <dsp:cNvSpPr/>
-      </dsp:nvSpPr>
-      <dsp:spPr>
-        <a:xfrm>
-          <a:off x="3922768" y="1806337"/>
-          <a:ext cx="1916928" cy="583188"/>
-        </a:xfrm>
-        <a:prstGeom prst="rect">
-          <a:avLst/>
-        </a:prstGeom>
-        <a:noFill/>
-        <a:ln>
-          <a:noFill/>
-        </a:ln>
-        <a:effectLst/>
-      </dsp:spPr>
-      <dsp:style>
-        <a:lnRef idx="0">
-          <a:scrgbClr r="0" g="0" b="0"/>
-        </a:lnRef>
-        <a:fillRef idx="0">
-          <a:scrgbClr r="0" g="0" b="0"/>
-        </a:fillRef>
-        <a:effectRef idx="0">
-          <a:scrgbClr r="0" g="0" b="0"/>
-        </a:effectRef>
-        <a:fontRef idx="minor"/>
-      </dsp:style>
-      <dsp:txBody>
-        <a:bodyPr spcFirstLastPara="0" vert="horz" wrap="square" lIns="0" tIns="0" rIns="0" bIns="0" numCol="1" spcCol="1270" anchor="b" anchorCtr="1">
-          <a:noAutofit/>
-        </a:bodyPr>
-        <a:lstStyle/>
-        <a:p>
-          <a:pPr marL="0" lvl="0" indent="0" algn="ctr" defTabSz="800100">
-            <a:lnSpc>
-              <a:spcPct val="90000"/>
-            </a:lnSpc>
-            <a:spcBef>
-              <a:spcPct val="0"/>
-            </a:spcBef>
-            <a:spcAft>
-              <a:spcPct val="35000"/>
-            </a:spcAft>
-            <a:buNone/>
-            <a:defRPr b="1"/>
-          </a:pPr>
-          <a:r>
-            <a:rPr lang="en-US" sz="1800" kern="1200" dirty="0">
-              <a:latin typeface="+mj-lt"/>
-            </a:rPr>
-            <a:t>Q2</a:t>
-          </a:r>
-        </a:p>
-      </dsp:txBody>
-      <dsp:txXfrm>
-        <a:off x="3922768" y="1806337"/>
-        <a:ext cx="1916928" cy="583188"/>
-      </dsp:txXfrm>
-    </dsp:sp>
-    <dsp:sp modelId="{B6459BF8-D2C3-4018-9C28-98667DC203F4}">
-      <dsp:nvSpPr>
-        <dsp:cNvPr id="0" name=""/>
-        <dsp:cNvSpPr/>
-      </dsp:nvSpPr>
-      <dsp:spPr>
-        <a:xfrm>
-          <a:off x="3579095" y="2541774"/>
-          <a:ext cx="77414" cy="77414"/>
-        </a:xfrm>
-        <a:prstGeom prst="ellipse">
-          <a:avLst/>
-        </a:prstGeom>
-        <a:solidFill>
-          <a:schemeClr val="lt1">
-            <a:hueOff val="0"/>
-            <a:satOff val="0"/>
-            <a:lumOff val="0"/>
-            <a:alphaOff val="0"/>
-          </a:schemeClr>
-        </a:solidFill>
-        <a:ln w="15875" cap="rnd" cmpd="sng" algn="ctr">
-          <a:solidFill>
-            <a:schemeClr val="accent4">
-              <a:shade val="80000"/>
-              <a:hueOff val="0"/>
-              <a:satOff val="0"/>
-              <a:lumOff val="0"/>
-              <a:alphaOff val="0"/>
-            </a:schemeClr>
-          </a:solidFill>
-          <a:prstDash val="solid"/>
-        </a:ln>
-        <a:effectLst/>
-      </dsp:spPr>
-      <dsp:style>
-        <a:lnRef idx="2">
-          <a:scrgbClr r="0" g="0" b="0"/>
-        </a:lnRef>
-        <a:fillRef idx="1">
-          <a:scrgbClr r="0" g="0" b="0"/>
-        </a:fillRef>
-        <a:effectRef idx="0">
-          <a:scrgbClr r="0" g="0" b="0"/>
-        </a:effectRef>
-        <a:fontRef idx="minor">
-          <a:schemeClr val="lt1"/>
-        </a:fontRef>
-      </dsp:style>
-    </dsp:sp>
-    <dsp:sp modelId="{6C3A59BD-6D45-4573-B098-8CB5207F194D}">
-      <dsp:nvSpPr>
-        <dsp:cNvPr id="0" name=""/>
-        <dsp:cNvSpPr/>
-      </dsp:nvSpPr>
-      <dsp:spPr>
-        <a:xfrm>
-          <a:off x="3792068" y="3561064"/>
-          <a:ext cx="2178327" cy="879944"/>
-        </a:xfrm>
-        <a:prstGeom prst="roundRect">
-          <a:avLst/>
-        </a:prstGeom>
-        <a:solidFill>
-          <a:schemeClr val="accent4">
-            <a:alpha val="90000"/>
-            <a:tint val="40000"/>
-            <a:hueOff val="0"/>
-            <a:satOff val="0"/>
-            <a:lumOff val="0"/>
-            <a:alphaOff val="0"/>
-          </a:schemeClr>
-        </a:solidFill>
-        <a:ln w="15875" cap="rnd" cmpd="sng" algn="ctr">
-          <a:solidFill>
-            <a:schemeClr val="accent4">
-              <a:hueOff val="0"/>
-              <a:satOff val="0"/>
-              <a:lumOff val="0"/>
-              <a:alphaOff val="0"/>
-            </a:schemeClr>
-          </a:solidFill>
-          <a:prstDash val="solid"/>
-        </a:ln>
-        <a:effectLst/>
-      </dsp:spPr>
-      <dsp:style>
-        <a:lnRef idx="2">
-          <a:scrgbClr r="0" g="0" b="0"/>
-        </a:lnRef>
-        <a:fillRef idx="1">
-          <a:scrgbClr r="0" g="0" b="0"/>
-        </a:fillRef>
-        <a:effectRef idx="0">
-          <a:scrgbClr r="0" g="0" b="0"/>
-        </a:effectRef>
-        <a:fontRef idx="minor"/>
-      </dsp:style>
-      <dsp:txBody>
-        <a:bodyPr spcFirstLastPara="0" vert="horz" wrap="square" lIns="160020" tIns="160020" rIns="160020" bIns="160020" numCol="1" spcCol="1270" anchor="ctr" anchorCtr="0">
-          <a:noAutofit/>
-        </a:bodyPr>
-        <a:lstStyle/>
-        <a:p>
-          <a:pPr marL="0" lvl="0" indent="0" algn="ctr" defTabSz="800100">
-            <a:lnSpc>
-              <a:spcPct val="90000"/>
-            </a:lnSpc>
-            <a:spcBef>
-              <a:spcPct val="0"/>
-            </a:spcBef>
-            <a:spcAft>
-              <a:spcPct val="35000"/>
-            </a:spcAft>
-            <a:buNone/>
-          </a:pPr>
-          <a:r>
-            <a:rPr lang="en-US" sz="1800" kern="1200" dirty="0">
-              <a:latin typeface="+mj-lt"/>
-            </a:rPr>
-            <a:t>Product launch</a:t>
-          </a:r>
-        </a:p>
-      </dsp:txBody>
-      <dsp:txXfrm>
-        <a:off x="3835023" y="3604019"/>
-        <a:ext cx="2092417" cy="794034"/>
-      </dsp:txXfrm>
-    </dsp:sp>
-    <dsp:sp modelId="{086FB9B1-82B2-4197-8B33-6E7FF94F8D2E}">
-      <dsp:nvSpPr>
-        <dsp:cNvPr id="0" name=""/>
-        <dsp:cNvSpPr/>
-      </dsp:nvSpPr>
-      <dsp:spPr>
-        <a:xfrm>
-          <a:off x="4881232" y="2580481"/>
-          <a:ext cx="0" cy="980582"/>
-        </a:xfrm>
-        <a:prstGeom prst="line">
-          <a:avLst/>
-        </a:prstGeom>
-        <a:noFill/>
-        <a:ln w="9525" cap="rnd" cmpd="sng" algn="ctr">
-          <a:solidFill>
-            <a:schemeClr val="accent4">
-              <a:hueOff val="0"/>
-              <a:satOff val="0"/>
-              <a:lumOff val="0"/>
-              <a:alphaOff val="0"/>
-            </a:schemeClr>
-          </a:solidFill>
-          <a:prstDash val="dash"/>
-        </a:ln>
-        <a:effectLst/>
-      </dsp:spPr>
-      <dsp:style>
-        <a:lnRef idx="1">
-          <a:scrgbClr r="0" g="0" b="0"/>
-        </a:lnRef>
-        <a:fillRef idx="0">
-          <a:scrgbClr r="0" g="0" b="0"/>
-        </a:fillRef>
-        <a:effectRef idx="0">
-          <a:scrgbClr r="0" g="0" b="0"/>
-        </a:effectRef>
-        <a:fontRef idx="minor"/>
-      </dsp:style>
-    </dsp:sp>
-    <dsp:sp modelId="{3F359E8B-7C7E-4FD9-B106-36CCBFC731D5}">
-      <dsp:nvSpPr>
-        <dsp:cNvPr id="0" name=""/>
-        <dsp:cNvSpPr/>
-      </dsp:nvSpPr>
-      <dsp:spPr>
-        <a:xfrm>
-          <a:off x="4842525" y="2541774"/>
-          <a:ext cx="77414" cy="77414"/>
-        </a:xfrm>
-        <a:prstGeom prst="ellipse">
-          <a:avLst/>
-        </a:prstGeom>
-        <a:solidFill>
-          <a:schemeClr val="lt1">
-            <a:hueOff val="0"/>
-            <a:satOff val="0"/>
-            <a:lumOff val="0"/>
-            <a:alphaOff val="0"/>
-          </a:schemeClr>
-        </a:solidFill>
-        <a:ln w="15875" cap="rnd" cmpd="sng" algn="ctr">
-          <a:solidFill>
-            <a:schemeClr val="accent4">
-              <a:shade val="80000"/>
-              <a:hueOff val="0"/>
-              <a:satOff val="0"/>
-              <a:lumOff val="0"/>
-              <a:alphaOff val="0"/>
-            </a:schemeClr>
-          </a:solidFill>
-          <a:prstDash val="solid"/>
-        </a:ln>
-        <a:effectLst/>
-      </dsp:spPr>
-      <dsp:style>
-        <a:lnRef idx="2">
-          <a:scrgbClr r="0" g="0" b="0"/>
-        </a:lnRef>
-        <a:fillRef idx="1">
-          <a:scrgbClr r="0" g="0" b="0"/>
-        </a:fillRef>
-        <a:effectRef idx="0">
-          <a:scrgbClr r="0" g="0" b="0"/>
-        </a:effectRef>
-        <a:fontRef idx="minor">
-          <a:schemeClr val="lt1"/>
-        </a:fontRef>
-      </dsp:style>
-    </dsp:sp>
-  </dsp:spTree>
-</dsp:drawing>
-</file>
-
-<file path=ppt/diagrams/layout1.xml><?xml version="1.0" encoding="utf-8"?>
-<dgm:layoutDef xmlns:dgm="http://schemas.openxmlformats.org/drawingml/2006/diagram" xmlns:a="http://schemas.openxmlformats.org/drawingml/2006/main" uniqueId="urn:microsoft.com/office/officeart/2016/7/layout/BasicTimeline">
-  <dgm:title val="Basic Timeline"/>
-  <dgm:desc val="Use to show a list of events in chronological order. The rounded rectangular shape contains the description while the date is shown below on the time line. It's the perfect SmartArt for displaying large amount of text with a medium date format."/>
-  <dgm:catLst>
-    <dgm:cat type="timeline" pri="500"/>
-    <dgm:cat type="process" pri="600"/>
-  </dgm:catLst>
-  <dgm:sampData>
-    <dgm:dataModel>
-      <dgm:ptLst>
-        <dgm:pt modelId="0" type="doc"/>
-        <dgm:pt modelId="10">
-          <dgm:prSet phldr="1"/>
-        </dgm:pt>
-        <dgm:pt modelId="11">
-          <dgm:prSet phldr="1"/>
-        </dgm:pt>
-        <dgm:pt modelId="20">
-          <dgm:prSet phldr="1"/>
-        </dgm:pt>
-        <dgm:pt modelId="21">
-          <dgm:prSet phldr="1"/>
-        </dgm:pt>
-        <dgm:pt modelId="30">
-          <dgm:prSet phldr="1"/>
-        </dgm:pt>
-        <dgm:pt modelId="31">
-          <dgm:prSet phldr="1"/>
-        </dgm:pt>
-      </dgm:ptLst>
-      <dgm:cxnLst>
-        <dgm:cxn modelId="40" srcId="0" destId="10" srcOrd="0" destOrd="0"/>
-        <dgm:cxn modelId="12" srcId="10" destId="11" srcOrd="0" destOrd="0"/>
-        <dgm:cxn modelId="50" srcId="0" destId="20" srcOrd="1" destOrd="0"/>
-        <dgm:cxn modelId="22" srcId="20" destId="21" srcOrd="0" destOrd="0"/>
-        <dgm:cxn modelId="60" srcId="0" destId="30" srcOrd="1" destOrd="0"/>
-        <dgm:cxn modelId="32" srcId="30" destId="31" srcOrd="0" destOrd="0"/>
-      </dgm:cxnLst>
-      <dgm:bg/>
-      <dgm:whole/>
-    </dgm:dataModel>
-  </dgm:sampData>
-  <dgm:styleData>
-    <dgm:dataModel>
-      <dgm:ptLst>
-        <dgm:pt modelId="0" type="doc"/>
-        <dgm:pt modelId="10">
-          <dgm:prSet phldr="1"/>
-        </dgm:pt>
-        <dgm:pt modelId="20">
-          <dgm:prSet phldr="1"/>
-        </dgm:pt>
-      </dgm:ptLst>
-      <dgm:cxnLst>
-        <dgm:cxn modelId="60" srcId="0" destId="10" srcOrd="0" destOrd="0"/>
-        <dgm:cxn modelId="70" srcId="0" destId="20" srcOrd="1" destOrd="0"/>
-      </dgm:cxnLst>
-      <dgm:bg/>
-      <dgm:whole/>
-    </dgm:dataModel>
-  </dgm:styleData>
-  <dgm:clrData>
-    <dgm:dataModel>
-      <dgm:ptLst>
-        <dgm:pt modelId="0" type="doc"/>
-        <dgm:pt modelId="10">
-          <dgm:prSet phldr="1"/>
-        </dgm:pt>
-        <dgm:pt modelId="20">
-          <dgm:prSet phldr="1"/>
-        </dgm:pt>
-        <dgm:pt modelId="30">
-          <dgm:prSet phldr="1"/>
-        </dgm:pt>
-        <dgm:pt modelId="40">
-          <dgm:prSet phldr="1"/>
-        </dgm:pt>
-      </dgm:ptLst>
-      <dgm:cxnLst>
-        <dgm:cxn modelId="60" srcId="0" destId="10" srcOrd="0" destOrd="0"/>
-        <dgm:cxn modelId="70" srcId="0" destId="20" srcOrd="1" destOrd="0"/>
-        <dgm:cxn modelId="80" srcId="0" destId="30" srcOrd="2" destOrd="0"/>
-        <dgm:cxn modelId="90" srcId="0" destId="40" srcOrd="3" destOrd="0"/>
-      </dgm:cxnLst>
-      <dgm:bg/>
-      <dgm:whole/>
-    </dgm:dataModel>
-  </dgm:clrData>
-  <dgm:layoutNode name="root">
-    <dgm:varLst>
-      <dgm:chMax/>
-      <dgm:chPref/>
-      <dgm:animLvl val="lvl"/>
-    </dgm:varLst>
-    <dgm:alg type="composite"/>
-    <dgm:shape xmlns:r="http://schemas.openxmlformats.org/officeDocument/2006/relationships" r:blip="">
-      <dgm:adjLst/>
-    </dgm:shape>
-    <dgm:constrLst>
-      <dgm:constr type="w" for="ch" forName="divider" refType="w"/>
-      <dgm:constr type="h" for="ch" forName="divider"/>
-      <dgm:constr type="ctrY" for="ch" forName="divider" refType="h" fact="0.5"/>
-      <dgm:constr type="l" for="ch" forName="divider"/>
-      <dgm:constr type="w" for="ch" forName="nodes" refType="w"/>
-      <dgm:constr type="h" for="ch" forName="nodes" refType="h"/>
-    </dgm:constrLst>
-    <dgm:layoutNode name="divider" styleLbl="fgAccFollowNode1">
-      <dgm:alg type="sp"/>
-      <dgm:choose name="ArrowShape">
-        <dgm:if name="ArrowShapeLTR" func="var" arg="dir" op="equ" val="norm">
-          <dgm:shape xmlns:r="http://schemas.openxmlformats.org/officeDocument/2006/relationships" type="line" r:blip="" zOrderOff="-1">
-            <dgm:adjLst/>
-            <dgm:extLst>
-              <a:ext uri="{B698B0E9-8C71-41B9-8309-B3DCBF30829C}">
-                <dgm1612:spPr xmlns:dgm1612="http://schemas.microsoft.com/office/drawing/2016/12/diagram">
-                  <a:ln>
-                    <a:tailEnd type="triangle" w="lg" len="lg"/>
-                  </a:ln>
-                </dgm1612:spPr>
-              </a:ext>
-            </dgm:extLst>
-          </dgm:shape>
-        </dgm:if>
-        <dgm:else name="ArrowShapeRTL">
-          <dgm:shape xmlns:r="http://schemas.openxmlformats.org/officeDocument/2006/relationships" type="line" r:blip="" zOrderOff="-1">
-            <dgm:adjLst/>
-            <dgm:extLst>
-              <a:ext uri="{B698B0E9-8C71-41B9-8309-B3DCBF30829C}">
-                <dgm1612:spPr xmlns:dgm1612="http://schemas.microsoft.com/office/drawing/2016/12/diagram">
-                  <a:ln>
-                    <a:headEnd type="triangle" w="lg" len="lg"/>
-                  </a:ln>
-                </dgm1612:spPr>
-              </a:ext>
-            </dgm:extLst>
-          </dgm:shape>
-        </dgm:else>
-      </dgm:choose>
-      <dgm:presOf/>
-      <dgm:constrLst/>
-      <dgm:ruleLst/>
-    </dgm:layoutNode>
-    <dgm:layoutNode name="nodes">
-      <dgm:varLst>
-        <dgm:chMax/>
-        <dgm:chPref/>
-        <dgm:animLvl val="lvl"/>
-      </dgm:varLst>
-      <dgm:choose name="Name1">
-        <dgm:if name="Name2" func="var" arg="dir" op="equ" val="norm">
-          <dgm:alg type="lin"/>
-        </dgm:if>
-        <dgm:else name="Name3">
-          <dgm:alg type="lin">
-            <dgm:param type="linDir" val="fromR"/>
-          </dgm:alg>
-        </dgm:else>
-      </dgm:choose>
-      <dgm:presOf/>
-      <dgm:shape xmlns:r="http://schemas.openxmlformats.org/officeDocument/2006/relationships" r:blip="">
-        <dgm:adjLst/>
-      </dgm:shape>
-      <dgm:choose name="constrBasedOnChildrenCount">
-        <dgm:if name="constrForTwoChildren" axis="ch" ptType="node" func="cnt" op="lte" val="2">
-          <dgm:constrLst>
-            <dgm:constr type="primFontSz" for="des" forName="L1TextContainer" val="20"/>
-            <dgm:constr type="primFontSz" for="des" forName="L2TextContainer" refType="primFontSz" refFor="des" refForName="L1TextContainer" op="equ" fact="0.85"/>
-            <dgm:constr type="w" for="ch" forName="composite" refType="w"/>
-            <dgm:constr type="h" for="ch" forName="composite" refType="h"/>
-            <dgm:constr type="w" for="ch" forName="spaceBetweenRectangles" refType="w" refFor="ch" refForName="composite" fact="0.16"/>
-            <dgm:constr type="w" for="ch" ptType="sibTrans" op="equ"/>
-            <dgm:constr type="primFontSz" for="des" forName="L1TextContainer" op="equ"/>
-            <dgm:constr type="primFontSz" for="des" forName="L2TextContainer" op="equ"/>
-          </dgm:constrLst>
-        </dgm:if>
-        <dgm:else name="constrForRest">
-          <dgm:constrLst>
-            <dgm:constr type="primFontSz" for="des" forName="L1TextContainer" val="20"/>
-            <dgm:constr type="primFontSz" for="des" forName="L2TextContainer" refType="primFontSz" refFor="des" refForName="L1TextContainer" op="equ" fact="0.85"/>
-            <dgm:constr type="w" for="ch" forName="composite" refType="w"/>
-            <dgm:constr type="h" for="ch" forName="composite" refType="h"/>
-            <dgm:constr type="w" for="ch" forName="spaceBetweenRectangles" refType="w" refFor="ch" refForName="composite" fact="-0.42"/>
-            <dgm:constr type="w" for="ch" ptType="sibTrans" op="equ"/>
-            <dgm:constr type="primFontSz" for="des" forName="L1TextContainer" op="equ"/>
-            <dgm:constr type="primFontSz" for="des" forName="L2TextContainer" op="equ"/>
-          </dgm:constrLst>
-        </dgm:else>
-      </dgm:choose>
-      <dgm:forEach name="nodesForEach" axis="ch" ptType="node">
-        <dgm:layoutNode name="composite">
-          <dgm:alg type="composite"/>
-          <dgm:shape xmlns:r="http://schemas.openxmlformats.org/officeDocument/2006/relationships" r:blip="">
-            <dgm:adjLst/>
-          </dgm:shape>
-          <dgm:choose name="CaseForPlacingNodesAboveAndBelowDivider">
-            <dgm:if name="CaseForPlacingNodeAboveDivider" axis="self" ptType="node" func="posOdd" op="equ" val="1">
-              <dgm:constrLst>
-                <dgm:constr type="w" for="ch" forName="L1TextContainer" refType="w" fact="0.88"/>
-                <dgm:constr type="l" for="ch" forName="L1TextContainer" refType="w" fact="0.06"/>
-                <dgm:constr type="t" for="ch" forName="L1TextContainer" refType="h" fact="0.537"/>
-                <dgm:constr type="h" for="ch" forName="L1TextContainer" refType="h" fact="0.113"/>
-                <dgm:constr type="w" for="ch" forName="L2TextContainerWrapper" refType="w"/>
-                <dgm:constr type="h" for="ch" forName="L2TextContainerWrapper" refType="h" fact="0.31"/>
-                <dgm:constr type="b" for="ch" forName="L2TextContainerWrapper" refType="h" fact="0.31"/>
-                <dgm:constr type="w" for="ch" forName="ConnectLine"/>
-                <dgm:constr type="l" for="ch" forName="ConnectLine" refType="w" fact="0.5"/>
-                <dgm:constr type="h" for="ch" forName="ConnectLine" refType="h" fact="0.19"/>
-                <dgm:constr type="t" for="ch" forName="ConnectLine" refType="h" fact="0.31"/>
-                <dgm:constr type="w" for="ch" forName="ConnectorPoint" refType="h" fact="0.015"/>
-                <dgm:constr type="h" for="ch" forName="ConnectorPoint" refType="h" fact="0.015"/>
-                <dgm:constr type="ctrX" for="ch" forName="ConnectorPoint" refType="w" fact="0.5"/>
-                <dgm:constr type="ctrY" for="ch" forName="ConnectorPoint" refType="h" fact="0.5"/>
-                <dgm:constr type="w" for="ch" forName="EmptyPlaceHolder" refType="w"/>
-                <dgm:constr type="t" for="ch" forName="EmptyPlaceHolder" refType="h" fact="0.65"/>
-                <dgm:constr type="h" for="ch" forName="EmptyPlaceHolder" refType="h" fact="0.35"/>
-              </dgm:constrLst>
-            </dgm:if>
-            <dgm:else name="CaseForPlacingNodeBelowDivider">
-              <dgm:constrLst>
-                <dgm:constr type="w" for="ch" forName="L1TextContainer" refType="w" fact="0.88"/>
-                <dgm:constr type="l" for="ch" forName="L1TextContainer" refType="w" fact="0.06"/>
-                <dgm:constr type="t" for="ch" forName="L1TextContainer" refType="h" fact="0.35"/>
-                <dgm:constr type="h" for="ch" forName="L1TextContainer" refType="h" fact="0.113"/>
-                <dgm:constr type="w" for="ch" forName="L2TextContainerWrapper" refType="w"/>
-                <dgm:constr type="h" for="ch" forName="L2TextContainerWrapper" refType="h" fact="0.31"/>
-                <dgm:constr type="t" for="ch" forName="L2TextContainerWrapper" refType="h" fact="0.69"/>
-                <dgm:constr type="w" for="ch" forName="ConnectLine"/>
-                <dgm:constr type="l" for="ch" forName="ConnectLine" refType="w" fact="0.5"/>
-                <dgm:constr type="h" for="ch" forName="ConnectLine" refType="h" fact="0.19"/>
-                <dgm:constr type="t" for="ch" forName="ConnectLine" refType="h" fact="0.5"/>
-                <dgm:constr type="w" for="ch" forName="ConnectorPoint" refType="h" fact="0.015"/>
-                <dgm:constr type="h" for="ch" forName="ConnectorPoint" refType="h" fact="0.015"/>
-                <dgm:constr type="ctrX" for="ch" forName="ConnectorPoint" refType="w" fact="0.5"/>
-                <dgm:constr type="ctrY" for="ch" forName="ConnectorPoint" refType="h" fact="0.5"/>
-                <dgm:constr type="w" for="ch" forName="EmptyPlaceHolder" refType="w"/>
-                <dgm:constr type="h" for="ch" forName="EmptyPlaceHolder" refType="h" fact="0.35"/>
-                <dgm:constr type="t" for="ch" forName="EmptyPlaceHolder" refType="h" fact="0"/>
-              </dgm:constrLst>
-            </dgm:else>
-          </dgm:choose>
-          <dgm:layoutNode name="L1TextContainer" styleLbl="revTx">
-            <dgm:varLst>
-              <dgm:chMax val="1"/>
-              <dgm:chPref val="1"/>
-              <dgm:bulletEnabled val="1"/>
-            </dgm:varLst>
-            <dgm:choose name="casesForTxtDirLogic">
-              <dgm:if name="Name78" axis="self" ptType="node" func="posOdd" op="equ" val="1">
-                <dgm:alg type="tx">
-                  <dgm:param type="txAnchorHorz" val="ctr"/>
-                  <dgm:param type="txAnchorVert" val="t"/>
-                  <dgm:param type="parTxLTRAlign" val="ctr"/>
-                  <dgm:param type="parTxRTLAlign" val="ctr"/>
-                </dgm:alg>
-              </dgm:if>
-              <dgm:else name="Name89">
-                <dgm:alg type="tx">
-                  <dgm:param type="txAnchorHorz" val="ctr"/>
-                  <dgm:param type="txAnchorVert" val="b"/>
-                  <dgm:param type="parTxLTRAlign" val="ctr"/>
-                  <dgm:param type="parTxRTLAlign" val="ctr"/>
-                </dgm:alg>
-              </dgm:else>
-            </dgm:choose>
-            <dgm:shape xmlns:r="http://schemas.openxmlformats.org/officeDocument/2006/relationships" type="rect" r:blip="">
-              <dgm:adjLst/>
-            </dgm:shape>
-            <dgm:presOf axis="self"/>
-            <dgm:constrLst>
-              <dgm:constr type="lMarg"/>
-              <dgm:constr type="rMarg"/>
-              <dgm:constr type="tMarg"/>
-              <dgm:constr type="bMarg"/>
-            </dgm:constrLst>
-            <dgm:ruleLst>
-              <dgm:rule type="primFontSz" val="14" fact="NaN" max="NaN"/>
-            </dgm:ruleLst>
-          </dgm:layoutNode>
-          <dgm:layoutNode name="L2TextContainerWrapper">
-            <dgm:varLst>
-              <dgm:chMax val="0"/>
-              <dgm:chPref val="0"/>
-              <dgm:bulletEnabled val="1"/>
-            </dgm:varLst>
-            <dgm:alg type="composite"/>
-            <dgm:choose name="L2TextContainerConstr">
-              <dgm:if name="CaseForPlacingL2TextContaineAboveDivider" axis="self" ptType="node" func="posOdd" op="equ" val="1">
-                <dgm:constrLst>
-                  <dgm:constr type="h" for="ch" forName="L2TextContainer" refType="h" fact="0.55"/>
-                  <dgm:constr type="b" for="ch" forName="L2TextContainer" refType="h"/>
-                  <dgm:constr type="h" for="ch" forName="FlexibleEmptyPlaceHolder" refType="h" fact="0.45"/>
-                </dgm:constrLst>
-              </dgm:if>
-              <dgm:else name="CaseForPlacingL2TextContaineBelowDivider">
-                <dgm:constrLst>
-                  <dgm:constr type="h" for="ch" forName="L2TextContainer" refType="h" fact="0.55"/>
-                  <dgm:constr type="h" for="ch" forName="FlexibleEmptyPlaceHolder" refType="h" fact="0.45"/>
-                  <dgm:constr type="b" for="ch" forName="FlexibleEmptyPlaceHolder" refType="h"/>
-                </dgm:constrLst>
-              </dgm:else>
-            </dgm:choose>
-            <dgm:layoutNode name="L2TextContainer" styleLbl="bgAcc1">
-              <dgm:choose name="L2TextContainerAlgo">
-                <dgm:if name="L2TextContainerAlgoLTR" func="var" arg="dir" op="equ" val="norm">
-                  <dgm:alg type="tx">
-                    <dgm:param type="txAnchorVert" val="mid"/>
-                    <dgm:param type="parTxRTLAlign" val="l"/>
-                    <dgm:param type="parTxLTRAlign" val="l"/>
-                    <dgm:param type="txAnchorVertCh" val="mid"/>
-                    <dgm:param type="shpTxRTLAlignCh" val="l"/>
-                    <dgm:param type="shpTxLTRAlignCh" val="l"/>
-                  </dgm:alg>
-                </dgm:if>
-                <dgm:else name="L2TextContainerAlgoRTL">
-                  <dgm:alg type="tx">
-                    <dgm:param type="txAnchorVert" val="mid"/>
-                    <dgm:param type="parTxRTLAlign" val="r"/>
-                    <dgm:param type="parTxLTRAlign" val="r"/>
-                    <dgm:param type="txAnchorVertCh" val="mid"/>
-                    <dgm:param type="shpTxRTLAlignCh" val="r"/>
-                    <dgm:param type="shpTxLTRAlignCh" val="r"/>
-                  </dgm:alg>
-                </dgm:else>
-              </dgm:choose>
-              <dgm:shape xmlns:r="http://schemas.openxmlformats.org/officeDocument/2006/relationships" type="roundRect" r:blip="">
-                <dgm:adjLst/>
-              </dgm:shape>
-              <dgm:presOf axis="des" ptType="node"/>
-              <dgm:constrLst>
-                <dgm:constr type="primFontSz" val="17"/>
-                <dgm:constr type="lMarg" refType="primFontSz" fact="0.7"/>
-                <dgm:constr type="rMarg" refType="primFontSz" fact="0.7"/>
-                <dgm:constr type="tMarg" refType="primFontSz" fact="0.7"/>
-                <dgm:constr type="bMarg" refType="primFontSz" fact="0.7"/>
-              </dgm:constrLst>
-              <dgm:ruleLst>
-                <dgm:rule type="primFontSz" val="12" fact="NaN" max="NaN"/>
-                <dgm:rule type="secFontSz" val="10" fact="NaN" max="NaN"/>
-                <dgm:rule type="h" val="INF" fact="NaN" max="NaN"/>
-              </dgm:ruleLst>
-            </dgm:layoutNode>
-            <dgm:layoutNode name="FlexibleEmptyPlaceHolder">
-              <dgm:alg type="sp"/>
-              <dgm:shape xmlns:r="http://schemas.openxmlformats.org/officeDocument/2006/relationships" r:blip="">
-                <dgm:adjLst/>
-              </dgm:shape>
-              <dgm:presOf/>
-              <dgm:constrLst/>
-            </dgm:layoutNode>
-          </dgm:layoutNode>
-          <dgm:layoutNode name="ConnectLine" styleLbl="sibTrans1D1" moveWith="L2TextContainer">
-            <dgm:alg type="sp"/>
-            <dgm:shape xmlns:r="http://schemas.openxmlformats.org/officeDocument/2006/relationships" type="line" r:blip="">
-              <dgm:adjLst/>
-              <dgm:extLst>
-                <a:ext uri="{B698B0E9-8C71-41B9-8309-B3DCBF30829C}">
-                  <dgm1612:spPr xmlns:dgm1612="http://schemas.microsoft.com/office/drawing/2016/12/diagram">
-                    <a:ln>
-                      <a:prstDash val="dash"/>
-                    </a:ln>
-                  </dgm1612:spPr>
-                </a:ext>
-              </dgm:extLst>
-            </dgm:shape>
-            <dgm:presOf/>
-            <dgm:constrLst/>
-          </dgm:layoutNode>
-          <dgm:layoutNode name="ConnectorPoint" styleLbl="alignNode1" moveWith="L2TextContainer">
-            <dgm:alg type="sp"/>
-            <dgm:shape xmlns:r="http://schemas.openxmlformats.org/officeDocument/2006/relationships" type="ellipse" r:blip="" zOrderOff="1">
-              <dgm:adjLst/>
-            </dgm:shape>
-            <dgm:presOf/>
-            <dgm:constrLst/>
-          </dgm:layoutNode>
-          <dgm:layoutNode name="EmptyPlaceHolder">
-            <dgm:alg type="sp"/>
-            <dgm:shape xmlns:r="http://schemas.openxmlformats.org/officeDocument/2006/relationships" r:blip="">
-              <dgm:adjLst/>
-            </dgm:shape>
-            <dgm:presOf/>
-            <dgm:constrLst/>
-          </dgm:layoutNode>
-        </dgm:layoutNode>
-        <dgm:forEach name="Name28" axis="followSib" ptType="sibTrans" cnt="1">
-          <dgm:layoutNode name="spaceBetweenRectangles">
-            <dgm:alg type="sp"/>
-            <dgm:shape xmlns:r="http://schemas.openxmlformats.org/officeDocument/2006/relationships" r:blip="">
-              <dgm:adjLst/>
-            </dgm:shape>
-            <dgm:presOf/>
-            <dgm:constrLst/>
-            <dgm:ruleLst/>
-          </dgm:layoutNode>
-        </dgm:forEach>
-      </dgm:forEach>
-    </dgm:layoutNode>
-  </dgm:layoutNode>
-  <dgm:extLst>
-    <a:ext uri="{68A01E43-0DF5-4B5B-8FA6-DAF915123BFB}">
-      <dgm1612:lstStyle xmlns:dgm1612="http://schemas.microsoft.com/office/drawing/2016/12/diagram">
-        <a:lvl1pPr>
-          <a:defRPr b="1"/>
-        </a:lvl1pPr>
-      </dgm1612:lstStyle>
-    </a:ext>
-  </dgm:extLst>
-</dgm:layoutDef>
-</file>
-
-<file path=ppt/diagrams/quickStyle1.xml><?xml version="1.0" encoding="utf-8"?>
-<dgm:styleDef xmlns:dgm="http://schemas.openxmlformats.org/drawingml/2006/diagram" xmlns:a="http://schemas.openxmlformats.org/drawingml/2006/main" uniqueId="urn:microsoft.com/office/officeart/2005/8/quickstyle/simple1">
-  <dgm:title val=""/>
-  <dgm:desc val=""/>
-  <dgm:catLst>
-    <dgm:cat type="simple" pri="10100"/>
-  </dgm:catLst>
-  <dgm:scene3d>
-    <a:camera prst="orthographicFront"/>
-    <a:lightRig rig="threePt" dir="t"/>
-  </dgm:scene3d>
-  <dgm:styleLbl name="node0">
-    <dgm:scene3d>
-      <a:camera prst="orthographicFront"/>
-      <a:lightRig rig="threePt" dir="t"/>
-    </dgm:scene3d>
-    <dgm:sp3d/>
-    <dgm:txPr/>
-    <dgm:style>
-      <a:lnRef idx="2">
-        <a:scrgbClr r="0" g="0" b="0"/>
-      </a:lnRef>
-      <a:fillRef idx="1">
-        <a:scrgbClr r="0" g="0" b="0"/>
-      </a:fillRef>
-      <a:effectRef idx="0">
-        <a:scrgbClr r="0" g="0" b="0"/>
-      </a:effectRef>
-      <a:fontRef idx="minor">
-        <a:schemeClr val="lt1"/>
-      </a:fontRef>
-    </dgm:style>
-  </dgm:styleLbl>
-  <dgm:styleLbl name="lnNode1">
-    <dgm:scene3d>
-      <a:camera prst="orthographicFront"/>
-      <a:lightRig rig="threePt" dir="t"/>
-    </dgm:scene3d>
-    <dgm:sp3d/>
-    <dgm:txPr/>
-    <dgm:style>
-      <a:lnRef idx="2">
-        <a:scrgbClr r="0" g="0" b="0"/>
-      </a:lnRef>
-      <a:fillRef idx="1">
-        <a:scrgbClr r="0" g="0" b="0"/>
-      </a:fillRef>
-      <a:effectRef idx="0">
-        <a:scrgbClr r="0" g="0" b="0"/>
-      </a:effectRef>
-      <a:fontRef idx="minor">
-        <a:schemeClr val="lt1"/>
-      </a:fontRef>
-    </dgm:style>
-  </dgm:styleLbl>
-  <dgm:styleLbl name="vennNode1">
-    <dgm:scene3d>
-      <a:camera prst="orthographicFront"/>
-      <a:lightRig rig="threePt" dir="t"/>
-    </dgm:scene3d>
-    <dgm:sp3d/>
-    <dgm:txPr/>
-    <dgm:style>
-      <a:lnRef idx="2">
-        <a:scrgbClr r="0" g="0" b="0"/>
-      </a:lnRef>
-      <a:fillRef idx="1">
-        <a:scrgbClr r="0" g="0" b="0"/>
-      </a:fillRef>
-      <a:effectRef idx="0">
-        <a:scrgbClr r="0" g="0" b="0"/>
-      </a:effectRef>
-      <a:fontRef idx="minor">
-        <a:schemeClr val="tx1"/>
-      </a:fontRef>
-    </dgm:style>
-  </dgm:styleLbl>
-  <dgm:styleLbl name="alignNode1">
-    <dgm:scene3d>
-      <a:camera prst="orthographicFront"/>
-      <a:lightRig rig="threePt" dir="t"/>
-    </dgm:scene3d>
-    <dgm:sp3d/>
-    <dgm:txPr/>
-    <dgm:style>
-      <a:lnRef idx="2">
-        <a:scrgbClr r="0" g="0" b="0"/>
-      </a:lnRef>
-      <a:fillRef idx="1">
-        <a:scrgbClr r="0" g="0" b="0"/>
-      </a:fillRef>
-      <a:effectRef idx="0">
-        <a:scrgbClr r="0" g="0" b="0"/>
-      </a:effectRef>
-      <a:fontRef idx="minor">
-        <a:schemeClr val="lt1"/>
-      </a:fontRef>
-    </dgm:style>
-  </dgm:styleLbl>
-  <dgm:styleLbl name="node1">
-    <dgm:scene3d>
-      <a:camera prst="orthographicFront"/>
-      <a:lightRig rig="threePt" dir="t"/>
-    </dgm:scene3d>
-    <dgm:sp3d/>
-    <dgm:txPr/>
-    <dgm:style>
-      <a:lnRef idx="2">
-        <a:scrgbClr r="0" g="0" b="0"/>
-      </a:lnRef>
-      <a:fillRef idx="1">
-        <a:scrgbClr r="0" g="0" b="0"/>
-      </a:fillRef>
-      <a:effectRef idx="0">
-        <a:scrgbClr r="0" g="0" b="0"/>
-      </a:effectRef>
-      <a:fontRef idx="minor">
-        <a:schemeClr val="lt1"/>
-      </a:fontRef>
-    </dgm:style>
-  </dgm:styleLbl>
-  <dgm:styleLbl name="node2">
-    <dgm:scene3d>
-      <a:camera prst="orthographicFront"/>
-      <a:lightRig rig="threePt" dir="t"/>
-    </dgm:scene3d>
-    <dgm:sp3d/>
-    <dgm:txPr/>
-    <dgm:style>
-      <a:lnRef idx="2">
-        <a:scrgbClr r="0" g="0" b="0"/>
-      </a:lnRef>
-      <a:fillRef idx="1">
-        <a:scrgbClr r="0" g="0" b="0"/>
-      </a:fillRef>
-      <a:effectRef idx="0">
-        <a:scrgbClr r="0" g="0" b="0"/>
-      </a:effectRef>
-      <a:fontRef idx="minor">
-        <a:schemeClr val="lt1"/>
-      </a:fontRef>
-    </dgm:style>
-  </dgm:styleLbl>
-  <dgm:styleLbl name="node3">
-    <dgm:scene3d>
-      <a:camera prst="orthographicFront"/>
-      <a:lightRig rig="threePt" dir="t"/>
-    </dgm:scene3d>
-    <dgm:sp3d/>
-    <dgm:txPr/>
-    <dgm:style>
-      <a:lnRef idx="2">
-        <a:scrgbClr r="0" g="0" b="0"/>
-      </a:lnRef>
-      <a:fillRef idx="1">
-        <a:scrgbClr r="0" g="0" b="0"/>
-      </a:fillRef>
-      <a:effectRef idx="0">
-        <a:scrgbClr r="0" g="0" b="0"/>
-      </a:effectRef>
-      <a:fontRef idx="minor">
-        <a:schemeClr val="lt1"/>
-      </a:fontRef>
-    </dgm:style>
-  </dgm:styleLbl>
-  <dgm:styleLbl name="node4">
-    <dgm:scene3d>
-      <a:camera prst="orthographicFront"/>
-      <a:lightRig rig="threePt" dir="t"/>
-    </dgm:scene3d>
-    <dgm:sp3d/>
-    <dgm:txPr/>
-    <dgm:style>
-      <a:lnRef idx="2">
-        <a:scrgbClr r="0" g="0" b="0"/>
-      </a:lnRef>
-      <a:fillRef idx="1">
-        <a:scrgbClr r="0" g="0" b="0"/>
-      </a:fillRef>
-      <a:effectRef idx="0">
-        <a:scrgbClr r="0" g="0" b="0"/>
-      </a:effectRef>
-      <a:fontRef idx="minor">
-        <a:schemeClr val="lt1"/>
-      </a:fontRef>
-    </dgm:style>
-  </dgm:styleLbl>
-  <dgm:styleLbl name="fgImgPlace1">
-    <dgm:scene3d>
-      <a:camera prst="orthographicFront"/>
-      <a:lightRig rig="threePt" dir="t"/>
-    </dgm:scene3d>
-    <dgm:sp3d/>
-    <dgm:txPr/>
-    <dgm:style>
-      <a:lnRef idx="2">
-        <a:scrgbClr r="0" g="0" b="0"/>
-      </a:lnRef>
-      <a:fillRef idx="1">
-        <a:scrgbClr r="0" g="0" b="0"/>
-      </a:fillRef>
-      <a:effectRef idx="0">
-        <a:scrgbClr r="0" g="0" b="0"/>
-      </a:effectRef>
-      <a:fontRef idx="minor"/>
-    </dgm:style>
-  </dgm:styleLbl>
-  <dgm:styleLbl name="alignImgPlace1">
-    <dgm:scene3d>
-      <a:camera prst="orthographicFront"/>
-      <a:lightRig rig="threePt" dir="t"/>
-    </dgm:scene3d>
-    <dgm:sp3d/>
-    <dgm:txPr/>
-    <dgm:style>
-      <a:lnRef idx="2">
-        <a:scrgbClr r="0" g="0" b="0"/>
-      </a:lnRef>
-      <a:fillRef idx="1">
-        <a:scrgbClr r="0" g="0" b="0"/>
-      </a:fillRef>
-      <a:effectRef idx="0">
-        <a:scrgbClr r="0" g="0" b="0"/>
-      </a:effectRef>
-      <a:fontRef idx="minor"/>
-    </dgm:style>
-  </dgm:styleLbl>
-  <dgm:styleLbl name="bgImgPlace1">
-    <dgm:scene3d>
-      <a:camera prst="orthographicFront"/>
-      <a:lightRig rig="threePt" dir="t"/>
-    </dgm:scene3d>
-    <dgm:sp3d/>
-    <dgm:txPr/>
-    <dgm:style>
-      <a:lnRef idx="2">
-        <a:scrgbClr r="0" g="0" b="0"/>
-      </a:lnRef>
-      <a:fillRef idx="1">
-        <a:scrgbClr r="0" g="0" b="0"/>
-      </a:fillRef>
-      <a:effectRef idx="0">
-        <a:scrgbClr r="0" g="0" b="0"/>
-      </a:effectRef>
-      <a:fontRef idx="minor"/>
-    </dgm:style>
-  </dgm:styleLbl>
-  <dgm:styleLbl name="sibTrans2D1">
-    <dgm:scene3d>
-      <a:camera prst="orthographicFront"/>
-      <a:lightRig rig="threePt" dir="t"/>
-    </dgm:scene3d>
-    <dgm:sp3d/>
-    <dgm:txPr/>
-    <dgm:style>
-      <a:lnRef idx="0">
-        <a:scrgbClr r="0" g="0" b="0"/>
-      </a:lnRef>
-      <a:fillRef idx="1">
-        <a:scrgbClr r="0" g="0" b="0"/>
-      </a:fillRef>
-      <a:effectRef idx="0">
-        <a:scrgbClr r="0" g="0" b="0"/>
-      </a:effectRef>
-      <a:fontRef idx="minor">
-        <a:schemeClr val="lt1"/>
-      </a:fontRef>
-    </dgm:style>
-  </dgm:styleLbl>
-  <dgm:styleLbl name="fgSibTrans2D1">
-    <dgm:scene3d>
-      <a:camera prst="orthographicFront"/>
-      <a:lightRig rig="threePt" dir="t"/>
-    </dgm:scene3d>
-    <dgm:sp3d/>
-    <dgm:txPr/>
-    <dgm:style>
-      <a:lnRef idx="0">
-        <a:scrgbClr r="0" g="0" b="0"/>
-      </a:lnRef>
-      <a:fillRef idx="1">
-        <a:scrgbClr r="0" g="0" b="0"/>
-      </a:fillRef>
-      <a:effectRef idx="0">
-        <a:scrgbClr r="0" g="0" b="0"/>
-      </a:effectRef>
-      <a:fontRef idx="minor">
-        <a:schemeClr val="lt1"/>
-      </a:fontRef>
-    </dgm:style>
-  </dgm:styleLbl>
-  <dgm:styleLbl name="bgSibTrans2D1">
-    <dgm:scene3d>
-      <a:camera prst="orthographicFront"/>
-      <a:lightRig rig="threePt" dir="t"/>
-    </dgm:scene3d>
-    <dgm:sp3d/>
-    <dgm:txPr/>
-    <dgm:style>
-      <a:lnRef idx="0">
-        <a:scrgbClr r="0" g="0" b="0"/>
-      </a:lnRef>
-      <a:fillRef idx="1">
-        <a:scrgbClr r="0" g="0" b="0"/>
-      </a:fillRef>
-      <a:effectRef idx="0">
-        <a:scrgbClr r="0" g="0" b="0"/>
-      </a:effectRef>
-      <a:fontRef idx="minor">
-        <a:schemeClr val="lt1"/>
-      </a:fontRef>
-    </dgm:style>
-  </dgm:styleLbl>
-  <dgm:styleLbl name="sibTrans1D1">
-    <dgm:scene3d>
-      <a:camera prst="orthographicFront"/>
-      <a:lightRig rig="threePt" dir="t"/>
-    </dgm:scene3d>
-    <dgm:sp3d/>
-    <dgm:txPr/>
-    <dgm:style>
-      <a:lnRef idx="1">
-        <a:scrgbClr r="0" g="0" b="0"/>
-      </a:lnRef>
-      <a:fillRef idx="0">
-        <a:scrgbClr r="0" g="0" b="0"/>
-      </a:fillRef>
-      <a:effectRef idx="0">
-        <a:scrgbClr r="0" g="0" b="0"/>
-      </a:effectRef>
-      <a:fontRef idx="minor"/>
-    </dgm:style>
-  </dgm:styleLbl>
-  <dgm:styleLbl name="callout">
-    <dgm:scene3d>
-      <a:camera prst="orthographicFront"/>
-      <a:lightRig rig="threePt" dir="t"/>
-    </dgm:scene3d>
-    <dgm:sp3d/>
-    <dgm:txPr/>
-    <dgm:style>
-      <a:lnRef idx="2">
-        <a:scrgbClr r="0" g="0" b="0"/>
-      </a:lnRef>
-      <a:fillRef idx="1">
-        <a:scrgbClr r="0" g="0" b="0"/>
-      </a:fillRef>
-      <a:effectRef idx="0">
-        <a:scrgbClr r="0" g="0" b="0"/>
-      </a:effectRef>
-      <a:fontRef idx="minor"/>
-    </dgm:style>
-  </dgm:styleLbl>
-  <dgm:styleLbl name="asst0">
-    <dgm:scene3d>
-      <a:camera prst="orthographicFront"/>
-      <a:lightRig rig="threePt" dir="t"/>
-    </dgm:scene3d>
-    <dgm:sp3d/>
-    <dgm:txPr/>
-    <dgm:style>
-      <a:lnRef idx="2">
-        <a:scrgbClr r="0" g="0" b="0"/>
-      </a:lnRef>
-      <a:fillRef idx="1">
-        <a:scrgbClr r="0" g="0" b="0"/>
-      </a:fillRef>
-      <a:effectRef idx="0">
-        <a:scrgbClr r="0" g="0" b="0"/>
-      </a:effectRef>
-      <a:fontRef idx="minor">
-        <a:schemeClr val="lt1"/>
-      </a:fontRef>
-    </dgm:style>
-  </dgm:styleLbl>
-  <dgm:styleLbl name="asst1">
-    <dgm:scene3d>
-      <a:camera prst="orthographicFront"/>
-      <a:lightRig rig="threePt" dir="t"/>
-    </dgm:scene3d>
-    <dgm:sp3d/>
-    <dgm:txPr/>
-    <dgm:style>
-      <a:lnRef idx="2">
-        <a:scrgbClr r="0" g="0" b="0"/>
-      </a:lnRef>
-      <a:fillRef idx="1">
-        <a:scrgbClr r="0" g="0" b="0"/>
-      </a:fillRef>
-      <a:effectRef idx="0">
-        <a:scrgbClr r="0" g="0" b="0"/>
-      </a:effectRef>
-      <a:fontRef idx="minor">
-        <a:schemeClr val="lt1"/>
-      </a:fontRef>
-    </dgm:style>
-  </dgm:styleLbl>
-  <dgm:styleLbl name="asst2">
-    <dgm:scene3d>
-      <a:camera prst="orthographicFront"/>
-      <a:lightRig rig="threePt" dir="t"/>
-    </dgm:scene3d>
-    <dgm:sp3d/>
-    <dgm:txPr/>
-    <dgm:style>
-      <a:lnRef idx="2">
-        <a:scrgbClr r="0" g="0" b="0"/>
-      </a:lnRef>
-      <a:fillRef idx="1">
-        <a:scrgbClr r="0" g="0" b="0"/>
-      </a:fillRef>
-      <a:effectRef idx="0">
-        <a:scrgbClr r="0" g="0" b="0"/>
-      </a:effectRef>
-      <a:fontRef idx="minor">
-        <a:schemeClr val="lt1"/>
-      </a:fontRef>
-    </dgm:style>
-  </dgm:styleLbl>
-  <dgm:styleLbl name="asst3">
-    <dgm:scene3d>
-      <a:camera prst="orthographicFront"/>
-      <a:lightRig rig="threePt" dir="t"/>
-    </dgm:scene3d>
-    <dgm:sp3d/>
-    <dgm:txPr/>
-    <dgm:style>
-      <a:lnRef idx="2">
-        <a:scrgbClr r="0" g="0" b="0"/>
-      </a:lnRef>
-      <a:fillRef idx="1">
-        <a:scrgbClr r="0" g="0" b="0"/>
-      </a:fillRef>
-      <a:effectRef idx="0">
-        <a:scrgbClr r="0" g="0" b="0"/>
-      </a:effectRef>
-      <a:fontRef idx="minor">
-        <a:schemeClr val="lt1"/>
-      </a:fontRef>
-    </dgm:style>
-  </dgm:styleLbl>
-  <dgm:styleLbl name="asst4">
-    <dgm:scene3d>
-      <a:camera prst="orthographicFront"/>
-      <a:lightRig rig="threePt" dir="t"/>
-    </dgm:scene3d>
-    <dgm:sp3d/>
-    <dgm:txPr/>
-    <dgm:style>
-      <a:lnRef idx="2">
-        <a:scrgbClr r="0" g="0" b="0"/>
-      </a:lnRef>
-      <a:fillRef idx="1">
-        <a:scrgbClr r="0" g="0" b="0"/>
-      </a:fillRef>
-      <a:effectRef idx="0">
-        <a:scrgbClr r="0" g="0" b="0"/>
-      </a:effectRef>
-      <a:fontRef idx="minor">
-        <a:schemeClr val="lt1"/>
-      </a:fontRef>
-    </dgm:style>
-  </dgm:styleLbl>
-  <dgm:styleLbl name="parChTrans2D1">
-    <dgm:scene3d>
-      <a:camera prst="orthographicFront"/>
-      <a:lightRig rig="threePt" dir="t"/>
-    </dgm:scene3d>
-    <dgm:sp3d/>
-    <dgm:txPr/>
-    <dgm:style>
-      <a:lnRef idx="2">
-        <a:scrgbClr r="0" g="0" b="0"/>
-      </a:lnRef>
-      <a:fillRef idx="1">
-        <a:scrgbClr r="0" g="0" b="0"/>
-      </a:fillRef>
-      <a:effectRef idx="0">
-        <a:scrgbClr r="0" g="0" b="0"/>
-      </a:effectRef>
-      <a:fontRef idx="minor">
-        <a:schemeClr val="lt1"/>
-      </a:fontRef>
-    </dgm:style>
-  </dgm:styleLbl>
-  <dgm:styleLbl name="parChTrans2D2">
-    <dgm:scene3d>
-      <a:camera prst="orthographicFront"/>
-      <a:lightRig rig="threePt" dir="t"/>
-    </dgm:scene3d>
-    <dgm:sp3d/>
-    <dgm:txPr/>
-    <dgm:style>
-      <a:lnRef idx="2">
-        <a:scrgbClr r="0" g="0" b="0"/>
-      </a:lnRef>
-      <a:fillRef idx="1">
-        <a:scrgbClr r="0" g="0" b="0"/>
-      </a:fillRef>
-      <a:effectRef idx="0">
-        <a:scrgbClr r="0" g="0" b="0"/>
-      </a:effectRef>
-      <a:fontRef idx="minor">
-        <a:schemeClr val="lt1"/>
-      </a:fontRef>
-    </dgm:style>
-  </dgm:styleLbl>
-  <dgm:styleLbl name="parChTrans2D3">
-    <dgm:scene3d>
-      <a:camera prst="orthographicFront"/>
-      <a:lightRig rig="threePt" dir="t"/>
-    </dgm:scene3d>
-    <dgm:sp3d/>
-    <dgm:txPr/>
-    <dgm:style>
-      <a:lnRef idx="2">
-        <a:scrgbClr r="0" g="0" b="0"/>
-      </a:lnRef>
-      <a:fillRef idx="1">
-        <a:scrgbClr r="0" g="0" b="0"/>
-      </a:fillRef>
-      <a:effectRef idx="0">
-        <a:scrgbClr r="0" g="0" b="0"/>
-      </a:effectRef>
-      <a:fontRef idx="minor">
-        <a:schemeClr val="lt1"/>
-      </a:fontRef>
-    </dgm:style>
-  </dgm:styleLbl>
-  <dgm:styleLbl name="parChTrans2D4">
-    <dgm:scene3d>
-      <a:camera prst="orthographicFront"/>
-      <a:lightRig rig="threePt" dir="t"/>
-    </dgm:scene3d>
-    <dgm:sp3d/>
-    <dgm:txPr/>
-    <dgm:style>
-      <a:lnRef idx="2">
-        <a:scrgbClr r="0" g="0" b="0"/>
-      </a:lnRef>
-      <a:fillRef idx="1">
-        <a:scrgbClr r="0" g="0" b="0"/>
-      </a:fillRef>
-      <a:effectRef idx="0">
-        <a:scrgbClr r="0" g="0" b="0"/>
-      </a:effectRef>
-      <a:fontRef idx="minor">
-        <a:schemeClr val="lt1"/>
-      </a:fontRef>
-    </dgm:style>
-  </dgm:styleLbl>
-  <dgm:styleLbl name="parChTrans1D1">
-    <dgm:scene3d>
-      <a:camera prst="orthographicFront"/>
-      <a:lightRig rig="threePt" dir="t"/>
-    </dgm:scene3d>
-    <dgm:sp3d/>
-    <dgm:txPr/>
-    <dgm:style>
-      <a:lnRef idx="2">
-        <a:scrgbClr r="0" g="0" b="0"/>
-      </a:lnRef>
-      <a:fillRef idx="0">
-        <a:scrgbClr r="0" g="0" b="0"/>
-      </a:fillRef>
-      <a:effectRef idx="0">
-        <a:scrgbClr r="0" g="0" b="0"/>
-      </a:effectRef>
-      <a:fontRef idx="minor"/>
-    </dgm:style>
-  </dgm:styleLbl>
-  <dgm:styleLbl name="parChTrans1D2">
-    <dgm:scene3d>
-      <a:camera prst="orthographicFront"/>
-      <a:lightRig rig="threePt" dir="t"/>
-    </dgm:scene3d>
-    <dgm:sp3d/>
-    <dgm:txPr/>
-    <dgm:style>
-      <a:lnRef idx="2">
-        <a:scrgbClr r="0" g="0" b="0"/>
-      </a:lnRef>
-      <a:fillRef idx="0">
-        <a:scrgbClr r="0" g="0" b="0"/>
-      </a:fillRef>
-      <a:effectRef idx="0">
-        <a:scrgbClr r="0" g="0" b="0"/>
-      </a:effectRef>
-      <a:fontRef idx="minor"/>
-    </dgm:style>
-  </dgm:styleLbl>
-  <dgm:styleLbl name="parChTrans1D3">
-    <dgm:scene3d>
-      <a:camera prst="orthographicFront"/>
-      <a:lightRig rig="threePt" dir="t"/>
-    </dgm:scene3d>
-    <dgm:sp3d/>
-    <dgm:txPr/>
-    <dgm:style>
-      <a:lnRef idx="2">
-        <a:scrgbClr r="0" g="0" b="0"/>
-      </a:lnRef>
-      <a:fillRef idx="0">
-        <a:scrgbClr r="0" g="0" b="0"/>
-      </a:fillRef>
-      <a:effectRef idx="0">
-        <a:scrgbClr r="0" g="0" b="0"/>
-      </a:effectRef>
-      <a:fontRef idx="minor"/>
-    </dgm:style>
-  </dgm:styleLbl>
-  <dgm:styleLbl name="parChTrans1D4">
-    <dgm:scene3d>
-      <a:camera prst="orthographicFront"/>
-      <a:lightRig rig="threePt" dir="t"/>
-    </dgm:scene3d>
-    <dgm:sp3d/>
-    <dgm:txPr/>
-    <dgm:style>
-      <a:lnRef idx="2">
-        <a:scrgbClr r="0" g="0" b="0"/>
-      </a:lnRef>
-      <a:fillRef idx="0">
-        <a:scrgbClr r="0" g="0" b="0"/>
-      </a:fillRef>
-      <a:effectRef idx="0">
-        <a:scrgbClr r="0" g="0" b="0"/>
-      </a:effectRef>
-      <a:fontRef idx="minor"/>
-    </dgm:style>
-  </dgm:styleLbl>
-  <dgm:styleLbl name="fgAcc1">
-    <dgm:scene3d>
-      <a:camera prst="orthographicFront"/>
-      <a:lightRig rig="threePt" dir="t"/>
-    </dgm:scene3d>
-    <dgm:sp3d/>
-    <dgm:txPr/>
-    <dgm:style>
-      <a:lnRef idx="2">
-        <a:scrgbClr r="0" g="0" b="0"/>
-      </a:lnRef>
-      <a:fillRef idx="1">
-        <a:scrgbClr r="0" g="0" b="0"/>
-      </a:fillRef>
-      <a:effectRef idx="0">
-        <a:scrgbClr r="0" g="0" b="0"/>
-      </a:effectRef>
-      <a:fontRef idx="minor"/>
-    </dgm:style>
-  </dgm:styleLbl>
-  <dgm:styleLbl name="conFgAcc1">
-    <dgm:scene3d>
-      <a:camera prst="orthographicFront"/>
-      <a:lightRig rig="threePt" dir="t"/>
-    </dgm:scene3d>
-    <dgm:sp3d/>
-    <dgm:txPr/>
-    <dgm:style>
-      <a:lnRef idx="2">
-        <a:scrgbClr r="0" g="0" b="0"/>
-      </a:lnRef>
-      <a:fillRef idx="1">
-        <a:scrgbClr r="0" g="0" b="0"/>
-      </a:fillRef>
-      <a:effectRef idx="0">
-        <a:scrgbClr r="0" g="0" b="0"/>
-      </a:effectRef>
-      <a:fontRef idx="minor"/>
-    </dgm:style>
-  </dgm:styleLbl>
-  <dgm:styleLbl name="alignAcc1">
-    <dgm:scene3d>
-      <a:camera prst="orthographicFront"/>
-      <a:lightRig rig="threePt" dir="t"/>
-    </dgm:scene3d>
-    <dgm:sp3d/>
-    <dgm:txPr/>
-    <dgm:style>
-      <a:lnRef idx="2">
-        <a:scrgbClr r="0" g="0" b="0"/>
-      </a:lnRef>
-      <a:fillRef idx="1">
-        <a:scrgbClr r="0" g="0" b="0"/>
-      </a:fillRef>
-      <a:effectRef idx="0">
-        <a:scrgbClr r="0" g="0" b="0"/>
-      </a:effectRef>
-      <a:fontRef idx="minor"/>
-    </dgm:style>
-  </dgm:styleLbl>
-  <dgm:styleLbl name="trAlignAcc1">
-    <dgm:scene3d>
-      <a:camera prst="orthographicFront"/>
-      <a:lightRig rig="threePt" dir="t"/>
-    </dgm:scene3d>
-    <dgm:sp3d/>
-    <dgm:txPr/>
-    <dgm:style>
-      <a:lnRef idx="1">
-        <a:scrgbClr r="0" g="0" b="0"/>
-      </a:lnRef>
-      <a:fillRef idx="1">
-        <a:scrgbClr r="0" g="0" b="0"/>
-      </a:fillRef>
-      <a:effectRef idx="0">
-        <a:scrgbClr r="0" g="0" b="0"/>
-      </a:effectRef>
-      <a:fontRef idx="minor"/>
-    </dgm:style>
-  </dgm:styleLbl>
-  <dgm:styleLbl name="bgAcc1">
-    <dgm:scene3d>
-      <a:camera prst="orthographicFront"/>
-      <a:lightRig rig="threePt" dir="t"/>
-    </dgm:scene3d>
-    <dgm:sp3d/>
-    <dgm:txPr/>
-    <dgm:style>
-      <a:lnRef idx="2">
-        <a:scrgbClr r="0" g="0" b="0"/>
-      </a:lnRef>
-      <a:fillRef idx="1">
-        <a:scrgbClr r="0" g="0" b="0"/>
-      </a:fillRef>
-      <a:effectRef idx="0">
-        <a:scrgbClr r="0" g="0" b="0"/>
-      </a:effectRef>
-      <a:fontRef idx="minor"/>
-    </dgm:style>
-  </dgm:styleLbl>
-  <dgm:styleLbl name="solidFgAcc1">
-    <dgm:scene3d>
-      <a:camera prst="orthographicFront"/>
-      <a:lightRig rig="threePt" dir="t"/>
-    </dgm:scene3d>
-    <dgm:sp3d/>
-    <dgm:txPr/>
-    <dgm:style>
-      <a:lnRef idx="2">
-        <a:scrgbClr r="0" g="0" b="0"/>
-      </a:lnRef>
-      <a:fillRef idx="1">
-        <a:scrgbClr r="0" g="0" b="0"/>
-      </a:fillRef>
-      <a:effectRef idx="0">
-        <a:scrgbClr r="0" g="0" b="0"/>
-      </a:effectRef>
-      <a:fontRef idx="minor"/>
-    </dgm:style>
-  </dgm:styleLbl>
-  <dgm:styleLbl name="solidAlignAcc1">
-    <dgm:scene3d>
-      <a:camera prst="orthographicFront"/>
-      <a:lightRig rig="threePt" dir="t"/>
-    </dgm:scene3d>
-    <dgm:sp3d/>
-    <dgm:txPr/>
-    <dgm:style>
-      <a:lnRef idx="2">
-        <a:scrgbClr r="0" g="0" b="0"/>
-      </a:lnRef>
-      <a:fillRef idx="1">
-        <a:scrgbClr r="0" g="0" b="0"/>
-      </a:fillRef>
-      <a:effectRef idx="0">
-        <a:scrgbClr r="0" g="0" b="0"/>
-      </a:effectRef>
-      <a:fontRef idx="minor"/>
-    </dgm:style>
-  </dgm:styleLbl>
-  <dgm:styleLbl name="solidBgAcc1">
-    <dgm:scene3d>
-      <a:camera prst="orthographicFront"/>
-      <a:lightRig rig="threePt" dir="t"/>
-    </dgm:scene3d>
-    <dgm:sp3d/>
-    <dgm:txPr/>
-    <dgm:style>
-      <a:lnRef idx="2">
-        <a:scrgbClr r="0" g="0" b="0"/>
-      </a:lnRef>
-      <a:fillRef idx="1">
-        <a:scrgbClr r="0" g="0" b="0"/>
-      </a:fillRef>
-      <a:effectRef idx="0">
-        <a:scrgbClr r="0" g="0" b="0"/>
-      </a:effectRef>
-      <a:fontRef idx="minor"/>
-    </dgm:style>
-  </dgm:styleLbl>
-  <dgm:styleLbl name="fgAccFollowNode1">
-    <dgm:scene3d>
-      <a:camera prst="orthographicFront"/>
-      <a:lightRig rig="threePt" dir="t"/>
-    </dgm:scene3d>
-    <dgm:sp3d/>
-    <dgm:txPr/>
-    <dgm:style>
-      <a:lnRef idx="2">
-        <a:scrgbClr r="0" g="0" b="0"/>
-      </a:lnRef>
-      <a:fillRef idx="1">
-        <a:scrgbClr r="0" g="0" b="0"/>
-      </a:fillRef>
-      <a:effectRef idx="0">
-        <a:scrgbClr r="0" g="0" b="0"/>
-      </a:effectRef>
-      <a:fontRef idx="minor"/>
-    </dgm:style>
-  </dgm:styleLbl>
-  <dgm:styleLbl name="alignAccFollowNode1">
-    <dgm:scene3d>
-      <a:camera prst="orthographicFront"/>
-      <a:lightRig rig="threePt" dir="t"/>
-    </dgm:scene3d>
-    <dgm:sp3d/>
-    <dgm:txPr/>
-    <dgm:style>
-      <a:lnRef idx="2">
-        <a:scrgbClr r="0" g="0" b="0"/>
-      </a:lnRef>
-      <a:fillRef idx="1">
-        <a:scrgbClr r="0" g="0" b="0"/>
-      </a:fillRef>
-      <a:effectRef idx="0">
-        <a:scrgbClr r="0" g="0" b="0"/>
-      </a:effectRef>
-      <a:fontRef idx="minor"/>
-    </dgm:style>
-  </dgm:styleLbl>
-  <dgm:styleLbl name="bgAccFollowNode1">
-    <dgm:scene3d>
-      <a:camera prst="orthographicFront"/>
-      <a:lightRig rig="threePt" dir="t"/>
-    </dgm:scene3d>
-    <dgm:sp3d/>
-    <dgm:txPr/>
-    <dgm:style>
-      <a:lnRef idx="2">
-        <a:scrgbClr r="0" g="0" b="0"/>
-      </a:lnRef>
-      <a:fillRef idx="1">
-        <a:scrgbClr r="0" g="0" b="0"/>
-      </a:fillRef>
-      <a:effectRef idx="0">
-        <a:scrgbClr r="0" g="0" b="0"/>
-      </a:effectRef>
-      <a:fontRef idx="minor"/>
-    </dgm:style>
-  </dgm:styleLbl>
-  <dgm:styleLbl name="fgAcc0">
-    <dgm:scene3d>
-      <a:camera prst="orthographicFront"/>
-      <a:lightRig rig="threePt" dir="t"/>
-    </dgm:scene3d>
-    <dgm:sp3d/>
-    <dgm:txPr/>
-    <dgm:style>
-      <a:lnRef idx="2">
-        <a:scrgbClr r="0" g="0" b="0"/>
-      </a:lnRef>
-      <a:fillRef idx="1">
-        <a:scrgbClr r="0" g="0" b="0"/>
-      </a:fillRef>
-      <a:effectRef idx="0">
-        <a:scrgbClr r="0" g="0" b="0"/>
-      </a:effectRef>
-      <a:fontRef idx="minor"/>
-    </dgm:style>
-  </dgm:styleLbl>
-  <dgm:styleLbl name="fgAcc2">
-    <dgm:scene3d>
-      <a:camera prst="orthographicFront"/>
-      <a:lightRig rig="threePt" dir="t"/>
-    </dgm:scene3d>
-    <dgm:sp3d/>
-    <dgm:txPr/>
-    <dgm:style>
-      <a:lnRef idx="2">
-        <a:scrgbClr r="0" g="0" b="0"/>
-      </a:lnRef>
-      <a:fillRef idx="1">
-        <a:scrgbClr r="0" g="0" b="0"/>
-      </a:fillRef>
-      <a:effectRef idx="0">
-        <a:scrgbClr r="0" g="0" b="0"/>
-      </a:effectRef>
-      <a:fontRef idx="minor"/>
-    </dgm:style>
-  </dgm:styleLbl>
-  <dgm:styleLbl name="fgAcc3">
-    <dgm:scene3d>
-      <a:camera prst="orthographicFront"/>
-      <a:lightRig rig="threePt" dir="t"/>
-    </dgm:scene3d>
-    <dgm:sp3d/>
-    <dgm:txPr/>
-    <dgm:style>
-      <a:lnRef idx="2">
-        <a:scrgbClr r="0" g="0" b="0"/>
-      </a:lnRef>
-      <a:fillRef idx="1">
-        <a:scrgbClr r="0" g="0" b="0"/>
-      </a:fillRef>
-      <a:effectRef idx="0">
-        <a:scrgbClr r="0" g="0" b="0"/>
-      </a:effectRef>
-      <a:fontRef idx="minor"/>
-    </dgm:style>
-  </dgm:styleLbl>
-  <dgm:styleLbl name="fgAcc4">
-    <dgm:scene3d>
-      <a:camera prst="orthographicFront"/>
-      <a:lightRig rig="threePt" dir="t"/>
-    </dgm:scene3d>
-    <dgm:sp3d/>
-    <dgm:txPr/>
-    <dgm:style>
-      <a:lnRef idx="2">
-        <a:scrgbClr r="0" g="0" b="0"/>
-      </a:lnRef>
-      <a:fillRef idx="1">
-        <a:scrgbClr r="0" g="0" b="0"/>
-      </a:fillRef>
-      <a:effectRef idx="0">
-        <a:scrgbClr r="0" g="0" b="0"/>
-      </a:effectRef>
-      <a:fontRef idx="minor"/>
-    </dgm:style>
-  </dgm:styleLbl>
-  <dgm:styleLbl name="bgShp">
-    <dgm:scene3d>
-      <a:camera prst="orthographicFront"/>
-      <a:lightRig rig="threePt" dir="t"/>
-    </dgm:scene3d>
-    <dgm:sp3d/>
-    <dgm:txPr/>
-    <dgm:style>
-      <a:lnRef idx="0">
-        <a:scrgbClr r="0" g="0" b="0"/>
-      </a:lnRef>
-      <a:fillRef idx="1">
-        <a:scrgbClr r="0" g="0" b="0"/>
-      </a:fillRef>
-      <a:effectRef idx="0">
-        <a:scrgbClr r="0" g="0" b="0"/>
-      </a:effectRef>
-      <a:fontRef idx="minor"/>
-    </dgm:style>
-  </dgm:styleLbl>
-  <dgm:styleLbl name="dkBgShp">
-    <dgm:scene3d>
-      <a:camera prst="orthographicFront"/>
-      <a:lightRig rig="threePt" dir="t"/>
-    </dgm:scene3d>
-    <dgm:sp3d/>
-    <dgm:txPr/>
-    <dgm:style>
-      <a:lnRef idx="0">
-        <a:scrgbClr r="0" g="0" b="0"/>
-      </a:lnRef>
-      <a:fillRef idx="1">
-        <a:scrgbClr r="0" g="0" b="0"/>
-      </a:fillRef>
-      <a:effectRef idx="0">
-        <a:scrgbClr r="0" g="0" b="0"/>
-      </a:effectRef>
-      <a:fontRef idx="minor"/>
-    </dgm:style>
-  </dgm:styleLbl>
-  <dgm:styleLbl name="trBgShp">
-    <dgm:scene3d>
-      <a:camera prst="orthographicFront"/>
-      <a:lightRig rig="threePt" dir="t"/>
-    </dgm:scene3d>
-    <dgm:sp3d/>
-    <dgm:txPr/>
-    <dgm:style>
-      <a:lnRef idx="0">
-        <a:scrgbClr r="0" g="0" b="0"/>
-      </a:lnRef>
-      <a:fillRef idx="1">
-        <a:scrgbClr r="0" g="0" b="0"/>
-      </a:fillRef>
-      <a:effectRef idx="0">
-        <a:scrgbClr r="0" g="0" b="0"/>
-      </a:effectRef>
-      <a:fontRef idx="minor"/>
-    </dgm:style>
-  </dgm:styleLbl>
-  <dgm:styleLbl name="fgShp">
-    <dgm:scene3d>
-      <a:camera prst="orthographicFront"/>
-      <a:lightRig rig="threePt" dir="t"/>
-    </dgm:scene3d>
-    <dgm:sp3d/>
-    <dgm:txPr/>
-    <dgm:style>
-      <a:lnRef idx="2">
-        <a:scrgbClr r="0" g="0" b="0"/>
-      </a:lnRef>
-      <a:fillRef idx="1">
-        <a:scrgbClr r="0" g="0" b="0"/>
-      </a:fillRef>
-      <a:effectRef idx="0">
-        <a:scrgbClr r="0" g="0" b="0"/>
-      </a:effectRef>
-      <a:fontRef idx="minor"/>
-    </dgm:style>
-  </dgm:styleLbl>
-  <dgm:styleLbl name="revTx">
-    <dgm:scene3d>
-      <a:camera prst="orthographicFront"/>
-      <a:lightRig rig="threePt" dir="t"/>
-    </dgm:scene3d>
-    <dgm:sp3d/>
-    <dgm:txPr/>
-    <dgm:style>
-      <a:lnRef idx="0">
-        <a:scrgbClr r="0" g="0" b="0"/>
-      </a:lnRef>
-      <a:fillRef idx="0">
-        <a:scrgbClr r="0" g="0" b="0"/>
-      </a:fillRef>
-      <a:effectRef idx="0">
-        <a:scrgbClr r="0" g="0" b="0"/>
-      </a:effectRef>
-      <a:fontRef idx="minor"/>
-    </dgm:style>
-  </dgm:styleLbl>
-</dgm:styleDef>
+<file path=ppt/changesInfos/changesInfo1.xml><?xml version="1.0" encoding="utf-8"?>
+<pc:chgInfo xmlns:a="http://schemas.openxmlformats.org/drawingml/2006/main" xmlns:r="http://schemas.openxmlformats.org/officeDocument/2006/relationships" xmlns:ac="http://schemas.microsoft.com/office/drawing/2013/main/command" xmlns:pc="http://schemas.microsoft.com/office/powerpoint/2013/main/command">
+  <pc:docChgLst>
+    <pc:chgData name="mrmohd ali" userId="fb24fba9b2f8064e" providerId="LiveId" clId="{9FE56019-D2C7-4321-9720-D68AFDDA258F}"/>
+    <pc:docChg chg="delSld">
+      <pc:chgData name="mrmohd ali" userId="fb24fba9b2f8064e" providerId="LiveId" clId="{9FE56019-D2C7-4321-9720-D68AFDDA258F}" dt="2026-10-19T04:15:38.481" v="9" actId="47"/>
+      <pc:docMkLst>
+        <pc:docMk/>
+      </pc:docMkLst>
+      <pc:sldChg chg="del">
+        <pc:chgData name="mrmohd ali" userId="fb24fba9b2f8064e" providerId="LiveId" clId="{9FE56019-D2C7-4321-9720-D68AFDDA258F}" dt="2026-10-19T04:15:38.481" v="9" actId="47"/>
+        <pc:sldMkLst>
+          <pc:docMk/>
+          <pc:sldMk cId="3937483142" sldId="344"/>
+        </pc:sldMkLst>
+      </pc:sldChg>
+      <pc:sldChg chg="del">
+        <pc:chgData name="mrmohd ali" userId="fb24fba9b2f8064e" providerId="LiveId" clId="{9FE56019-D2C7-4321-9720-D68AFDDA258F}" dt="2026-10-19T04:15:37.208" v="8" actId="47"/>
+        <pc:sldMkLst>
+          <pc:docMk/>
+          <pc:sldMk cId="4104434737" sldId="346"/>
+        </pc:sldMkLst>
+      </pc:sldChg>
+      <pc:sldChg chg="del">
+        <pc:chgData name="mrmohd ali" userId="fb24fba9b2f8064e" providerId="LiveId" clId="{9FE56019-D2C7-4321-9720-D68AFDDA258F}" dt="2026-10-19T04:15:36.676" v="7" actId="47"/>
+        <pc:sldMkLst>
+          <pc:docMk/>
+          <pc:sldMk cId="1014413726" sldId="347"/>
+        </pc:sldMkLst>
+      </pc:sldChg>
+      <pc:sldChg chg="del">
+        <pc:chgData name="mrmohd ali" userId="fb24fba9b2f8064e" providerId="LiveId" clId="{9FE56019-D2C7-4321-9720-D68AFDDA258F}" dt="2026-10-19T04:15:35.625" v="6" actId="47"/>
+        <pc:sldMkLst>
+          <pc:docMk/>
+          <pc:sldMk cId="3117802180" sldId="348"/>
+        </pc:sldMkLst>
+      </pc:sldChg>
+      <pc:sldChg chg="del">
+        <pc:chgData name="mrmohd ali" userId="fb24fba9b2f8064e" providerId="LiveId" clId="{9FE56019-D2C7-4321-9720-D68AFDDA258F}" dt="2026-10-19T04:15:34.979" v="5" actId="47"/>
+        <pc:sldMkLst>
+          <pc:docMk/>
+          <pc:sldMk cId="1722147624" sldId="350"/>
+        </pc:sldMkLst>
+      </pc:sldChg>
+      <pc:sldChg chg="del">
+        <pc:chgData name="mrmohd ali" userId="fb24fba9b2f8064e" providerId="LiveId" clId="{9FE56019-D2C7-4321-9720-D68AFDDA258F}" dt="2026-10-19T04:15:34.351" v="4" actId="47"/>
+        <pc:sldMkLst>
+          <pc:docMk/>
+          <pc:sldMk cId="2610945053" sldId="351"/>
+        </pc:sldMkLst>
+      </pc:sldChg>
+      <pc:sldChg chg="del">
+        <pc:chgData name="mrmohd ali" userId="fb24fba9b2f8064e" providerId="LiveId" clId="{9FE56019-D2C7-4321-9720-D68AFDDA258F}" dt="2026-10-19T04:15:33.708" v="3" actId="47"/>
+        <pc:sldMkLst>
+          <pc:docMk/>
+          <pc:sldMk cId="3000970981" sldId="352"/>
+        </pc:sldMkLst>
+      </pc:sldChg>
+      <pc:sldChg chg="del">
+        <pc:chgData name="mrmohd ali" userId="fb24fba9b2f8064e" providerId="LiveId" clId="{9FE56019-D2C7-4321-9720-D68AFDDA258F}" dt="2026-10-19T04:15:33.017" v="2" actId="47"/>
+        <pc:sldMkLst>
+          <pc:docMk/>
+          <pc:sldMk cId="3802808557" sldId="353"/>
+        </pc:sldMkLst>
+      </pc:sldChg>
+      <pc:sldChg chg="del">
+        <pc:chgData name="mrmohd ali" userId="fb24fba9b2f8064e" providerId="LiveId" clId="{9FE56019-D2C7-4321-9720-D68AFDDA258F}" dt="2026-10-19T04:15:32.306" v="1" actId="47"/>
+        <pc:sldMkLst>
+          <pc:docMk/>
+          <pc:sldMk cId="3119354052" sldId="354"/>
+        </pc:sldMkLst>
+      </pc:sldChg>
+      <pc:sldChg chg="del">
+        <pc:chgData name="mrmohd ali" userId="fb24fba9b2f8064e" providerId="LiveId" clId="{9FE56019-D2C7-4321-9720-D68AFDDA258F}" dt="2026-10-19T04:15:31.280" v="0" actId="2696"/>
+        <pc:sldMkLst>
+          <pc:docMk/>
+          <pc:sldMk cId="3663657925" sldId="355"/>
+        </pc:sldMkLst>
+      </pc:sldChg>
+    </pc:docChg>
+  </pc:docChgLst>
+</pc:chgInfo>
 </file>
 
 <file path=ppt/handoutMasters/handoutMaster1.xml><?xml version="1.0" encoding="utf-8"?>
@@ -4204,7 +309,7 @@
           <a:p>
             <a:fld id="{E4E69F83-204D-4778-AAD0-A0F851A3AEEE}" type="datetimeFigureOut">
               <a:rPr lang="en-US" smtClean="0"/>
-              <a:t>10/18/2026</a:t>
+              <a:t>10/19/2026</a:t>
             </a:fld>
             <a:endParaRPr lang="en-US" dirty="0"/>
           </a:p>
@@ -4381,7 +486,7 @@
           <a:p>
             <a:fld id="{85AE3C21-C3CB-4B8D-9033-56C1B3CE75FA}" type="datetimeFigureOut">
               <a:rPr lang="en-US" smtClean="0"/>
-              <a:t>10/18/2026</a:t>
+              <a:t>10/19/2026</a:t>
             </a:fld>
             <a:endParaRPr lang="en-US" dirty="0"/>
           </a:p>
@@ -4739,552 +844,6 @@
 </p:notes>
 </file>
 
-<file path=ppt/notesSlides/notesSlide10.xml><?xml version="1.0" encoding="utf-8"?>
-<p:notes xmlns:a="http://schemas.openxmlformats.org/drawingml/2006/main" xmlns:r="http://schemas.openxmlformats.org/officeDocument/2006/relationships" xmlns:p="http://schemas.openxmlformats.org/presentationml/2006/main">
-  <p:cSld>
-    <p:spTree>
-      <p:nvGrpSpPr>
-        <p:cNvPr id="1" name=""/>
-        <p:cNvGrpSpPr/>
-        <p:nvPr/>
-      </p:nvGrpSpPr>
-      <p:grpSpPr>
-        <a:xfrm>
-          <a:off x="0" y="0"/>
-          <a:ext cx="0" cy="0"/>
-          <a:chOff x="0" y="0"/>
-          <a:chExt cx="0" cy="0"/>
-        </a:xfrm>
-      </p:grpSpPr>
-      <p:sp>
-        <p:nvSpPr>
-          <p:cNvPr id="2" name="Slide Image Placeholder 1"/>
-          <p:cNvSpPr>
-            <a:spLocks noGrp="1" noRot="1" noChangeAspect="1"/>
-          </p:cNvSpPr>
-          <p:nvPr>
-            <p:ph type="sldImg"/>
-          </p:nvPr>
-        </p:nvSpPr>
-        <p:spPr/>
-        <p:txBody>
-          <a:bodyPr/>
-          <a:lstStyle/>
-          <a:p>
-            <a:endParaRPr lang="en-CA"/>
-          </a:p>
-        </p:txBody>
-      </p:sp>
-      <p:sp>
-        <p:nvSpPr>
-          <p:cNvPr id="3" name="Notes Placeholder 2"/>
-          <p:cNvSpPr>
-            <a:spLocks noGrp="1"/>
-          </p:cNvSpPr>
-          <p:nvPr>
-            <p:ph type="body" idx="1"/>
-          </p:nvPr>
-        </p:nvSpPr>
-        <p:spPr/>
-        <p:txBody>
-          <a:bodyPr/>
-          <a:lstStyle/>
-          <a:p>
-            <a:endParaRPr lang="en-US" dirty="0"/>
-          </a:p>
-        </p:txBody>
-      </p:sp>
-      <p:sp>
-        <p:nvSpPr>
-          <p:cNvPr id="4" name="Slide Number Placeholder 3"/>
-          <p:cNvSpPr>
-            <a:spLocks noGrp="1"/>
-          </p:cNvSpPr>
-          <p:nvPr>
-            <p:ph type="sldNum" sz="quarter" idx="5"/>
-          </p:nvPr>
-        </p:nvSpPr>
-        <p:spPr/>
-        <p:txBody>
-          <a:bodyPr/>
-          <a:lstStyle/>
-          <a:p>
-            <a:fld id="{17732C3C-A191-48C2-A7E8-9C96AF841A7A}" type="slidenum">
-              <a:rPr lang="en-US" smtClean="0"/>
-              <a:t>10</a:t>
-            </a:fld>
-            <a:endParaRPr lang="en-US" dirty="0"/>
-          </a:p>
-        </p:txBody>
-      </p:sp>
-    </p:spTree>
-    <p:extLst>
-      <p:ext uri="{BB962C8B-B14F-4D97-AF65-F5344CB8AC3E}">
-        <p14:creationId xmlns:p14="http://schemas.microsoft.com/office/powerpoint/2010/main" val="1213355782"/>
-      </p:ext>
-    </p:extLst>
-  </p:cSld>
-  <p:clrMapOvr>
-    <a:masterClrMapping/>
-  </p:clrMapOvr>
-</p:notes>
-</file>
-
-<file path=ppt/notesSlides/notesSlide11.xml><?xml version="1.0" encoding="utf-8"?>
-<p:notes xmlns:a="http://schemas.openxmlformats.org/drawingml/2006/main" xmlns:r="http://schemas.openxmlformats.org/officeDocument/2006/relationships" xmlns:p="http://schemas.openxmlformats.org/presentationml/2006/main">
-  <p:cSld>
-    <p:spTree>
-      <p:nvGrpSpPr>
-        <p:cNvPr id="1" name=""/>
-        <p:cNvGrpSpPr/>
-        <p:nvPr/>
-      </p:nvGrpSpPr>
-      <p:grpSpPr>
-        <a:xfrm>
-          <a:off x="0" y="0"/>
-          <a:ext cx="0" cy="0"/>
-          <a:chOff x="0" y="0"/>
-          <a:chExt cx="0" cy="0"/>
-        </a:xfrm>
-      </p:grpSpPr>
-      <p:sp>
-        <p:nvSpPr>
-          <p:cNvPr id="2" name="Slide Image Placeholder 1"/>
-          <p:cNvSpPr>
-            <a:spLocks noGrp="1" noRot="1" noChangeAspect="1"/>
-          </p:cNvSpPr>
-          <p:nvPr>
-            <p:ph type="sldImg"/>
-          </p:nvPr>
-        </p:nvSpPr>
-        <p:spPr/>
-        <p:txBody>
-          <a:bodyPr/>
-          <a:lstStyle/>
-          <a:p>
-            <a:endParaRPr lang="en-CA"/>
-          </a:p>
-        </p:txBody>
-      </p:sp>
-      <p:sp>
-        <p:nvSpPr>
-          <p:cNvPr id="3" name="Notes Placeholder 2"/>
-          <p:cNvSpPr>
-            <a:spLocks noGrp="1"/>
-          </p:cNvSpPr>
-          <p:nvPr>
-            <p:ph type="body" idx="1"/>
-          </p:nvPr>
-        </p:nvSpPr>
-        <p:spPr/>
-        <p:txBody>
-          <a:bodyPr/>
-          <a:lstStyle/>
-          <a:p>
-            <a:endParaRPr lang="en-US" dirty="0"/>
-          </a:p>
-        </p:txBody>
-      </p:sp>
-      <p:sp>
-        <p:nvSpPr>
-          <p:cNvPr id="4" name="Slide Number Placeholder 3"/>
-          <p:cNvSpPr>
-            <a:spLocks noGrp="1"/>
-          </p:cNvSpPr>
-          <p:nvPr>
-            <p:ph type="sldNum" sz="quarter" idx="5"/>
-          </p:nvPr>
-        </p:nvSpPr>
-        <p:spPr/>
-        <p:txBody>
-          <a:bodyPr/>
-          <a:lstStyle/>
-          <a:p>
-            <a:fld id="{17732C3C-A191-48C2-A7E8-9C96AF841A7A}" type="slidenum">
-              <a:rPr lang="en-US" smtClean="0"/>
-              <a:t>11</a:t>
-            </a:fld>
-            <a:endParaRPr lang="en-US" dirty="0"/>
-          </a:p>
-        </p:txBody>
-      </p:sp>
-    </p:spTree>
-    <p:extLst>
-      <p:ext uri="{BB962C8B-B14F-4D97-AF65-F5344CB8AC3E}">
-        <p14:creationId xmlns:p14="http://schemas.microsoft.com/office/powerpoint/2010/main" val="436362427"/>
-      </p:ext>
-    </p:extLst>
-  </p:cSld>
-  <p:clrMapOvr>
-    <a:masterClrMapping/>
-  </p:clrMapOvr>
-</p:notes>
-</file>
-
-<file path=ppt/notesSlides/notesSlide12.xml><?xml version="1.0" encoding="utf-8"?>
-<p:notes xmlns:a="http://schemas.openxmlformats.org/drawingml/2006/main" xmlns:r="http://schemas.openxmlformats.org/officeDocument/2006/relationships" xmlns:p="http://schemas.openxmlformats.org/presentationml/2006/main">
-  <p:cSld>
-    <p:spTree>
-      <p:nvGrpSpPr>
-        <p:cNvPr id="1" name=""/>
-        <p:cNvGrpSpPr/>
-        <p:nvPr/>
-      </p:nvGrpSpPr>
-      <p:grpSpPr>
-        <a:xfrm>
-          <a:off x="0" y="0"/>
-          <a:ext cx="0" cy="0"/>
-          <a:chOff x="0" y="0"/>
-          <a:chExt cx="0" cy="0"/>
-        </a:xfrm>
-      </p:grpSpPr>
-      <p:sp>
-        <p:nvSpPr>
-          <p:cNvPr id="2" name="Slide Image Placeholder 1"/>
-          <p:cNvSpPr>
-            <a:spLocks noGrp="1" noRot="1" noChangeAspect="1"/>
-          </p:cNvSpPr>
-          <p:nvPr>
-            <p:ph type="sldImg"/>
-          </p:nvPr>
-        </p:nvSpPr>
-        <p:spPr/>
-        <p:txBody>
-          <a:bodyPr/>
-          <a:lstStyle/>
-          <a:p>
-            <a:endParaRPr lang="en-CA"/>
-          </a:p>
-        </p:txBody>
-      </p:sp>
-      <p:sp>
-        <p:nvSpPr>
-          <p:cNvPr id="3" name="Notes Placeholder 2"/>
-          <p:cNvSpPr>
-            <a:spLocks noGrp="1"/>
-          </p:cNvSpPr>
-          <p:nvPr>
-            <p:ph type="body" idx="1"/>
-          </p:nvPr>
-        </p:nvSpPr>
-        <p:spPr/>
-        <p:txBody>
-          <a:bodyPr/>
-          <a:lstStyle/>
-          <a:p>
-            <a:endParaRPr lang="en-US" dirty="0"/>
-          </a:p>
-        </p:txBody>
-      </p:sp>
-      <p:sp>
-        <p:nvSpPr>
-          <p:cNvPr id="4" name="Slide Number Placeholder 3"/>
-          <p:cNvSpPr>
-            <a:spLocks noGrp="1"/>
-          </p:cNvSpPr>
-          <p:nvPr>
-            <p:ph type="sldNum" sz="quarter" idx="5"/>
-          </p:nvPr>
-        </p:nvSpPr>
-        <p:spPr/>
-        <p:txBody>
-          <a:bodyPr/>
-          <a:lstStyle/>
-          <a:p>
-            <a:fld id="{17732C3C-A191-48C2-A7E8-9C96AF841A7A}" type="slidenum">
-              <a:rPr lang="en-US" smtClean="0"/>
-              <a:t>12</a:t>
-            </a:fld>
-            <a:endParaRPr lang="en-US" dirty="0"/>
-          </a:p>
-        </p:txBody>
-      </p:sp>
-    </p:spTree>
-    <p:extLst>
-      <p:ext uri="{BB962C8B-B14F-4D97-AF65-F5344CB8AC3E}">
-        <p14:creationId xmlns:p14="http://schemas.microsoft.com/office/powerpoint/2010/main" val="973127320"/>
-      </p:ext>
-    </p:extLst>
-  </p:cSld>
-  <p:clrMapOvr>
-    <a:masterClrMapping/>
-  </p:clrMapOvr>
-</p:notes>
-</file>
-
-<file path=ppt/notesSlides/notesSlide13.xml><?xml version="1.0" encoding="utf-8"?>
-<p:notes xmlns:a="http://schemas.openxmlformats.org/drawingml/2006/main" xmlns:r="http://schemas.openxmlformats.org/officeDocument/2006/relationships" xmlns:p="http://schemas.openxmlformats.org/presentationml/2006/main">
-  <p:cSld>
-    <p:spTree>
-      <p:nvGrpSpPr>
-        <p:cNvPr id="1" name=""/>
-        <p:cNvGrpSpPr/>
-        <p:nvPr/>
-      </p:nvGrpSpPr>
-      <p:grpSpPr>
-        <a:xfrm>
-          <a:off x="0" y="0"/>
-          <a:ext cx="0" cy="0"/>
-          <a:chOff x="0" y="0"/>
-          <a:chExt cx="0" cy="0"/>
-        </a:xfrm>
-      </p:grpSpPr>
-      <p:sp>
-        <p:nvSpPr>
-          <p:cNvPr id="2" name="Slide Image Placeholder 1"/>
-          <p:cNvSpPr>
-            <a:spLocks noGrp="1" noRot="1" noChangeAspect="1"/>
-          </p:cNvSpPr>
-          <p:nvPr>
-            <p:ph type="sldImg"/>
-          </p:nvPr>
-        </p:nvSpPr>
-        <p:spPr/>
-        <p:txBody>
-          <a:bodyPr/>
-          <a:lstStyle/>
-          <a:p>
-            <a:endParaRPr lang="en-CA"/>
-          </a:p>
-        </p:txBody>
-      </p:sp>
-      <p:sp>
-        <p:nvSpPr>
-          <p:cNvPr id="3" name="Notes Placeholder 2"/>
-          <p:cNvSpPr>
-            <a:spLocks noGrp="1"/>
-          </p:cNvSpPr>
-          <p:nvPr>
-            <p:ph type="body" idx="1"/>
-          </p:nvPr>
-        </p:nvSpPr>
-        <p:spPr/>
-        <p:txBody>
-          <a:bodyPr/>
-          <a:lstStyle/>
-          <a:p>
-            <a:endParaRPr lang="en-US" dirty="0"/>
-          </a:p>
-        </p:txBody>
-      </p:sp>
-      <p:sp>
-        <p:nvSpPr>
-          <p:cNvPr id="4" name="Slide Number Placeholder 3"/>
-          <p:cNvSpPr>
-            <a:spLocks noGrp="1"/>
-          </p:cNvSpPr>
-          <p:nvPr>
-            <p:ph type="sldNum" sz="quarter" idx="5"/>
-          </p:nvPr>
-        </p:nvSpPr>
-        <p:spPr/>
-        <p:txBody>
-          <a:bodyPr/>
-          <a:lstStyle/>
-          <a:p>
-            <a:fld id="{17732C3C-A191-48C2-A7E8-9C96AF841A7A}" type="slidenum">
-              <a:rPr lang="en-US" smtClean="0"/>
-              <a:t>13</a:t>
-            </a:fld>
-            <a:endParaRPr lang="en-US" dirty="0"/>
-          </a:p>
-        </p:txBody>
-      </p:sp>
-    </p:spTree>
-    <p:extLst>
-      <p:ext uri="{BB962C8B-B14F-4D97-AF65-F5344CB8AC3E}">
-        <p14:creationId xmlns:p14="http://schemas.microsoft.com/office/powerpoint/2010/main" val="3838453517"/>
-      </p:ext>
-    </p:extLst>
-  </p:cSld>
-  <p:clrMapOvr>
-    <a:masterClrMapping/>
-  </p:clrMapOvr>
-</p:notes>
-</file>
-
-<file path=ppt/notesSlides/notesSlide14.xml><?xml version="1.0" encoding="utf-8"?>
-<p:notes xmlns:a="http://schemas.openxmlformats.org/drawingml/2006/main" xmlns:r="http://schemas.openxmlformats.org/officeDocument/2006/relationships" xmlns:p="http://schemas.openxmlformats.org/presentationml/2006/main">
-  <p:cSld>
-    <p:spTree>
-      <p:nvGrpSpPr>
-        <p:cNvPr id="1" name=""/>
-        <p:cNvGrpSpPr/>
-        <p:nvPr/>
-      </p:nvGrpSpPr>
-      <p:grpSpPr>
-        <a:xfrm>
-          <a:off x="0" y="0"/>
-          <a:ext cx="0" cy="0"/>
-          <a:chOff x="0" y="0"/>
-          <a:chExt cx="0" cy="0"/>
-        </a:xfrm>
-      </p:grpSpPr>
-      <p:sp>
-        <p:nvSpPr>
-          <p:cNvPr id="2" name="Slide Image Placeholder 1"/>
-          <p:cNvSpPr>
-            <a:spLocks noGrp="1" noRot="1" noChangeAspect="1"/>
-          </p:cNvSpPr>
-          <p:nvPr>
-            <p:ph type="sldImg"/>
-          </p:nvPr>
-        </p:nvSpPr>
-        <p:spPr/>
-        <p:txBody>
-          <a:bodyPr/>
-          <a:lstStyle/>
-          <a:p>
-            <a:endParaRPr lang="en-CA"/>
-          </a:p>
-        </p:txBody>
-      </p:sp>
-      <p:sp>
-        <p:nvSpPr>
-          <p:cNvPr id="3" name="Notes Placeholder 2"/>
-          <p:cNvSpPr>
-            <a:spLocks noGrp="1"/>
-          </p:cNvSpPr>
-          <p:nvPr>
-            <p:ph type="body" idx="1"/>
-          </p:nvPr>
-        </p:nvSpPr>
-        <p:spPr/>
-        <p:txBody>
-          <a:bodyPr/>
-          <a:lstStyle/>
-          <a:p>
-            <a:endParaRPr lang="en-US" dirty="0"/>
-          </a:p>
-        </p:txBody>
-      </p:sp>
-      <p:sp>
-        <p:nvSpPr>
-          <p:cNvPr id="4" name="Slide Number Placeholder 3"/>
-          <p:cNvSpPr>
-            <a:spLocks noGrp="1"/>
-          </p:cNvSpPr>
-          <p:nvPr>
-            <p:ph type="sldNum" sz="quarter" idx="5"/>
-          </p:nvPr>
-        </p:nvSpPr>
-        <p:spPr/>
-        <p:txBody>
-          <a:bodyPr/>
-          <a:lstStyle/>
-          <a:p>
-            <a:fld id="{17732C3C-A191-48C2-A7E8-9C96AF841A7A}" type="slidenum">
-              <a:rPr lang="en-US" smtClean="0"/>
-              <a:t>14</a:t>
-            </a:fld>
-            <a:endParaRPr lang="en-US" dirty="0"/>
-          </a:p>
-        </p:txBody>
-      </p:sp>
-    </p:spTree>
-    <p:extLst>
-      <p:ext uri="{BB962C8B-B14F-4D97-AF65-F5344CB8AC3E}">
-        <p14:creationId xmlns:p14="http://schemas.microsoft.com/office/powerpoint/2010/main" val="744771536"/>
-      </p:ext>
-    </p:extLst>
-  </p:cSld>
-  <p:clrMapOvr>
-    <a:masterClrMapping/>
-  </p:clrMapOvr>
-</p:notes>
-</file>
-
-<file path=ppt/notesSlides/notesSlide15.xml><?xml version="1.0" encoding="utf-8"?>
-<p:notes xmlns:a="http://schemas.openxmlformats.org/drawingml/2006/main" xmlns:r="http://schemas.openxmlformats.org/officeDocument/2006/relationships" xmlns:p="http://schemas.openxmlformats.org/presentationml/2006/main">
-  <p:cSld>
-    <p:spTree>
-      <p:nvGrpSpPr>
-        <p:cNvPr id="1" name=""/>
-        <p:cNvGrpSpPr/>
-        <p:nvPr/>
-      </p:nvGrpSpPr>
-      <p:grpSpPr>
-        <a:xfrm>
-          <a:off x="0" y="0"/>
-          <a:ext cx="0" cy="0"/>
-          <a:chOff x="0" y="0"/>
-          <a:chExt cx="0" cy="0"/>
-        </a:xfrm>
-      </p:grpSpPr>
-      <p:sp>
-        <p:nvSpPr>
-          <p:cNvPr id="2" name="Slide Image Placeholder 1"/>
-          <p:cNvSpPr>
-            <a:spLocks noGrp="1" noRot="1" noChangeAspect="1"/>
-          </p:cNvSpPr>
-          <p:nvPr>
-            <p:ph type="sldImg"/>
-          </p:nvPr>
-        </p:nvSpPr>
-        <p:spPr/>
-        <p:txBody>
-          <a:bodyPr/>
-          <a:lstStyle/>
-          <a:p>
-            <a:endParaRPr lang="en-CA"/>
-          </a:p>
-        </p:txBody>
-      </p:sp>
-      <p:sp>
-        <p:nvSpPr>
-          <p:cNvPr id="3" name="Notes Placeholder 2"/>
-          <p:cNvSpPr>
-            <a:spLocks noGrp="1"/>
-          </p:cNvSpPr>
-          <p:nvPr>
-            <p:ph type="body" idx="1"/>
-          </p:nvPr>
-        </p:nvSpPr>
-        <p:spPr/>
-        <p:txBody>
-          <a:bodyPr/>
-          <a:lstStyle/>
-          <a:p>
-            <a:endParaRPr lang="en-US" dirty="0"/>
-          </a:p>
-        </p:txBody>
-      </p:sp>
-      <p:sp>
-        <p:nvSpPr>
-          <p:cNvPr id="4" name="Slide Number Placeholder 3"/>
-          <p:cNvSpPr>
-            <a:spLocks noGrp="1"/>
-          </p:cNvSpPr>
-          <p:nvPr>
-            <p:ph type="sldNum" sz="quarter" idx="5"/>
-          </p:nvPr>
-        </p:nvSpPr>
-        <p:spPr/>
-        <p:txBody>
-          <a:bodyPr/>
-          <a:lstStyle/>
-          <a:p>
-            <a:fld id="{17732C3C-A191-48C2-A7E8-9C96AF841A7A}" type="slidenum">
-              <a:rPr lang="en-US" smtClean="0"/>
-              <a:t>15</a:t>
-            </a:fld>
-            <a:endParaRPr lang="en-US" dirty="0"/>
-          </a:p>
-        </p:txBody>
-      </p:sp>
-    </p:spTree>
-    <p:extLst>
-      <p:ext uri="{BB962C8B-B14F-4D97-AF65-F5344CB8AC3E}">
-        <p14:creationId xmlns:p14="http://schemas.microsoft.com/office/powerpoint/2010/main" val="3823118588"/>
-      </p:ext>
-    </p:extLst>
-  </p:cSld>
-  <p:clrMapOvr>
-    <a:masterClrMapping/>
-  </p:clrMapOvr>
-</p:notes>
-</file>
-
 <file path=ppt/notesSlides/notesSlide2.xml><?xml version="1.0" encoding="utf-8"?>
 <p:notes xmlns:a="http://schemas.openxmlformats.org/drawingml/2006/main" xmlns:r="http://schemas.openxmlformats.org/officeDocument/2006/relationships" xmlns:p="http://schemas.openxmlformats.org/presentationml/2006/main">
   <p:cSld>
@@ -5664,370 +1223,6 @@
     <p:extLst>
       <p:ext uri="{BB962C8B-B14F-4D97-AF65-F5344CB8AC3E}">
         <p14:creationId xmlns:p14="http://schemas.microsoft.com/office/powerpoint/2010/main" val="2403399377"/>
-      </p:ext>
-    </p:extLst>
-  </p:cSld>
-  <p:clrMapOvr>
-    <a:masterClrMapping/>
-  </p:clrMapOvr>
-</p:notes>
-</file>
-
-<file path=ppt/notesSlides/notesSlide6.xml><?xml version="1.0" encoding="utf-8"?>
-<p:notes xmlns:a="http://schemas.openxmlformats.org/drawingml/2006/main" xmlns:r="http://schemas.openxmlformats.org/officeDocument/2006/relationships" xmlns:p="http://schemas.openxmlformats.org/presentationml/2006/main">
-  <p:cSld>
-    <p:spTree>
-      <p:nvGrpSpPr>
-        <p:cNvPr id="1" name=""/>
-        <p:cNvGrpSpPr/>
-        <p:nvPr/>
-      </p:nvGrpSpPr>
-      <p:grpSpPr>
-        <a:xfrm>
-          <a:off x="0" y="0"/>
-          <a:ext cx="0" cy="0"/>
-          <a:chOff x="0" y="0"/>
-          <a:chExt cx="0" cy="0"/>
-        </a:xfrm>
-      </p:grpSpPr>
-      <p:sp>
-        <p:nvSpPr>
-          <p:cNvPr id="2" name="Slide Image Placeholder 1"/>
-          <p:cNvSpPr>
-            <a:spLocks noGrp="1" noRot="1" noChangeAspect="1"/>
-          </p:cNvSpPr>
-          <p:nvPr>
-            <p:ph type="sldImg"/>
-          </p:nvPr>
-        </p:nvSpPr>
-        <p:spPr/>
-        <p:txBody>
-          <a:bodyPr/>
-          <a:lstStyle/>
-          <a:p>
-            <a:endParaRPr lang="en-CA"/>
-          </a:p>
-        </p:txBody>
-      </p:sp>
-      <p:sp>
-        <p:nvSpPr>
-          <p:cNvPr id="3" name="Notes Placeholder 2"/>
-          <p:cNvSpPr>
-            <a:spLocks noGrp="1"/>
-          </p:cNvSpPr>
-          <p:nvPr>
-            <p:ph type="body" idx="1"/>
-          </p:nvPr>
-        </p:nvSpPr>
-        <p:spPr/>
-        <p:txBody>
-          <a:bodyPr/>
-          <a:lstStyle/>
-          <a:p>
-            <a:endParaRPr lang="en-US" dirty="0"/>
-          </a:p>
-        </p:txBody>
-      </p:sp>
-      <p:sp>
-        <p:nvSpPr>
-          <p:cNvPr id="4" name="Slide Number Placeholder 3"/>
-          <p:cNvSpPr>
-            <a:spLocks noGrp="1"/>
-          </p:cNvSpPr>
-          <p:nvPr>
-            <p:ph type="sldNum" sz="quarter" idx="5"/>
-          </p:nvPr>
-        </p:nvSpPr>
-        <p:spPr/>
-        <p:txBody>
-          <a:bodyPr/>
-          <a:lstStyle/>
-          <a:p>
-            <a:fld id="{17732C3C-A191-48C2-A7E8-9C96AF841A7A}" type="slidenum">
-              <a:rPr lang="en-US" smtClean="0"/>
-              <a:t>6</a:t>
-            </a:fld>
-            <a:endParaRPr lang="en-US" dirty="0"/>
-          </a:p>
-        </p:txBody>
-      </p:sp>
-    </p:spTree>
-    <p:extLst>
-      <p:ext uri="{BB962C8B-B14F-4D97-AF65-F5344CB8AC3E}">
-        <p14:creationId xmlns:p14="http://schemas.microsoft.com/office/powerpoint/2010/main" val="1054157737"/>
-      </p:ext>
-    </p:extLst>
-  </p:cSld>
-  <p:clrMapOvr>
-    <a:masterClrMapping/>
-  </p:clrMapOvr>
-</p:notes>
-</file>
-
-<file path=ppt/notesSlides/notesSlide7.xml><?xml version="1.0" encoding="utf-8"?>
-<p:notes xmlns:a="http://schemas.openxmlformats.org/drawingml/2006/main" xmlns:r="http://schemas.openxmlformats.org/officeDocument/2006/relationships" xmlns:p="http://schemas.openxmlformats.org/presentationml/2006/main">
-  <p:cSld>
-    <p:spTree>
-      <p:nvGrpSpPr>
-        <p:cNvPr id="1" name=""/>
-        <p:cNvGrpSpPr/>
-        <p:nvPr/>
-      </p:nvGrpSpPr>
-      <p:grpSpPr>
-        <a:xfrm>
-          <a:off x="0" y="0"/>
-          <a:ext cx="0" cy="0"/>
-          <a:chOff x="0" y="0"/>
-          <a:chExt cx="0" cy="0"/>
-        </a:xfrm>
-      </p:grpSpPr>
-      <p:sp>
-        <p:nvSpPr>
-          <p:cNvPr id="2" name="Slide Image Placeholder 1"/>
-          <p:cNvSpPr>
-            <a:spLocks noGrp="1" noRot="1" noChangeAspect="1"/>
-          </p:cNvSpPr>
-          <p:nvPr>
-            <p:ph type="sldImg"/>
-          </p:nvPr>
-        </p:nvSpPr>
-        <p:spPr/>
-        <p:txBody>
-          <a:bodyPr/>
-          <a:lstStyle/>
-          <a:p>
-            <a:endParaRPr lang="en-CA"/>
-          </a:p>
-        </p:txBody>
-      </p:sp>
-      <p:sp>
-        <p:nvSpPr>
-          <p:cNvPr id="3" name="Notes Placeholder 2"/>
-          <p:cNvSpPr>
-            <a:spLocks noGrp="1"/>
-          </p:cNvSpPr>
-          <p:nvPr>
-            <p:ph type="body" idx="1"/>
-          </p:nvPr>
-        </p:nvSpPr>
-        <p:spPr/>
-        <p:txBody>
-          <a:bodyPr/>
-          <a:lstStyle/>
-          <a:p>
-            <a:endParaRPr lang="en-US" dirty="0"/>
-          </a:p>
-        </p:txBody>
-      </p:sp>
-      <p:sp>
-        <p:nvSpPr>
-          <p:cNvPr id="4" name="Slide Number Placeholder 3"/>
-          <p:cNvSpPr>
-            <a:spLocks noGrp="1"/>
-          </p:cNvSpPr>
-          <p:nvPr>
-            <p:ph type="sldNum" sz="quarter" idx="5"/>
-          </p:nvPr>
-        </p:nvSpPr>
-        <p:spPr/>
-        <p:txBody>
-          <a:bodyPr/>
-          <a:lstStyle/>
-          <a:p>
-            <a:fld id="{17732C3C-A191-48C2-A7E8-9C96AF841A7A}" type="slidenum">
-              <a:rPr lang="en-US" smtClean="0"/>
-              <a:t>7</a:t>
-            </a:fld>
-            <a:endParaRPr lang="en-US" dirty="0"/>
-          </a:p>
-        </p:txBody>
-      </p:sp>
-    </p:spTree>
-    <p:extLst>
-      <p:ext uri="{BB962C8B-B14F-4D97-AF65-F5344CB8AC3E}">
-        <p14:creationId xmlns:p14="http://schemas.microsoft.com/office/powerpoint/2010/main" val="3238281505"/>
-      </p:ext>
-    </p:extLst>
-  </p:cSld>
-  <p:clrMapOvr>
-    <a:masterClrMapping/>
-  </p:clrMapOvr>
-</p:notes>
-</file>
-
-<file path=ppt/notesSlides/notesSlide8.xml><?xml version="1.0" encoding="utf-8"?>
-<p:notes xmlns:a="http://schemas.openxmlformats.org/drawingml/2006/main" xmlns:r="http://schemas.openxmlformats.org/officeDocument/2006/relationships" xmlns:p="http://schemas.openxmlformats.org/presentationml/2006/main">
-  <p:cSld>
-    <p:spTree>
-      <p:nvGrpSpPr>
-        <p:cNvPr id="1" name=""/>
-        <p:cNvGrpSpPr/>
-        <p:nvPr/>
-      </p:nvGrpSpPr>
-      <p:grpSpPr>
-        <a:xfrm>
-          <a:off x="0" y="0"/>
-          <a:ext cx="0" cy="0"/>
-          <a:chOff x="0" y="0"/>
-          <a:chExt cx="0" cy="0"/>
-        </a:xfrm>
-      </p:grpSpPr>
-      <p:sp>
-        <p:nvSpPr>
-          <p:cNvPr id="2" name="Slide Image Placeholder 1"/>
-          <p:cNvSpPr>
-            <a:spLocks noGrp="1" noRot="1" noChangeAspect="1"/>
-          </p:cNvSpPr>
-          <p:nvPr>
-            <p:ph type="sldImg"/>
-          </p:nvPr>
-        </p:nvSpPr>
-        <p:spPr/>
-        <p:txBody>
-          <a:bodyPr/>
-          <a:lstStyle/>
-          <a:p>
-            <a:endParaRPr lang="en-CA"/>
-          </a:p>
-        </p:txBody>
-      </p:sp>
-      <p:sp>
-        <p:nvSpPr>
-          <p:cNvPr id="3" name="Notes Placeholder 2"/>
-          <p:cNvSpPr>
-            <a:spLocks noGrp="1"/>
-          </p:cNvSpPr>
-          <p:nvPr>
-            <p:ph type="body" idx="1"/>
-          </p:nvPr>
-        </p:nvSpPr>
-        <p:spPr/>
-        <p:txBody>
-          <a:bodyPr/>
-          <a:lstStyle/>
-          <a:p>
-            <a:endParaRPr lang="en-US" dirty="0"/>
-          </a:p>
-        </p:txBody>
-      </p:sp>
-      <p:sp>
-        <p:nvSpPr>
-          <p:cNvPr id="4" name="Slide Number Placeholder 3"/>
-          <p:cNvSpPr>
-            <a:spLocks noGrp="1"/>
-          </p:cNvSpPr>
-          <p:nvPr>
-            <p:ph type="sldNum" sz="quarter" idx="5"/>
-          </p:nvPr>
-        </p:nvSpPr>
-        <p:spPr/>
-        <p:txBody>
-          <a:bodyPr/>
-          <a:lstStyle/>
-          <a:p>
-            <a:fld id="{17732C3C-A191-48C2-A7E8-9C96AF841A7A}" type="slidenum">
-              <a:rPr lang="en-US" smtClean="0"/>
-              <a:t>8</a:t>
-            </a:fld>
-            <a:endParaRPr lang="en-US" dirty="0"/>
-          </a:p>
-        </p:txBody>
-      </p:sp>
-    </p:spTree>
-    <p:extLst>
-      <p:ext uri="{BB962C8B-B14F-4D97-AF65-F5344CB8AC3E}">
-        <p14:creationId xmlns:p14="http://schemas.microsoft.com/office/powerpoint/2010/main" val="3597506030"/>
-      </p:ext>
-    </p:extLst>
-  </p:cSld>
-  <p:clrMapOvr>
-    <a:masterClrMapping/>
-  </p:clrMapOvr>
-</p:notes>
-</file>
-
-<file path=ppt/notesSlides/notesSlide9.xml><?xml version="1.0" encoding="utf-8"?>
-<p:notes xmlns:a="http://schemas.openxmlformats.org/drawingml/2006/main" xmlns:r="http://schemas.openxmlformats.org/officeDocument/2006/relationships" xmlns:p="http://schemas.openxmlformats.org/presentationml/2006/main">
-  <p:cSld>
-    <p:spTree>
-      <p:nvGrpSpPr>
-        <p:cNvPr id="1" name=""/>
-        <p:cNvGrpSpPr/>
-        <p:nvPr/>
-      </p:nvGrpSpPr>
-      <p:grpSpPr>
-        <a:xfrm>
-          <a:off x="0" y="0"/>
-          <a:ext cx="0" cy="0"/>
-          <a:chOff x="0" y="0"/>
-          <a:chExt cx="0" cy="0"/>
-        </a:xfrm>
-      </p:grpSpPr>
-      <p:sp>
-        <p:nvSpPr>
-          <p:cNvPr id="2" name="Slide Image Placeholder 1"/>
-          <p:cNvSpPr>
-            <a:spLocks noGrp="1" noRot="1" noChangeAspect="1"/>
-          </p:cNvSpPr>
-          <p:nvPr>
-            <p:ph type="sldImg"/>
-          </p:nvPr>
-        </p:nvSpPr>
-        <p:spPr/>
-        <p:txBody>
-          <a:bodyPr/>
-          <a:lstStyle/>
-          <a:p>
-            <a:endParaRPr lang="en-CA"/>
-          </a:p>
-        </p:txBody>
-      </p:sp>
-      <p:sp>
-        <p:nvSpPr>
-          <p:cNvPr id="3" name="Notes Placeholder 2"/>
-          <p:cNvSpPr>
-            <a:spLocks noGrp="1"/>
-          </p:cNvSpPr>
-          <p:nvPr>
-            <p:ph type="body" idx="1"/>
-          </p:nvPr>
-        </p:nvSpPr>
-        <p:spPr/>
-        <p:txBody>
-          <a:bodyPr/>
-          <a:lstStyle/>
-          <a:p>
-            <a:endParaRPr lang="en-US" dirty="0"/>
-          </a:p>
-        </p:txBody>
-      </p:sp>
-      <p:sp>
-        <p:nvSpPr>
-          <p:cNvPr id="4" name="Slide Number Placeholder 3"/>
-          <p:cNvSpPr>
-            <a:spLocks noGrp="1"/>
-          </p:cNvSpPr>
-          <p:nvPr>
-            <p:ph type="sldNum" sz="quarter" idx="5"/>
-          </p:nvPr>
-        </p:nvSpPr>
-        <p:spPr/>
-        <p:txBody>
-          <a:bodyPr/>
-          <a:lstStyle/>
-          <a:p>
-            <a:fld id="{17732C3C-A191-48C2-A7E8-9C96AF841A7A}" type="slidenum">
-              <a:rPr lang="en-US" smtClean="0"/>
-              <a:t>9</a:t>
-            </a:fld>
-            <a:endParaRPr lang="en-US" dirty="0"/>
-          </a:p>
-        </p:txBody>
-      </p:sp>
-    </p:spTree>
-    <p:extLst>
-      <p:ext uri="{BB962C8B-B14F-4D97-AF65-F5344CB8AC3E}">
-        <p14:creationId xmlns:p14="http://schemas.microsoft.com/office/powerpoint/2010/main" val="52723135"/>
       </p:ext>
     </p:extLst>
   </p:cSld>
@@ -12034,7 +7229,7 @@
           <a:p>
             <a:fld id="{86F7BD38-A805-4B2C-9BDF-D56E94387879}" type="datetime1">
               <a:rPr lang="en-US" smtClean="0"/>
-              <a:t>10/18/2026</a:t>
+              <a:t>10/19/2026</a:t>
             </a:fld>
             <a:endParaRPr lang="en-US" dirty="0"/>
           </a:p>
@@ -12608,1551 +7803,6 @@
 </p:sld>
 </file>
 
-<file path=ppt/slides/slide10.xml><?xml version="1.0" encoding="utf-8"?>
-<p:sld xmlns:a="http://schemas.openxmlformats.org/drawingml/2006/main" xmlns:r="http://schemas.openxmlformats.org/officeDocument/2006/relationships" xmlns:p="http://schemas.openxmlformats.org/presentationml/2006/main">
-  <p:cSld>
-    <p:spTree>
-      <p:nvGrpSpPr>
-        <p:cNvPr id="1" name=""/>
-        <p:cNvGrpSpPr/>
-        <p:nvPr/>
-      </p:nvGrpSpPr>
-      <p:grpSpPr>
-        <a:xfrm>
-          <a:off x="0" y="0"/>
-          <a:ext cx="0" cy="0"/>
-          <a:chOff x="0" y="0"/>
-          <a:chExt cx="0" cy="0"/>
-        </a:xfrm>
-      </p:grpSpPr>
-      <p:sp>
-        <p:nvSpPr>
-          <p:cNvPr id="2" name="Title 1">
-            <a:extLst>
-              <a:ext uri="{FF2B5EF4-FFF2-40B4-BE49-F238E27FC236}">
-                <a16:creationId xmlns:a16="http://schemas.microsoft.com/office/drawing/2014/main" id="{10B97DFA-9278-9CB6-C5BC-520AB107B9E7}"/>
-              </a:ext>
-            </a:extLst>
-          </p:cNvPr>
-          <p:cNvSpPr>
-            <a:spLocks noGrp="1"/>
-          </p:cNvSpPr>
-          <p:nvPr>
-            <p:ph type="title"/>
-          </p:nvPr>
-        </p:nvSpPr>
-        <p:spPr>
-          <a:xfrm>
-            <a:off x="810001" y="685800"/>
-            <a:ext cx="10571998" cy="2983528"/>
-          </a:xfrm>
-        </p:spPr>
-        <p:txBody>
-          <a:bodyPr/>
-          <a:lstStyle/>
-          <a:p>
-            <a:pPr lvl="0"/>
-            <a:r>
-              <a:rPr lang="en-US" noProof="0" dirty="0"/>
-              <a:t>Innovative decisions</a:t>
-            </a:r>
-          </a:p>
-        </p:txBody>
-      </p:sp>
-    </p:spTree>
-    <p:extLst>
-      <p:ext uri="{BB962C8B-B14F-4D97-AF65-F5344CB8AC3E}">
-        <p14:creationId xmlns:p14="http://schemas.microsoft.com/office/powerpoint/2010/main" val="1722147624"/>
-      </p:ext>
-    </p:extLst>
-  </p:cSld>
-  <p:clrMapOvr>
-    <a:masterClrMapping/>
-  </p:clrMapOvr>
-</p:sld>
-</file>
-
-<file path=ppt/slides/slide11.xml><?xml version="1.0" encoding="utf-8"?>
-<p:sld xmlns:a="http://schemas.openxmlformats.org/drawingml/2006/main" xmlns:r="http://schemas.openxmlformats.org/officeDocument/2006/relationships" xmlns:p="http://schemas.openxmlformats.org/presentationml/2006/main">
-  <p:cSld>
-    <p:spTree>
-      <p:nvGrpSpPr>
-        <p:cNvPr id="1" name=""/>
-        <p:cNvGrpSpPr/>
-        <p:nvPr/>
-      </p:nvGrpSpPr>
-      <p:grpSpPr>
-        <a:xfrm>
-          <a:off x="0" y="0"/>
-          <a:ext cx="0" cy="0"/>
-          <a:chOff x="0" y="0"/>
-          <a:chExt cx="0" cy="0"/>
-        </a:xfrm>
-      </p:grpSpPr>
-      <p:sp>
-        <p:nvSpPr>
-          <p:cNvPr id="7" name="Title 6">
-            <a:extLst>
-              <a:ext uri="{FF2B5EF4-FFF2-40B4-BE49-F238E27FC236}">
-                <a16:creationId xmlns:a16="http://schemas.microsoft.com/office/drawing/2014/main" id="{C85972AC-EBF0-AEDE-17FB-A51EAA83AA0E}"/>
-              </a:ext>
-            </a:extLst>
-          </p:cNvPr>
-          <p:cNvSpPr>
-            <a:spLocks noGrp="1"/>
-          </p:cNvSpPr>
-          <p:nvPr>
-            <p:ph type="title"/>
-          </p:nvPr>
-        </p:nvSpPr>
-        <p:spPr>
-          <a:xfrm>
-            <a:off x="8036952" y="477518"/>
-            <a:ext cx="3829465" cy="2693887"/>
-          </a:xfrm>
-        </p:spPr>
-        <p:txBody>
-          <a:bodyPr/>
-          <a:lstStyle/>
-          <a:p>
-            <a:r>
-              <a:rPr lang="en-US" dirty="0"/>
-              <a:t>Quarterly </a:t>
-            </a:r>
-            <a:br>
-              <a:rPr lang="en-US" dirty="0"/>
-            </a:br>
-            <a:r>
-              <a:rPr lang="en-US" dirty="0"/>
-              <a:t>targets</a:t>
-            </a:r>
-          </a:p>
-        </p:txBody>
-      </p:sp>
-      <p:graphicFrame>
-        <p:nvGraphicFramePr>
-          <p:cNvPr id="5" name="Table Placeholder 2">
-            <a:extLst>
-              <a:ext uri="{FF2B5EF4-FFF2-40B4-BE49-F238E27FC236}">
-                <a16:creationId xmlns:a16="http://schemas.microsoft.com/office/drawing/2014/main" id="{24545555-334D-A441-D564-80D14651D448}"/>
-              </a:ext>
-            </a:extLst>
-          </p:cNvPr>
-          <p:cNvGraphicFramePr>
-            <a:graphicFrameLocks noGrp="1"/>
-          </p:cNvGraphicFramePr>
-          <p:nvPr>
-            <p:ph type="tbl" sz="quarter" idx="11"/>
-            <p:extLst>
-              <p:ext uri="{D42A27DB-BD31-4B8C-83A1-F6EECF244321}">
-                <p14:modId xmlns:p14="http://schemas.microsoft.com/office/powerpoint/2010/main" val="3030438718"/>
-              </p:ext>
-            </p:extLst>
-          </p:nvPr>
-        </p:nvGraphicFramePr>
-        <p:xfrm>
-          <a:off x="952500" y="909638"/>
-          <a:ext cx="5577840" cy="5040064"/>
-        </p:xfrm>
-        <a:graphic>
-          <a:graphicData uri="http://schemas.openxmlformats.org/drawingml/2006/table">
-            <a:tbl>
-              <a:tblPr firstRow="1" bandRow="1">
-                <a:tableStyleId>{1E171933-4619-4E11-9A3F-F7608DF75F80}</a:tableStyleId>
-              </a:tblPr>
-              <a:tblGrid>
-                <a:gridCol w="1394460">
-                  <a:extLst>
-                    <a:ext uri="{9D8B030D-6E8A-4147-A177-3AD203B41FA5}">
-                      <a16:colId xmlns:a16="http://schemas.microsoft.com/office/drawing/2014/main" val="30750867"/>
-                    </a:ext>
-                  </a:extLst>
-                </a:gridCol>
-                <a:gridCol w="1394460">
-                  <a:extLst>
-                    <a:ext uri="{9D8B030D-6E8A-4147-A177-3AD203B41FA5}">
-                      <a16:colId xmlns:a16="http://schemas.microsoft.com/office/drawing/2014/main" val="1038941322"/>
-                    </a:ext>
-                  </a:extLst>
-                </a:gridCol>
-                <a:gridCol w="1394460">
-                  <a:extLst>
-                    <a:ext uri="{9D8B030D-6E8A-4147-A177-3AD203B41FA5}">
-                      <a16:colId xmlns:a16="http://schemas.microsoft.com/office/drawing/2014/main" val="529645500"/>
-                    </a:ext>
-                  </a:extLst>
-                </a:gridCol>
-                <a:gridCol w="1394460">
-                  <a:extLst>
-                    <a:ext uri="{9D8B030D-6E8A-4147-A177-3AD203B41FA5}">
-                      <a16:colId xmlns:a16="http://schemas.microsoft.com/office/drawing/2014/main" val="3469610457"/>
-                    </a:ext>
-                  </a:extLst>
-                </a:gridCol>
-              </a:tblGrid>
-              <a:tr h="1236856">
-                <a:tc>
-                  <a:txBody>
-                    <a:bodyPr/>
-                    <a:lstStyle/>
-                    <a:p>
-                      <a:pPr algn="ctr"/>
-                      <a:r>
-                        <a:rPr lang="en-US" dirty="0">
-                          <a:solidFill>
-                            <a:schemeClr val="accent1">
-                              <a:lumMod val="50000"/>
-                            </a:schemeClr>
-                          </a:solidFill>
-                        </a:rPr>
-                        <a:t>Quarter</a:t>
-                      </a:r>
-                    </a:p>
-                  </a:txBody>
-                  <a:tcPr anchor="ctr"/>
-                </a:tc>
-                <a:tc>
-                  <a:txBody>
-                    <a:bodyPr/>
-                    <a:lstStyle/>
-                    <a:p>
-                      <a:pPr algn="ctr"/>
-                      <a:r>
-                        <a:rPr lang="en-US" dirty="0">
-                          <a:solidFill>
-                            <a:schemeClr val="accent1">
-                              <a:lumMod val="50000"/>
-                            </a:schemeClr>
-                          </a:solidFill>
-                        </a:rPr>
-                        <a:t>Revenue growth (%)</a:t>
-                      </a:r>
-                    </a:p>
-                  </a:txBody>
-                  <a:tcPr anchor="ctr"/>
-                </a:tc>
-                <a:tc>
-                  <a:txBody>
-                    <a:bodyPr/>
-                    <a:lstStyle/>
-                    <a:p>
-                      <a:pPr algn="ctr"/>
-                      <a:r>
-                        <a:rPr lang="en-US" dirty="0">
-                          <a:solidFill>
-                            <a:schemeClr val="accent1">
-                              <a:lumMod val="50000"/>
-                            </a:schemeClr>
-                          </a:solidFill>
-                        </a:rPr>
-                        <a:t>Market share increase (%)</a:t>
-                      </a:r>
-                    </a:p>
-                  </a:txBody>
-                  <a:tcPr anchor="ctr"/>
-                </a:tc>
-                <a:tc>
-                  <a:txBody>
-                    <a:bodyPr/>
-                    <a:lstStyle/>
-                    <a:p>
-                      <a:pPr algn="ctr"/>
-                      <a:r>
-                        <a:rPr lang="en-US" dirty="0">
-                          <a:solidFill>
-                            <a:schemeClr val="accent1">
-                              <a:lumMod val="50000"/>
-                            </a:schemeClr>
-                          </a:solidFill>
-                        </a:rPr>
-                        <a:t>Customer acquisition</a:t>
-                      </a:r>
-                    </a:p>
-                  </a:txBody>
-                  <a:tcPr anchor="ctr"/>
-                </a:tc>
-                <a:extLst>
-                  <a:ext uri="{0D108BD9-81ED-4DB2-BD59-A6C34878D82A}">
-                    <a16:rowId xmlns:a16="http://schemas.microsoft.com/office/drawing/2014/main" val="4251432886"/>
-                  </a:ext>
-                </a:extLst>
-              </a:tr>
-              <a:tr h="950802">
-                <a:tc>
-                  <a:txBody>
-                    <a:bodyPr/>
-                    <a:lstStyle/>
-                    <a:p>
-                      <a:pPr algn="ctr"/>
-                      <a:r>
-                        <a:rPr lang="en-US" dirty="0"/>
-                        <a:t>Q1</a:t>
-                      </a:r>
-                    </a:p>
-                  </a:txBody>
-                  <a:tcPr anchor="ctr"/>
-                </a:tc>
-                <a:tc>
-                  <a:txBody>
-                    <a:bodyPr/>
-                    <a:lstStyle/>
-                    <a:p>
-                      <a:pPr algn="ctr"/>
-                      <a:r>
-                        <a:rPr lang="en-US" dirty="0"/>
-                        <a:t>12</a:t>
-                      </a:r>
-                    </a:p>
-                  </a:txBody>
-                  <a:tcPr anchor="ctr"/>
-                </a:tc>
-                <a:tc>
-                  <a:txBody>
-                    <a:bodyPr/>
-                    <a:lstStyle/>
-                    <a:p>
-                      <a:pPr algn="ctr"/>
-                      <a:r>
-                        <a:rPr lang="en-US" dirty="0"/>
-                        <a:t>2</a:t>
-                      </a:r>
-                    </a:p>
-                  </a:txBody>
-                  <a:tcPr anchor="ctr"/>
-                </a:tc>
-                <a:tc>
-                  <a:txBody>
-                    <a:bodyPr/>
-                    <a:lstStyle/>
-                    <a:p>
-                      <a:pPr algn="ctr"/>
-                      <a:r>
-                        <a:rPr lang="en-US" dirty="0"/>
-                        <a:t>500</a:t>
-                      </a:r>
-                    </a:p>
-                  </a:txBody>
-                  <a:tcPr anchor="ctr"/>
-                </a:tc>
-                <a:extLst>
-                  <a:ext uri="{0D108BD9-81ED-4DB2-BD59-A6C34878D82A}">
-                    <a16:rowId xmlns:a16="http://schemas.microsoft.com/office/drawing/2014/main" val="360240625"/>
-                  </a:ext>
-                </a:extLst>
-              </a:tr>
-              <a:tr h="950802">
-                <a:tc>
-                  <a:txBody>
-                    <a:bodyPr/>
-                    <a:lstStyle/>
-                    <a:p>
-                      <a:pPr algn="ctr"/>
-                      <a:r>
-                        <a:rPr lang="en-US" dirty="0"/>
-                        <a:t>Q2</a:t>
-                      </a:r>
-                    </a:p>
-                  </a:txBody>
-                  <a:tcPr anchor="ctr"/>
-                </a:tc>
-                <a:tc>
-                  <a:txBody>
-                    <a:bodyPr/>
-                    <a:lstStyle/>
-                    <a:p>
-                      <a:pPr algn="ctr"/>
-                      <a:r>
-                        <a:rPr lang="en-US" dirty="0"/>
-                        <a:t>15</a:t>
-                      </a:r>
-                    </a:p>
-                  </a:txBody>
-                  <a:tcPr anchor="ctr"/>
-                </a:tc>
-                <a:tc>
-                  <a:txBody>
-                    <a:bodyPr/>
-                    <a:lstStyle/>
-                    <a:p>
-                      <a:pPr algn="ctr"/>
-                      <a:r>
-                        <a:rPr lang="en-US" dirty="0"/>
-                        <a:t>3</a:t>
-                      </a:r>
-                    </a:p>
-                  </a:txBody>
-                  <a:tcPr anchor="ctr"/>
-                </a:tc>
-                <a:tc>
-                  <a:txBody>
-                    <a:bodyPr/>
-                    <a:lstStyle/>
-                    <a:p>
-                      <a:pPr algn="ctr"/>
-                      <a:r>
-                        <a:rPr lang="en-US" dirty="0"/>
-                        <a:t>600</a:t>
-                      </a:r>
-                    </a:p>
-                  </a:txBody>
-                  <a:tcPr anchor="ctr"/>
-                </a:tc>
-                <a:extLst>
-                  <a:ext uri="{0D108BD9-81ED-4DB2-BD59-A6C34878D82A}">
-                    <a16:rowId xmlns:a16="http://schemas.microsoft.com/office/drawing/2014/main" val="2762393470"/>
-                  </a:ext>
-                </a:extLst>
-              </a:tr>
-              <a:tr h="950802">
-                <a:tc>
-                  <a:txBody>
-                    <a:bodyPr/>
-                    <a:lstStyle/>
-                    <a:p>
-                      <a:pPr algn="ctr"/>
-                      <a:r>
-                        <a:rPr lang="en-US" dirty="0"/>
-                        <a:t>Q3</a:t>
-                      </a:r>
-                    </a:p>
-                  </a:txBody>
-                  <a:tcPr anchor="ctr"/>
-                </a:tc>
-                <a:tc>
-                  <a:txBody>
-                    <a:bodyPr/>
-                    <a:lstStyle/>
-                    <a:p>
-                      <a:pPr algn="ctr"/>
-                      <a:r>
-                        <a:rPr lang="en-US" dirty="0"/>
-                        <a:t>18</a:t>
-                      </a:r>
-                    </a:p>
-                  </a:txBody>
-                  <a:tcPr anchor="ctr"/>
-                </a:tc>
-                <a:tc>
-                  <a:txBody>
-                    <a:bodyPr/>
-                    <a:lstStyle/>
-                    <a:p>
-                      <a:pPr algn="ctr"/>
-                      <a:r>
-                        <a:rPr lang="en-US" dirty="0"/>
-                        <a:t>4</a:t>
-                      </a:r>
-                    </a:p>
-                  </a:txBody>
-                  <a:tcPr anchor="ctr"/>
-                </a:tc>
-                <a:tc>
-                  <a:txBody>
-                    <a:bodyPr/>
-                    <a:lstStyle/>
-                    <a:p>
-                      <a:pPr algn="ctr"/>
-                      <a:r>
-                        <a:rPr lang="en-US" dirty="0"/>
-                        <a:t>700</a:t>
-                      </a:r>
-                    </a:p>
-                  </a:txBody>
-                  <a:tcPr anchor="ctr"/>
-                </a:tc>
-                <a:extLst>
-                  <a:ext uri="{0D108BD9-81ED-4DB2-BD59-A6C34878D82A}">
-                    <a16:rowId xmlns:a16="http://schemas.microsoft.com/office/drawing/2014/main" val="1311364400"/>
-                  </a:ext>
-                </a:extLst>
-              </a:tr>
-              <a:tr h="950802">
-                <a:tc>
-                  <a:txBody>
-                    <a:bodyPr/>
-                    <a:lstStyle/>
-                    <a:p>
-                      <a:pPr algn="ctr"/>
-                      <a:r>
-                        <a:rPr lang="en-US" dirty="0"/>
-                        <a:t>Q4</a:t>
-                      </a:r>
-                    </a:p>
-                  </a:txBody>
-                  <a:tcPr anchor="ctr"/>
-                </a:tc>
-                <a:tc>
-                  <a:txBody>
-                    <a:bodyPr/>
-                    <a:lstStyle/>
-                    <a:p>
-                      <a:pPr algn="ctr"/>
-                      <a:r>
-                        <a:rPr lang="en-US" dirty="0"/>
-                        <a:t>20</a:t>
-                      </a:r>
-                    </a:p>
-                  </a:txBody>
-                  <a:tcPr anchor="ctr"/>
-                </a:tc>
-                <a:tc>
-                  <a:txBody>
-                    <a:bodyPr/>
-                    <a:lstStyle/>
-                    <a:p>
-                      <a:pPr algn="ctr"/>
-                      <a:r>
-                        <a:rPr lang="en-US" dirty="0"/>
-                        <a:t>5</a:t>
-                      </a:r>
-                    </a:p>
-                  </a:txBody>
-                  <a:tcPr anchor="ctr"/>
-                </a:tc>
-                <a:tc>
-                  <a:txBody>
-                    <a:bodyPr/>
-                    <a:lstStyle/>
-                    <a:p>
-                      <a:pPr algn="ctr"/>
-                      <a:r>
-                        <a:rPr lang="en-US" dirty="0"/>
-                        <a:t>800</a:t>
-                      </a:r>
-                    </a:p>
-                  </a:txBody>
-                  <a:tcPr anchor="ctr"/>
-                </a:tc>
-                <a:extLst>
-                  <a:ext uri="{0D108BD9-81ED-4DB2-BD59-A6C34878D82A}">
-                    <a16:rowId xmlns:a16="http://schemas.microsoft.com/office/drawing/2014/main" val="2526263980"/>
-                  </a:ext>
-                </a:extLst>
-              </a:tr>
-            </a:tbl>
-          </a:graphicData>
-        </a:graphic>
-      </p:graphicFrame>
-      <p:sp>
-        <p:nvSpPr>
-          <p:cNvPr id="8" name="Content Placeholder 7">
-            <a:extLst>
-              <a:ext uri="{FF2B5EF4-FFF2-40B4-BE49-F238E27FC236}">
-                <a16:creationId xmlns:a16="http://schemas.microsoft.com/office/drawing/2014/main" id="{A900955D-4691-EA42-252F-2D3B626B48CD}"/>
-              </a:ext>
-            </a:extLst>
-          </p:cNvPr>
-          <p:cNvSpPr>
-            <a:spLocks noGrp="1"/>
-          </p:cNvSpPr>
-          <p:nvPr>
-            <p:ph sz="quarter" idx="10"/>
-          </p:nvPr>
-        </p:nvSpPr>
-        <p:spPr>
-          <a:xfrm>
-            <a:off x="8036953" y="3449781"/>
-            <a:ext cx="3829465" cy="2940860"/>
-          </a:xfrm>
-        </p:spPr>
-        <p:txBody>
-          <a:bodyPr/>
-          <a:lstStyle/>
-          <a:p>
-            <a:pPr lvl="0"/>
-            <a:r>
-              <a:rPr lang="en-US" noProof="0" dirty="0"/>
-              <a:t>Market expansion</a:t>
-            </a:r>
-          </a:p>
-          <a:p>
-            <a:pPr lvl="0"/>
-            <a:r>
-              <a:rPr lang="en-US" noProof="0" dirty="0"/>
-              <a:t>Product innovation</a:t>
-            </a:r>
-          </a:p>
-          <a:p>
-            <a:pPr lvl="0"/>
-            <a:r>
-              <a:rPr lang="en-US" noProof="0" dirty="0"/>
-              <a:t>Customer retention</a:t>
-            </a:r>
-          </a:p>
-          <a:p>
-            <a:pPr lvl="0"/>
-            <a:r>
-              <a:rPr lang="en-US" noProof="0" dirty="0"/>
-              <a:t>Operational efficiency</a:t>
-            </a:r>
-          </a:p>
-        </p:txBody>
-      </p:sp>
-    </p:spTree>
-    <p:extLst>
-      <p:ext uri="{BB962C8B-B14F-4D97-AF65-F5344CB8AC3E}">
-        <p14:creationId xmlns:p14="http://schemas.microsoft.com/office/powerpoint/2010/main" val="2610945053"/>
-      </p:ext>
-    </p:extLst>
-  </p:cSld>
-  <p:clrMapOvr>
-    <a:masterClrMapping/>
-  </p:clrMapOvr>
-</p:sld>
-</file>
-
-<file path=ppt/slides/slide12.xml><?xml version="1.0" encoding="utf-8"?>
-<p:sld xmlns:a="http://schemas.openxmlformats.org/drawingml/2006/main" xmlns:r="http://schemas.openxmlformats.org/officeDocument/2006/relationships" xmlns:p="http://schemas.openxmlformats.org/presentationml/2006/main">
-  <p:cSld>
-    <p:spTree>
-      <p:nvGrpSpPr>
-        <p:cNvPr id="1" name=""/>
-        <p:cNvGrpSpPr/>
-        <p:nvPr/>
-      </p:nvGrpSpPr>
-      <p:grpSpPr>
-        <a:xfrm>
-          <a:off x="0" y="0"/>
-          <a:ext cx="0" cy="0"/>
-          <a:chOff x="0" y="0"/>
-          <a:chExt cx="0" cy="0"/>
-        </a:xfrm>
-      </p:grpSpPr>
-      <p:sp>
-        <p:nvSpPr>
-          <p:cNvPr id="3" name="Title 2">
-            <a:extLst>
-              <a:ext uri="{FF2B5EF4-FFF2-40B4-BE49-F238E27FC236}">
-                <a16:creationId xmlns:a16="http://schemas.microsoft.com/office/drawing/2014/main" id="{8F06AC8A-162C-5E86-8A29-04B6BCDD3B87}"/>
-              </a:ext>
-            </a:extLst>
-          </p:cNvPr>
-          <p:cNvSpPr>
-            <a:spLocks noGrp="1"/>
-          </p:cNvSpPr>
-          <p:nvPr>
-            <p:ph type="title"/>
-          </p:nvPr>
-        </p:nvSpPr>
-        <p:spPr>
-          <a:xfrm>
-            <a:off x="488373" y="571501"/>
-            <a:ext cx="11139054" cy="1028699"/>
-          </a:xfrm>
-        </p:spPr>
-        <p:txBody>
-          <a:bodyPr anchor="ctr"/>
-          <a:lstStyle/>
-          <a:p>
-            <a:pPr lvl="0"/>
-            <a:r>
-              <a:rPr lang="en-US" noProof="0" dirty="0"/>
-              <a:t>Financial snapshot</a:t>
-            </a:r>
-          </a:p>
-        </p:txBody>
-      </p:sp>
-      <p:graphicFrame>
-        <p:nvGraphicFramePr>
-          <p:cNvPr id="4" name="Table Placeholder 3">
-            <a:extLst>
-              <a:ext uri="{FF2B5EF4-FFF2-40B4-BE49-F238E27FC236}">
-                <a16:creationId xmlns:a16="http://schemas.microsoft.com/office/drawing/2014/main" id="{FD014E9B-B0FD-5706-E957-0CE95837C16F}"/>
-              </a:ext>
-            </a:extLst>
-          </p:cNvPr>
-          <p:cNvGraphicFramePr>
-            <a:graphicFrameLocks noGrp="1"/>
-          </p:cNvGraphicFramePr>
-          <p:nvPr>
-            <p:ph type="tbl" sz="quarter" idx="10"/>
-            <p:extLst>
-              <p:ext uri="{D42A27DB-BD31-4B8C-83A1-F6EECF244321}">
-                <p14:modId xmlns:p14="http://schemas.microsoft.com/office/powerpoint/2010/main" val="3479912015"/>
-              </p:ext>
-            </p:extLst>
-          </p:nvPr>
-        </p:nvGraphicFramePr>
-        <p:xfrm>
-          <a:off x="838200" y="1860550"/>
-          <a:ext cx="10515600" cy="4198290"/>
-        </p:xfrm>
-        <a:graphic>
-          <a:graphicData uri="http://schemas.openxmlformats.org/drawingml/2006/table">
-            <a:tbl>
-              <a:tblPr firstRow="1" bandRow="1">
-                <a:tableStyleId>{1E171933-4619-4E11-9A3F-F7608DF75F80}</a:tableStyleId>
-              </a:tblPr>
-              <a:tblGrid>
-                <a:gridCol w="2628900">
-                  <a:extLst>
-                    <a:ext uri="{9D8B030D-6E8A-4147-A177-3AD203B41FA5}">
-                      <a16:colId xmlns:a16="http://schemas.microsoft.com/office/drawing/2014/main" val="130956065"/>
-                    </a:ext>
-                  </a:extLst>
-                </a:gridCol>
-                <a:gridCol w="2628900">
-                  <a:extLst>
-                    <a:ext uri="{9D8B030D-6E8A-4147-A177-3AD203B41FA5}">
-                      <a16:colId xmlns:a16="http://schemas.microsoft.com/office/drawing/2014/main" val="2749965458"/>
-                    </a:ext>
-                  </a:extLst>
-                </a:gridCol>
-                <a:gridCol w="2628900">
-                  <a:extLst>
-                    <a:ext uri="{9D8B030D-6E8A-4147-A177-3AD203B41FA5}">
-                      <a16:colId xmlns:a16="http://schemas.microsoft.com/office/drawing/2014/main" val="2116711163"/>
-                    </a:ext>
-                  </a:extLst>
-                </a:gridCol>
-                <a:gridCol w="2628900">
-                  <a:extLst>
-                    <a:ext uri="{9D8B030D-6E8A-4147-A177-3AD203B41FA5}">
-                      <a16:colId xmlns:a16="http://schemas.microsoft.com/office/drawing/2014/main" val="1186885001"/>
-                    </a:ext>
-                  </a:extLst>
-                </a:gridCol>
-              </a:tblGrid>
-              <a:tr h="699715">
-                <a:tc>
-                  <a:txBody>
-                    <a:bodyPr/>
-                    <a:lstStyle/>
-                    <a:p>
-                      <a:pPr algn="ctr"/>
-                      <a:r>
-                        <a:rPr lang="en-US" dirty="0">
-                          <a:solidFill>
-                            <a:schemeClr val="accent1">
-                              <a:lumMod val="50000"/>
-                            </a:schemeClr>
-                          </a:solidFill>
-                        </a:rPr>
-                        <a:t>Metric</a:t>
-                      </a:r>
-                    </a:p>
-                  </a:txBody>
-                  <a:tcPr anchor="ctr"/>
-                </a:tc>
-                <a:tc>
-                  <a:txBody>
-                    <a:bodyPr/>
-                    <a:lstStyle/>
-                    <a:p>
-                      <a:pPr algn="ctr"/>
-                      <a:r>
-                        <a:rPr lang="en-US" dirty="0">
-                          <a:solidFill>
-                            <a:schemeClr val="accent1">
-                              <a:lumMod val="50000"/>
-                            </a:schemeClr>
-                          </a:solidFill>
-                        </a:rPr>
-                        <a:t>Current value</a:t>
-                      </a:r>
-                    </a:p>
-                  </a:txBody>
-                  <a:tcPr anchor="ctr"/>
-                </a:tc>
-                <a:tc>
-                  <a:txBody>
-                    <a:bodyPr/>
-                    <a:lstStyle/>
-                    <a:p>
-                      <a:pPr algn="ctr"/>
-                      <a:r>
-                        <a:rPr lang="en-US" dirty="0">
-                          <a:solidFill>
-                            <a:schemeClr val="accent1">
-                              <a:lumMod val="50000"/>
-                            </a:schemeClr>
-                          </a:solidFill>
-                        </a:rPr>
-                        <a:t>Previous quarter</a:t>
-                      </a:r>
-                    </a:p>
-                  </a:txBody>
-                  <a:tcPr anchor="ctr"/>
-                </a:tc>
-                <a:tc>
-                  <a:txBody>
-                    <a:bodyPr/>
-                    <a:lstStyle/>
-                    <a:p>
-                      <a:pPr algn="ctr"/>
-                      <a:r>
-                        <a:rPr lang="en-US" dirty="0">
-                          <a:solidFill>
-                            <a:schemeClr val="accent1">
-                              <a:lumMod val="50000"/>
-                            </a:schemeClr>
-                          </a:solidFill>
-                        </a:rPr>
-                        <a:t>Change (%)</a:t>
-                      </a:r>
-                    </a:p>
-                  </a:txBody>
-                  <a:tcPr anchor="ctr"/>
-                </a:tc>
-                <a:extLst>
-                  <a:ext uri="{0D108BD9-81ED-4DB2-BD59-A6C34878D82A}">
-                    <a16:rowId xmlns:a16="http://schemas.microsoft.com/office/drawing/2014/main" val="3741017008"/>
-                  </a:ext>
-                </a:extLst>
-              </a:tr>
-              <a:tr h="699715">
-                <a:tc>
-                  <a:txBody>
-                    <a:bodyPr/>
-                    <a:lstStyle/>
-                    <a:p>
-                      <a:pPr algn="ctr"/>
-                      <a:r>
-                        <a:rPr lang="en-US" dirty="0"/>
-                        <a:t>Revenue</a:t>
-                      </a:r>
-                    </a:p>
-                  </a:txBody>
-                  <a:tcPr anchor="ctr"/>
-                </a:tc>
-                <a:tc>
-                  <a:txBody>
-                    <a:bodyPr/>
-                    <a:lstStyle/>
-                    <a:p>
-                      <a:pPr algn="ctr"/>
-                      <a:r>
-                        <a:rPr lang="en-US" dirty="0"/>
-                        <a:t>$2,500,000</a:t>
-                      </a:r>
-                    </a:p>
-                  </a:txBody>
-                  <a:tcPr anchor="ctr"/>
-                </a:tc>
-                <a:tc>
-                  <a:txBody>
-                    <a:bodyPr/>
-                    <a:lstStyle/>
-                    <a:p>
-                      <a:pPr algn="ctr"/>
-                      <a:r>
-                        <a:rPr lang="en-US" dirty="0"/>
-                        <a:t>$2,200,000</a:t>
-                      </a:r>
-                    </a:p>
-                  </a:txBody>
-                  <a:tcPr anchor="ctr"/>
-                </a:tc>
-                <a:tc>
-                  <a:txBody>
-                    <a:bodyPr/>
-                    <a:lstStyle/>
-                    <a:p>
-                      <a:pPr algn="ctr"/>
-                      <a:r>
-                        <a:rPr lang="en-US" dirty="0"/>
-                        <a:t>+14%</a:t>
-                      </a:r>
-                    </a:p>
-                  </a:txBody>
-                  <a:tcPr anchor="ctr"/>
-                </a:tc>
-                <a:extLst>
-                  <a:ext uri="{0D108BD9-81ED-4DB2-BD59-A6C34878D82A}">
-                    <a16:rowId xmlns:a16="http://schemas.microsoft.com/office/drawing/2014/main" val="511888340"/>
-                  </a:ext>
-                </a:extLst>
-              </a:tr>
-              <a:tr h="699715">
-                <a:tc>
-                  <a:txBody>
-                    <a:bodyPr/>
-                    <a:lstStyle/>
-                    <a:p>
-                      <a:pPr algn="ctr"/>
-                      <a:r>
-                        <a:rPr lang="en-US" dirty="0"/>
-                        <a:t>Operating expenses</a:t>
-                      </a:r>
-                    </a:p>
-                  </a:txBody>
-                  <a:tcPr anchor="ctr"/>
-                </a:tc>
-                <a:tc>
-                  <a:txBody>
-                    <a:bodyPr/>
-                    <a:lstStyle/>
-                    <a:p>
-                      <a:pPr algn="ctr"/>
-                      <a:r>
-                        <a:rPr lang="en-US" dirty="0"/>
-                        <a:t>$1,200,000	</a:t>
-                      </a:r>
-                    </a:p>
-                  </a:txBody>
-                  <a:tcPr anchor="ctr"/>
-                </a:tc>
-                <a:tc>
-                  <a:txBody>
-                    <a:bodyPr/>
-                    <a:lstStyle/>
-                    <a:p>
-                      <a:pPr algn="ctr"/>
-                      <a:r>
-                        <a:rPr lang="en-US" dirty="0"/>
-                        <a:t>$1,400,000	</a:t>
-                      </a:r>
-                    </a:p>
-                  </a:txBody>
-                  <a:tcPr anchor="ctr"/>
-                </a:tc>
-                <a:tc>
-                  <a:txBody>
-                    <a:bodyPr/>
-                    <a:lstStyle/>
-                    <a:p>
-                      <a:pPr algn="ctr"/>
-                      <a:r>
-                        <a:rPr lang="en-US" dirty="0"/>
-                        <a:t>-14%</a:t>
-                      </a:r>
-                    </a:p>
-                  </a:txBody>
-                  <a:tcPr anchor="ctr"/>
-                </a:tc>
-                <a:extLst>
-                  <a:ext uri="{0D108BD9-81ED-4DB2-BD59-A6C34878D82A}">
-                    <a16:rowId xmlns:a16="http://schemas.microsoft.com/office/drawing/2014/main" val="3937089168"/>
-                  </a:ext>
-                </a:extLst>
-              </a:tr>
-              <a:tr h="699715">
-                <a:tc>
-                  <a:txBody>
-                    <a:bodyPr/>
-                    <a:lstStyle/>
-                    <a:p>
-                      <a:pPr algn="ctr"/>
-                      <a:r>
-                        <a:rPr lang="en-US" dirty="0"/>
-                        <a:t>Net profit</a:t>
-                      </a:r>
-                    </a:p>
-                  </a:txBody>
-                  <a:tcPr anchor="ctr"/>
-                </a:tc>
-                <a:tc>
-                  <a:txBody>
-                    <a:bodyPr/>
-                    <a:lstStyle/>
-                    <a:p>
-                      <a:pPr algn="ctr"/>
-                      <a:r>
-                        <a:rPr lang="en-US" dirty="0"/>
-                        <a:t>$1,000,000	</a:t>
-                      </a:r>
-                    </a:p>
-                  </a:txBody>
-                  <a:tcPr anchor="ctr"/>
-                </a:tc>
-                <a:tc>
-                  <a:txBody>
-                    <a:bodyPr/>
-                    <a:lstStyle/>
-                    <a:p>
-                      <a:pPr algn="ctr"/>
-                      <a:r>
-                        <a:rPr lang="en-US" dirty="0"/>
-                        <a:t>$800,000	</a:t>
-                      </a:r>
-                    </a:p>
-                  </a:txBody>
-                  <a:tcPr anchor="ctr"/>
-                </a:tc>
-                <a:tc>
-                  <a:txBody>
-                    <a:bodyPr/>
-                    <a:lstStyle/>
-                    <a:p>
-                      <a:pPr algn="ctr"/>
-                      <a:r>
-                        <a:rPr lang="en-US" dirty="0"/>
-                        <a:t>+25%</a:t>
-                      </a:r>
-                    </a:p>
-                  </a:txBody>
-                  <a:tcPr anchor="ctr"/>
-                </a:tc>
-                <a:extLst>
-                  <a:ext uri="{0D108BD9-81ED-4DB2-BD59-A6C34878D82A}">
-                    <a16:rowId xmlns:a16="http://schemas.microsoft.com/office/drawing/2014/main" val="1031597798"/>
-                  </a:ext>
-                </a:extLst>
-              </a:tr>
-              <a:tr h="699715">
-                <a:tc>
-                  <a:txBody>
-                    <a:bodyPr/>
-                    <a:lstStyle/>
-                    <a:p>
-                      <a:pPr algn="ctr"/>
-                      <a:r>
-                        <a:rPr lang="en-US" dirty="0"/>
-                        <a:t>Operating margin</a:t>
-                      </a:r>
-                    </a:p>
-                  </a:txBody>
-                  <a:tcPr anchor="ctr"/>
-                </a:tc>
-                <a:tc>
-                  <a:txBody>
-                    <a:bodyPr/>
-                    <a:lstStyle/>
-                    <a:p>
-                      <a:pPr algn="ctr"/>
-                      <a:r>
-                        <a:rPr lang="en-US" dirty="0"/>
-                        <a:t>40%</a:t>
-                      </a:r>
-                    </a:p>
-                  </a:txBody>
-                  <a:tcPr anchor="ctr"/>
-                </a:tc>
-                <a:tc>
-                  <a:txBody>
-                    <a:bodyPr/>
-                    <a:lstStyle/>
-                    <a:p>
-                      <a:pPr algn="ctr"/>
-                      <a:r>
-                        <a:rPr lang="en-US" dirty="0"/>
-                        <a:t>36%</a:t>
-                      </a:r>
-                    </a:p>
-                  </a:txBody>
-                  <a:tcPr anchor="ctr"/>
-                </a:tc>
-                <a:tc>
-                  <a:txBody>
-                    <a:bodyPr/>
-                    <a:lstStyle/>
-                    <a:p>
-                      <a:pPr algn="ctr"/>
-                      <a:r>
-                        <a:rPr lang="en-US" dirty="0"/>
-                        <a:t>+4%</a:t>
-                      </a:r>
-                    </a:p>
-                  </a:txBody>
-                  <a:tcPr anchor="ctr"/>
-                </a:tc>
-                <a:extLst>
-                  <a:ext uri="{0D108BD9-81ED-4DB2-BD59-A6C34878D82A}">
-                    <a16:rowId xmlns:a16="http://schemas.microsoft.com/office/drawing/2014/main" val="1194376521"/>
-                  </a:ext>
-                </a:extLst>
-              </a:tr>
-              <a:tr h="699715">
-                <a:tc>
-                  <a:txBody>
-                    <a:bodyPr/>
-                    <a:lstStyle/>
-                    <a:p>
-                      <a:pPr algn="ctr"/>
-                      <a:r>
-                        <a:rPr lang="en-US" dirty="0"/>
-                        <a:t>Cash reserves</a:t>
-                      </a:r>
-                    </a:p>
-                  </a:txBody>
-                  <a:tcPr anchor="ctr"/>
-                </a:tc>
-                <a:tc>
-                  <a:txBody>
-                    <a:bodyPr/>
-                    <a:lstStyle/>
-                    <a:p>
-                      <a:pPr algn="ctr"/>
-                      <a:r>
-                        <a:rPr lang="en-US" dirty="0"/>
-                        <a:t>$5,000,000	</a:t>
-                      </a:r>
-                    </a:p>
-                  </a:txBody>
-                  <a:tcPr anchor="ctr"/>
-                </a:tc>
-                <a:tc>
-                  <a:txBody>
-                    <a:bodyPr/>
-                    <a:lstStyle/>
-                    <a:p>
-                      <a:pPr algn="ctr"/>
-                      <a:r>
-                        <a:rPr lang="en-US" dirty="0"/>
-                        <a:t>$4,500,000	</a:t>
-                      </a:r>
-                    </a:p>
-                  </a:txBody>
-                  <a:tcPr anchor="ctr"/>
-                </a:tc>
-                <a:tc>
-                  <a:txBody>
-                    <a:bodyPr/>
-                    <a:lstStyle/>
-                    <a:p>
-                      <a:pPr algn="ctr"/>
-                      <a:r>
-                        <a:rPr lang="en-US" dirty="0"/>
-                        <a:t>+11%</a:t>
-                      </a:r>
-                    </a:p>
-                  </a:txBody>
-                  <a:tcPr anchor="ctr"/>
-                </a:tc>
-                <a:extLst>
-                  <a:ext uri="{0D108BD9-81ED-4DB2-BD59-A6C34878D82A}">
-                    <a16:rowId xmlns:a16="http://schemas.microsoft.com/office/drawing/2014/main" val="1918266800"/>
-                  </a:ext>
-                </a:extLst>
-              </a:tr>
-            </a:tbl>
-          </a:graphicData>
-        </a:graphic>
-      </p:graphicFrame>
-    </p:spTree>
-    <p:extLst>
-      <p:ext uri="{BB962C8B-B14F-4D97-AF65-F5344CB8AC3E}">
-        <p14:creationId xmlns:p14="http://schemas.microsoft.com/office/powerpoint/2010/main" val="3000970981"/>
-      </p:ext>
-    </p:extLst>
-  </p:cSld>
-  <p:clrMapOvr>
-    <a:masterClrMapping/>
-  </p:clrMapOvr>
-</p:sld>
-</file>
-
-<file path=ppt/slides/slide13.xml><?xml version="1.0" encoding="utf-8"?>
-<p:sld xmlns:a="http://schemas.openxmlformats.org/drawingml/2006/main" xmlns:r="http://schemas.openxmlformats.org/officeDocument/2006/relationships" xmlns:p="http://schemas.openxmlformats.org/presentationml/2006/main">
-  <p:cSld>
-    <p:spTree>
-      <p:nvGrpSpPr>
-        <p:cNvPr id="1" name=""/>
-        <p:cNvGrpSpPr/>
-        <p:nvPr/>
-      </p:nvGrpSpPr>
-      <p:grpSpPr>
-        <a:xfrm>
-          <a:off x="0" y="0"/>
-          <a:ext cx="0" cy="0"/>
-          <a:chOff x="0" y="0"/>
-          <a:chExt cx="0" cy="0"/>
-        </a:xfrm>
-      </p:grpSpPr>
-      <p:sp>
-        <p:nvSpPr>
-          <p:cNvPr id="2" name="Title 1">
-            <a:extLst>
-              <a:ext uri="{FF2B5EF4-FFF2-40B4-BE49-F238E27FC236}">
-                <a16:creationId xmlns:a16="http://schemas.microsoft.com/office/drawing/2014/main" id="{A97AEF70-82D5-7640-21AD-BEAC8FBD4CFF}"/>
-              </a:ext>
-            </a:extLst>
-          </p:cNvPr>
-          <p:cNvSpPr>
-            <a:spLocks noGrp="1"/>
-          </p:cNvSpPr>
-          <p:nvPr>
-            <p:ph type="title"/>
-          </p:nvPr>
-        </p:nvSpPr>
-        <p:spPr>
-          <a:xfrm>
-            <a:off x="617542" y="132080"/>
-            <a:ext cx="4928894" cy="6507711"/>
-          </a:xfrm>
-        </p:spPr>
-        <p:txBody>
-          <a:bodyPr/>
-          <a:lstStyle/>
-          <a:p>
-            <a:pPr lvl="0"/>
-            <a:r>
-              <a:rPr lang="en-US" noProof="0" dirty="0"/>
-              <a:t>Innovative solutions</a:t>
-            </a:r>
-          </a:p>
-        </p:txBody>
-      </p:sp>
-      <p:pic>
-        <p:nvPicPr>
-          <p:cNvPr id="10" name="Picture Placeholder 9">
-            <a:extLst>
-              <a:ext uri="{FF2B5EF4-FFF2-40B4-BE49-F238E27FC236}">
-                <a16:creationId xmlns:a16="http://schemas.microsoft.com/office/drawing/2014/main" id="{B1C915CE-EC91-4DEE-9C0D-2A94031D5DC3}"/>
-              </a:ext>
-              <a:ext uri="{C183D7F6-B498-43B3-948B-1728B52AA6E4}">
-                <adec:decorative xmlns:adec="http://schemas.microsoft.com/office/drawing/2017/decorative" val="1"/>
-              </a:ext>
-            </a:extLst>
-          </p:cNvPr>
-          <p:cNvPicPr>
-            <a:picLocks noGrp="1" noChangeAspect="1"/>
-          </p:cNvPicPr>
-          <p:nvPr>
-            <p:ph type="pic" sz="quarter" idx="10"/>
-          </p:nvPr>
-        </p:nvPicPr>
-        <p:blipFill rotWithShape="1">
-          <a:blip r:embed="rId3" cstate="screen">
-            <a:duotone>
-              <a:prstClr val="black"/>
-              <a:schemeClr val="accent1">
-                <a:tint val="45000"/>
-                <a:satMod val="400000"/>
-              </a:schemeClr>
-            </a:duotone>
-            <a:alphaModFix amt="50000"/>
-            <a:extLst>
-              <a:ext uri="{28A0092B-C50C-407E-A947-70E740481C1C}">
-                <a14:useLocalDpi xmlns:a14="http://schemas.microsoft.com/office/drawing/2010/main"/>
-              </a:ext>
-            </a:extLst>
-          </a:blip>
-          <a:srcRect l="101" r="101"/>
-          <a:stretch/>
-        </p:blipFill>
-        <p:spPr>
-          <a:xfrm>
-            <a:off x="7429500" y="992188"/>
-            <a:ext cx="3425825" cy="5018087"/>
-          </a:xfrm>
-        </p:spPr>
-      </p:pic>
-    </p:spTree>
-    <p:extLst>
-      <p:ext uri="{BB962C8B-B14F-4D97-AF65-F5344CB8AC3E}">
-        <p14:creationId xmlns:p14="http://schemas.microsoft.com/office/powerpoint/2010/main" val="3802808557"/>
-      </p:ext>
-    </p:extLst>
-  </p:cSld>
-  <p:clrMapOvr>
-    <a:masterClrMapping/>
-  </p:clrMapOvr>
-</p:sld>
-</file>
-
-<file path=ppt/slides/slide14.xml><?xml version="1.0" encoding="utf-8"?>
-<p:sld xmlns:a="http://schemas.openxmlformats.org/drawingml/2006/main" xmlns:r="http://schemas.openxmlformats.org/officeDocument/2006/relationships" xmlns:p="http://schemas.openxmlformats.org/presentationml/2006/main">
-  <p:cSld>
-    <p:spTree>
-      <p:nvGrpSpPr>
-        <p:cNvPr id="1" name=""/>
-        <p:cNvGrpSpPr/>
-        <p:nvPr/>
-      </p:nvGrpSpPr>
-      <p:grpSpPr>
-        <a:xfrm>
-          <a:off x="0" y="0"/>
-          <a:ext cx="0" cy="0"/>
-          <a:chOff x="0" y="0"/>
-          <a:chExt cx="0" cy="0"/>
-        </a:xfrm>
-      </p:grpSpPr>
-      <p:sp>
-        <p:nvSpPr>
-          <p:cNvPr id="2" name="Title 1">
-            <a:extLst>
-              <a:ext uri="{FF2B5EF4-FFF2-40B4-BE49-F238E27FC236}">
-                <a16:creationId xmlns:a16="http://schemas.microsoft.com/office/drawing/2014/main" id="{690E1BB1-C5B6-C34A-6087-4868288761AF}"/>
-              </a:ext>
-            </a:extLst>
-          </p:cNvPr>
-          <p:cNvSpPr>
-            <a:spLocks noGrp="1"/>
-          </p:cNvSpPr>
-          <p:nvPr>
-            <p:ph type="title"/>
-          </p:nvPr>
-        </p:nvSpPr>
-        <p:spPr>
-          <a:xfrm>
-            <a:off x="529935" y="571499"/>
-            <a:ext cx="11118274" cy="1154114"/>
-          </a:xfrm>
-        </p:spPr>
-        <p:txBody>
-          <a:bodyPr/>
-          <a:lstStyle/>
-          <a:p>
-            <a:pPr lvl="0"/>
-            <a:r>
-              <a:rPr lang="en-US" noProof="0" dirty="0"/>
-              <a:t>Future initiatives</a:t>
-            </a:r>
-          </a:p>
-        </p:txBody>
-      </p:sp>
-      <p:sp>
-        <p:nvSpPr>
-          <p:cNvPr id="3" name="Content Placeholder 2">
-            <a:extLst>
-              <a:ext uri="{FF2B5EF4-FFF2-40B4-BE49-F238E27FC236}">
-                <a16:creationId xmlns:a16="http://schemas.microsoft.com/office/drawing/2014/main" id="{0A77EDD1-5A8E-0F37-E892-65A530E36B20}"/>
-              </a:ext>
-            </a:extLst>
-          </p:cNvPr>
-          <p:cNvSpPr>
-            <a:spLocks noGrp="1"/>
-          </p:cNvSpPr>
-          <p:nvPr>
-            <p:ph sz="quarter" idx="17"/>
-          </p:nvPr>
-        </p:nvSpPr>
-        <p:spPr>
-          <a:xfrm>
-            <a:off x="841667" y="2461056"/>
-            <a:ext cx="3626424" cy="3721535"/>
-          </a:xfrm>
-        </p:spPr>
-        <p:txBody>
-          <a:bodyPr/>
-          <a:lstStyle/>
-          <a:p>
-            <a:pPr lvl="0"/>
-            <a:r>
-              <a:rPr lang="en-US" noProof="0" dirty="0"/>
-              <a:t>Green supply chain</a:t>
-            </a:r>
-          </a:p>
-          <a:p>
-            <a:pPr lvl="0"/>
-            <a:r>
-              <a:rPr lang="en-US" noProof="0" dirty="0"/>
-              <a:t>Reduced carbon footprint</a:t>
-            </a:r>
-          </a:p>
-          <a:p>
-            <a:pPr lvl="0"/>
-            <a:r>
-              <a:rPr lang="en-US" noProof="0" dirty="0"/>
-              <a:t>Waste reduction</a:t>
-            </a:r>
-          </a:p>
-          <a:p>
-            <a:pPr lvl="0"/>
-            <a:r>
-              <a:rPr lang="en-US" noProof="0" dirty="0"/>
-              <a:t>Water conservation</a:t>
-            </a:r>
-          </a:p>
-        </p:txBody>
-      </p:sp>
-      <p:sp>
-        <p:nvSpPr>
-          <p:cNvPr id="4" name="Content Placeholder 3">
-            <a:extLst>
-              <a:ext uri="{FF2B5EF4-FFF2-40B4-BE49-F238E27FC236}">
-                <a16:creationId xmlns:a16="http://schemas.microsoft.com/office/drawing/2014/main" id="{D548ADA2-B38F-A25B-C324-05E10CE9CD9F}"/>
-              </a:ext>
-            </a:extLst>
-          </p:cNvPr>
-          <p:cNvSpPr>
-            <a:spLocks noGrp="1"/>
-          </p:cNvSpPr>
-          <p:nvPr>
-            <p:ph sz="quarter" idx="18"/>
-          </p:nvPr>
-        </p:nvSpPr>
-        <p:spPr>
-          <a:xfrm>
-            <a:off x="5995282" y="2440275"/>
-            <a:ext cx="5164553" cy="3721534"/>
-          </a:xfrm>
-        </p:spPr>
-        <p:txBody>
-          <a:bodyPr>
-            <a:normAutofit/>
-          </a:bodyPr>
-          <a:lstStyle/>
-          <a:p>
-            <a:r>
-              <a:rPr lang="en-US" noProof="0" dirty="0"/>
-              <a:t>Product enhancement. </a:t>
-            </a:r>
-          </a:p>
-          <a:p>
-            <a:pPr lvl="1"/>
-            <a:r>
-              <a:rPr lang="en-US" noProof="0" dirty="0"/>
-              <a:t>Introduce regular updates and features to enhance product offerings.</a:t>
-            </a:r>
-          </a:p>
-          <a:p>
-            <a:r>
-              <a:rPr lang="en-US" noProof="0" dirty="0"/>
-              <a:t>Technology integration. </a:t>
-            </a:r>
-          </a:p>
-          <a:p>
-            <a:pPr lvl="1"/>
-            <a:r>
-              <a:rPr lang="en-US" noProof="0" dirty="0"/>
-              <a:t>Explore emerging technologies for potential integration into our operations.</a:t>
-            </a:r>
-          </a:p>
-          <a:p>
-            <a:r>
-              <a:rPr lang="en-US" noProof="0" dirty="0"/>
-              <a:t>Collaborative partnerships. </a:t>
-            </a:r>
-          </a:p>
-          <a:p>
-            <a:pPr lvl="1"/>
-            <a:r>
-              <a:rPr lang="en-US" noProof="0" dirty="0"/>
-              <a:t>Foster collaborations with tech innovators and industry leaders to drive innovation.</a:t>
-            </a:r>
-          </a:p>
-        </p:txBody>
-      </p:sp>
-    </p:spTree>
-    <p:extLst>
-      <p:ext uri="{BB962C8B-B14F-4D97-AF65-F5344CB8AC3E}">
-        <p14:creationId xmlns:p14="http://schemas.microsoft.com/office/powerpoint/2010/main" val="3119354052"/>
-      </p:ext>
-    </p:extLst>
-  </p:cSld>
-  <p:clrMapOvr>
-    <a:masterClrMapping/>
-  </p:clrMapOvr>
-</p:sld>
-</file>
-
-<file path=ppt/slides/slide15.xml><?xml version="1.0" encoding="utf-8"?>
-<p:sld xmlns:a="http://schemas.openxmlformats.org/drawingml/2006/main" xmlns:r="http://schemas.openxmlformats.org/officeDocument/2006/relationships" xmlns:p="http://schemas.openxmlformats.org/presentationml/2006/main">
-  <p:cSld>
-    <p:spTree>
-      <p:nvGrpSpPr>
-        <p:cNvPr id="1" name=""/>
-        <p:cNvGrpSpPr/>
-        <p:nvPr/>
-      </p:nvGrpSpPr>
-      <p:grpSpPr>
-        <a:xfrm>
-          <a:off x="0" y="0"/>
-          <a:ext cx="0" cy="0"/>
-          <a:chOff x="0" y="0"/>
-          <a:chExt cx="0" cy="0"/>
-        </a:xfrm>
-      </p:grpSpPr>
-      <p:sp>
-        <p:nvSpPr>
-          <p:cNvPr id="2" name="Title 1">
-            <a:extLst>
-              <a:ext uri="{FF2B5EF4-FFF2-40B4-BE49-F238E27FC236}">
-                <a16:creationId xmlns:a16="http://schemas.microsoft.com/office/drawing/2014/main" id="{53005011-03FC-652B-2538-4EAE68ABF80D}"/>
-              </a:ext>
-            </a:extLst>
-          </p:cNvPr>
-          <p:cNvSpPr>
-            <a:spLocks noGrp="1"/>
-          </p:cNvSpPr>
-          <p:nvPr>
-            <p:ph type="title"/>
-          </p:nvPr>
-        </p:nvSpPr>
-        <p:spPr>
-          <a:xfrm>
-            <a:off x="770660" y="1017858"/>
-            <a:ext cx="10650681" cy="2719255"/>
-          </a:xfrm>
-        </p:spPr>
-        <p:txBody>
-          <a:bodyPr/>
-          <a:lstStyle/>
-          <a:p>
-            <a:pPr lvl="0"/>
-            <a:r>
-              <a:rPr lang="en-US" dirty="0"/>
-              <a:t>Thank You</a:t>
-            </a:r>
-            <a:endParaRPr lang="en-US" noProof="0" dirty="0"/>
-          </a:p>
-        </p:txBody>
-      </p:sp>
-      <p:sp>
-        <p:nvSpPr>
-          <p:cNvPr id="3" name="Text Placeholder 2">
-            <a:extLst>
-              <a:ext uri="{FF2B5EF4-FFF2-40B4-BE49-F238E27FC236}">
-                <a16:creationId xmlns:a16="http://schemas.microsoft.com/office/drawing/2014/main" id="{411A2349-EF0B-F33D-13F9-826241461648}"/>
-              </a:ext>
-            </a:extLst>
-          </p:cNvPr>
-          <p:cNvSpPr>
-            <a:spLocks noGrp="1"/>
-          </p:cNvSpPr>
-          <p:nvPr>
-            <p:ph type="body" sz="quarter" idx="14"/>
-          </p:nvPr>
-        </p:nvSpPr>
-        <p:spPr>
-          <a:xfrm>
-            <a:off x="770660" y="4042066"/>
-            <a:ext cx="10650681" cy="2296843"/>
-          </a:xfrm>
-        </p:spPr>
-        <p:txBody>
-          <a:bodyPr/>
-          <a:lstStyle/>
-          <a:p>
-            <a:pPr lvl="0"/>
-            <a:r>
-              <a:rPr lang="en-US" noProof="0"/>
-              <a:t>Mirjam</a:t>
-            </a:r>
-            <a:r>
-              <a:rPr lang="en-US" noProof="0" dirty="0"/>
-              <a:t> Nilsson</a:t>
-            </a:r>
-          </a:p>
-          <a:p>
-            <a:pPr lvl="0"/>
-            <a:r>
-              <a:rPr lang="en-US" dirty="0"/>
-              <a:t>m</a:t>
-            </a:r>
-            <a:r>
-              <a:rPr lang="en-US" noProof="0" dirty="0"/>
-              <a:t>irjam@contoso.com</a:t>
-            </a:r>
-          </a:p>
-          <a:p>
-            <a:pPr lvl="0"/>
-            <a:r>
-              <a:rPr lang="en-US" dirty="0"/>
-              <a:t>w</a:t>
-            </a:r>
-            <a:r>
-              <a:rPr lang="en-US" noProof="0" dirty="0"/>
-              <a:t>ww.contoso.com</a:t>
-            </a:r>
-          </a:p>
-        </p:txBody>
-      </p:sp>
-    </p:spTree>
-    <p:extLst>
-      <p:ext uri="{BB962C8B-B14F-4D97-AF65-F5344CB8AC3E}">
-        <p14:creationId xmlns:p14="http://schemas.microsoft.com/office/powerpoint/2010/main" val="3663657925"/>
-      </p:ext>
-    </p:extLst>
-  </p:cSld>
-  <p:clrMapOvr>
-    <a:masterClrMapping/>
-  </p:clrMapOvr>
-</p:sld>
-</file>
-
 <file path=ppt/slides/slide2.xml><?xml version="1.0" encoding="utf-8"?>
 <p:sld xmlns:a="http://schemas.openxmlformats.org/drawingml/2006/main" xmlns:r="http://schemas.openxmlformats.org/officeDocument/2006/relationships" xmlns:p="http://schemas.openxmlformats.org/presentationml/2006/main">
   <p:cSld>
@@ -14982,584 +8632,6 @@
     <p:extLst>
       <p:ext uri="{BB962C8B-B14F-4D97-AF65-F5344CB8AC3E}">
         <p14:creationId xmlns:p14="http://schemas.microsoft.com/office/powerpoint/2010/main" val="1173936384"/>
-      </p:ext>
-    </p:extLst>
-  </p:cSld>
-  <p:clrMapOvr>
-    <a:masterClrMapping/>
-  </p:clrMapOvr>
-</p:sld>
-</file>
-
-<file path=ppt/slides/slide6.xml><?xml version="1.0" encoding="utf-8"?>
-<p:sld xmlns:a="http://schemas.openxmlformats.org/drawingml/2006/main" xmlns:r="http://schemas.openxmlformats.org/officeDocument/2006/relationships" xmlns:p="http://schemas.openxmlformats.org/presentationml/2006/main">
-  <p:cSld>
-    <p:spTree>
-      <p:nvGrpSpPr>
-        <p:cNvPr id="1" name=""/>
-        <p:cNvGrpSpPr/>
-        <p:nvPr/>
-      </p:nvGrpSpPr>
-      <p:grpSpPr>
-        <a:xfrm>
-          <a:off x="0" y="0"/>
-          <a:ext cx="0" cy="0"/>
-          <a:chOff x="0" y="0"/>
-          <a:chExt cx="0" cy="0"/>
-        </a:xfrm>
-      </p:grpSpPr>
-      <p:sp>
-        <p:nvSpPr>
-          <p:cNvPr id="4" name="Title 3">
-            <a:extLst>
-              <a:ext uri="{FF2B5EF4-FFF2-40B4-BE49-F238E27FC236}">
-                <a16:creationId xmlns:a16="http://schemas.microsoft.com/office/drawing/2014/main" id="{E8ECA8A6-26C7-FE2F-5884-A9A5652053C6}"/>
-              </a:ext>
-            </a:extLst>
-          </p:cNvPr>
-          <p:cNvSpPr>
-            <a:spLocks noGrp="1"/>
-          </p:cNvSpPr>
-          <p:nvPr>
-            <p:ph type="title"/>
-          </p:nvPr>
-        </p:nvSpPr>
-        <p:spPr>
-          <a:xfrm>
-            <a:off x="5485516" y="1433219"/>
-            <a:ext cx="5695102" cy="2092049"/>
-          </a:xfrm>
-        </p:spPr>
-        <p:txBody>
-          <a:bodyPr/>
-          <a:lstStyle/>
-          <a:p>
-            <a:r>
-              <a:rPr lang="en-US" dirty="0"/>
-              <a:t>Market expansion</a:t>
-            </a:r>
-          </a:p>
-        </p:txBody>
-      </p:sp>
-      <p:pic>
-        <p:nvPicPr>
-          <p:cNvPr id="8" name="Picture Placeholder 7" descr="A green circle with a curled corner">
-            <a:extLst>
-              <a:ext uri="{FF2B5EF4-FFF2-40B4-BE49-F238E27FC236}">
-                <a16:creationId xmlns:a16="http://schemas.microsoft.com/office/drawing/2014/main" id="{8CCCEC06-31A4-216C-78F1-DF37E7A7CC34}"/>
-              </a:ext>
-            </a:extLst>
-          </p:cNvPr>
-          <p:cNvPicPr>
-            <a:picLocks noGrp="1" noChangeAspect="1"/>
-          </p:cNvPicPr>
-          <p:nvPr>
-            <p:ph type="pic" sz="quarter" idx="11"/>
-          </p:nvPr>
-        </p:nvPicPr>
-        <p:blipFill>
-          <a:blip r:embed="rId3"/>
-          <a:srcRect/>
-          <a:stretch/>
-        </p:blipFill>
-        <p:spPr>
-          <a:xfrm>
-            <a:off x="1350099" y="1974707"/>
-            <a:ext cx="2907792" cy="2907792"/>
-          </a:xfrm>
-        </p:spPr>
-      </p:pic>
-      <p:sp>
-        <p:nvSpPr>
-          <p:cNvPr id="5" name="Content Placeholder 4">
-            <a:extLst>
-              <a:ext uri="{FF2B5EF4-FFF2-40B4-BE49-F238E27FC236}">
-                <a16:creationId xmlns:a16="http://schemas.microsoft.com/office/drawing/2014/main" id="{6F377941-FDA2-9332-B360-A8C727991812}"/>
-              </a:ext>
-            </a:extLst>
-          </p:cNvPr>
-          <p:cNvSpPr>
-            <a:spLocks noGrp="1"/>
-          </p:cNvSpPr>
-          <p:nvPr>
-            <p:ph sz="quarter" idx="10"/>
-          </p:nvPr>
-        </p:nvSpPr>
-        <p:spPr>
-          <a:xfrm>
-            <a:off x="5496789" y="3525268"/>
-            <a:ext cx="5683829" cy="2595429"/>
-          </a:xfrm>
-        </p:spPr>
-        <p:txBody>
-          <a:bodyPr/>
-          <a:lstStyle/>
-          <a:p>
-            <a:pPr lvl="0"/>
-            <a:r>
-              <a:rPr lang="en-US" noProof="0" dirty="0"/>
-              <a:t>Unlocking new horizons</a:t>
-            </a:r>
-          </a:p>
-        </p:txBody>
-      </p:sp>
-    </p:spTree>
-    <p:extLst>
-      <p:ext uri="{BB962C8B-B14F-4D97-AF65-F5344CB8AC3E}">
-        <p14:creationId xmlns:p14="http://schemas.microsoft.com/office/powerpoint/2010/main" val="3937483142"/>
-      </p:ext>
-    </p:extLst>
-  </p:cSld>
-  <p:clrMapOvr>
-    <a:masterClrMapping/>
-  </p:clrMapOvr>
-</p:sld>
-</file>
-
-<file path=ppt/slides/slide7.xml><?xml version="1.0" encoding="utf-8"?>
-<p:sld xmlns:a="http://schemas.openxmlformats.org/drawingml/2006/main" xmlns:r="http://schemas.openxmlformats.org/officeDocument/2006/relationships" xmlns:p="http://schemas.openxmlformats.org/presentationml/2006/main">
-  <p:cSld>
-    <p:spTree>
-      <p:nvGrpSpPr>
-        <p:cNvPr id="1" name=""/>
-        <p:cNvGrpSpPr/>
-        <p:nvPr/>
-      </p:nvGrpSpPr>
-      <p:grpSpPr>
-        <a:xfrm>
-          <a:off x="0" y="0"/>
-          <a:ext cx="0" cy="0"/>
-          <a:chOff x="0" y="0"/>
-          <a:chExt cx="0" cy="0"/>
-        </a:xfrm>
-      </p:grpSpPr>
-      <p:sp>
-        <p:nvSpPr>
-          <p:cNvPr id="6" name="Title 5">
-            <a:extLst>
-              <a:ext uri="{FF2B5EF4-FFF2-40B4-BE49-F238E27FC236}">
-                <a16:creationId xmlns:a16="http://schemas.microsoft.com/office/drawing/2014/main" id="{707FBB55-EF55-03D8-7D3C-29341A40D63E}"/>
-              </a:ext>
-            </a:extLst>
-          </p:cNvPr>
-          <p:cNvSpPr>
-            <a:spLocks noGrp="1"/>
-          </p:cNvSpPr>
-          <p:nvPr>
-            <p:ph type="title"/>
-          </p:nvPr>
-        </p:nvSpPr>
-        <p:spPr>
-          <a:xfrm>
-            <a:off x="529935" y="633845"/>
-            <a:ext cx="3990110" cy="2192482"/>
-          </a:xfrm>
-        </p:spPr>
-        <p:txBody>
-          <a:bodyPr/>
-          <a:lstStyle/>
-          <a:p>
-            <a:r>
-              <a:rPr lang="en-US" dirty="0"/>
-              <a:t>Product launch</a:t>
-            </a:r>
-          </a:p>
-        </p:txBody>
-      </p:sp>
-      <p:sp>
-        <p:nvSpPr>
-          <p:cNvPr id="7" name="Content Placeholder 6">
-            <a:extLst>
-              <a:ext uri="{FF2B5EF4-FFF2-40B4-BE49-F238E27FC236}">
-                <a16:creationId xmlns:a16="http://schemas.microsoft.com/office/drawing/2014/main" id="{AD6AD7D9-DEA3-79A4-785F-0EA945171020}"/>
-              </a:ext>
-            </a:extLst>
-          </p:cNvPr>
-          <p:cNvSpPr>
-            <a:spLocks noGrp="1"/>
-          </p:cNvSpPr>
-          <p:nvPr>
-            <p:ph sz="quarter" idx="11"/>
-          </p:nvPr>
-        </p:nvSpPr>
-        <p:spPr>
-          <a:xfrm>
-            <a:off x="747423" y="3174531"/>
-            <a:ext cx="3772622" cy="3122360"/>
-          </a:xfrm>
-        </p:spPr>
-        <p:txBody>
-          <a:bodyPr/>
-          <a:lstStyle/>
-          <a:p>
-            <a:pPr lvl="0"/>
-            <a:r>
-              <a:rPr lang="en-US" noProof="0" dirty="0"/>
-              <a:t>Currently gearing up for </a:t>
-            </a:r>
-            <a:br>
-              <a:rPr lang="en-US" noProof="0" dirty="0"/>
-            </a:br>
-            <a:r>
-              <a:rPr lang="en-US" noProof="0" dirty="0"/>
-              <a:t>a ground-breaking launch </a:t>
-            </a:r>
-          </a:p>
-          <a:p>
-            <a:pPr lvl="0"/>
-            <a:r>
-              <a:rPr lang="en-US" noProof="0" dirty="0"/>
-              <a:t>Our new offerings will captivate the market</a:t>
-            </a:r>
-          </a:p>
-          <a:p>
-            <a:pPr lvl="0"/>
-            <a:r>
-              <a:rPr lang="en-US" noProof="0" dirty="0"/>
-              <a:t>Our marketing campaign will generate anticipation</a:t>
-            </a:r>
-          </a:p>
-        </p:txBody>
-      </p:sp>
-      <p:graphicFrame>
-        <p:nvGraphicFramePr>
-          <p:cNvPr id="4" name="Content Placeholder 3" descr="A timeline of the product launch">
-            <a:extLst>
-              <a:ext uri="{FF2B5EF4-FFF2-40B4-BE49-F238E27FC236}">
-                <a16:creationId xmlns:a16="http://schemas.microsoft.com/office/drawing/2014/main" id="{0AA14396-9ECF-6200-84F1-4A2C71CE5B8B}"/>
-              </a:ext>
-            </a:extLst>
-          </p:cNvPr>
-          <p:cNvGraphicFramePr>
-            <a:graphicFrameLocks noGrp="1"/>
-          </p:cNvGraphicFramePr>
-          <p:nvPr>
-            <p:ph sz="quarter" idx="10"/>
-            <p:extLst>
-              <p:ext uri="{D42A27DB-BD31-4B8C-83A1-F6EECF244321}">
-                <p14:modId xmlns:p14="http://schemas.microsoft.com/office/powerpoint/2010/main" val="3681027793"/>
-              </p:ext>
-            </p:extLst>
-          </p:nvPr>
-        </p:nvGraphicFramePr>
-        <p:xfrm>
-          <a:off x="5237163" y="946150"/>
-          <a:ext cx="5972175" cy="5160963"/>
-        </p:xfrm>
-        <a:graphic>
-          <a:graphicData uri="http://schemas.openxmlformats.org/drawingml/2006/diagram">
-            <dgm:relIds xmlns:dgm="http://schemas.openxmlformats.org/drawingml/2006/diagram" xmlns:r="http://schemas.openxmlformats.org/officeDocument/2006/relationships" r:dm="rId3" r:lo="rId4" r:qs="rId5" r:cs="rId6"/>
-          </a:graphicData>
-        </a:graphic>
-      </p:graphicFrame>
-    </p:spTree>
-    <p:extLst>
-      <p:ext uri="{BB962C8B-B14F-4D97-AF65-F5344CB8AC3E}">
-        <p14:creationId xmlns:p14="http://schemas.microsoft.com/office/powerpoint/2010/main" val="4104434737"/>
-      </p:ext>
-    </p:extLst>
-  </p:cSld>
-  <p:clrMapOvr>
-    <a:masterClrMapping/>
-  </p:clrMapOvr>
-</p:sld>
-</file>
-
-<file path=ppt/slides/slide8.xml><?xml version="1.0" encoding="utf-8"?>
-<p:sld xmlns:a="http://schemas.openxmlformats.org/drawingml/2006/main" xmlns:r="http://schemas.openxmlformats.org/officeDocument/2006/relationships" xmlns:p="http://schemas.openxmlformats.org/presentationml/2006/main">
-  <p:cSld>
-    <p:spTree>
-      <p:nvGrpSpPr>
-        <p:cNvPr id="1" name=""/>
-        <p:cNvGrpSpPr/>
-        <p:nvPr/>
-      </p:nvGrpSpPr>
-      <p:grpSpPr>
-        <a:xfrm>
-          <a:off x="0" y="0"/>
-          <a:ext cx="0" cy="0"/>
-          <a:chOff x="0" y="0"/>
-          <a:chExt cx="0" cy="0"/>
-        </a:xfrm>
-      </p:grpSpPr>
-      <p:sp>
-        <p:nvSpPr>
-          <p:cNvPr id="2" name="Title 1">
-            <a:extLst>
-              <a:ext uri="{FF2B5EF4-FFF2-40B4-BE49-F238E27FC236}">
-                <a16:creationId xmlns:a16="http://schemas.microsoft.com/office/drawing/2014/main" id="{8CC28204-2C6C-CA2B-7ACE-709BD219E7A2}"/>
-              </a:ext>
-            </a:extLst>
-          </p:cNvPr>
-          <p:cNvSpPr>
-            <a:spLocks noGrp="1"/>
-          </p:cNvSpPr>
-          <p:nvPr>
-            <p:ph type="title"/>
-          </p:nvPr>
-        </p:nvSpPr>
-        <p:spPr>
-          <a:xfrm>
-            <a:off x="6577445" y="157637"/>
-            <a:ext cx="4851694" cy="2190705"/>
-          </a:xfrm>
-        </p:spPr>
-        <p:txBody>
-          <a:bodyPr/>
-          <a:lstStyle/>
-          <a:p>
-            <a:r>
-              <a:rPr lang="en-US" dirty="0"/>
-              <a:t>Marketing strategies</a:t>
-            </a:r>
-          </a:p>
-        </p:txBody>
-      </p:sp>
-      <p:pic>
-        <p:nvPicPr>
-          <p:cNvPr id="19" name="Picture Placeholder 18">
-            <a:extLst>
-              <a:ext uri="{FF2B5EF4-FFF2-40B4-BE49-F238E27FC236}">
-                <a16:creationId xmlns:a16="http://schemas.microsoft.com/office/drawing/2014/main" id="{C9C7069E-8095-250E-5EC8-5FE8BAC18FAA}"/>
-              </a:ext>
-              <a:ext uri="{C183D7F6-B498-43B3-948B-1728B52AA6E4}">
-                <adec:decorative xmlns:adec="http://schemas.microsoft.com/office/drawing/2017/decorative" val="1"/>
-              </a:ext>
-            </a:extLst>
-          </p:cNvPr>
-          <p:cNvPicPr>
-            <a:picLocks noGrp="1" noChangeAspect="1"/>
-          </p:cNvPicPr>
-          <p:nvPr>
-            <p:ph type="pic" sz="quarter" idx="11"/>
-          </p:nvPr>
-        </p:nvPicPr>
-        <p:blipFill rotWithShape="1">
-          <a:blip r:embed="rId3" cstate="screen">
-            <a:duotone>
-              <a:prstClr val="black"/>
-              <a:schemeClr val="accent1">
-                <a:tint val="45000"/>
-                <a:satMod val="400000"/>
-              </a:schemeClr>
-            </a:duotone>
-            <a:alphaModFix amt="50000"/>
-            <a:extLst>
-              <a:ext uri="{28A0092B-C50C-407E-A947-70E740481C1C}">
-                <a14:useLocalDpi xmlns:a14="http://schemas.microsoft.com/office/drawing/2010/main"/>
-              </a:ext>
-            </a:extLst>
-          </a:blip>
-          <a:srcRect t="14" b="14"/>
-          <a:stretch/>
-        </p:blipFill>
-        <p:spPr>
-          <a:xfrm>
-            <a:off x="1236663" y="776288"/>
-            <a:ext cx="3433762" cy="5018087"/>
-          </a:xfrm>
-        </p:spPr>
-      </p:pic>
-      <p:sp>
-        <p:nvSpPr>
-          <p:cNvPr id="3" name="Content Placeholder 2">
-            <a:extLst>
-              <a:ext uri="{FF2B5EF4-FFF2-40B4-BE49-F238E27FC236}">
-                <a16:creationId xmlns:a16="http://schemas.microsoft.com/office/drawing/2014/main" id="{A83F17C7-EFB2-790A-200F-D9BF2626198F}"/>
-              </a:ext>
-            </a:extLst>
-          </p:cNvPr>
-          <p:cNvSpPr>
-            <a:spLocks noGrp="1"/>
-          </p:cNvSpPr>
-          <p:nvPr>
-            <p:ph sz="quarter" idx="10"/>
-          </p:nvPr>
-        </p:nvSpPr>
-        <p:spPr>
-          <a:xfrm>
-            <a:off x="6592615" y="2505979"/>
-            <a:ext cx="4837385" cy="3926717"/>
-          </a:xfrm>
-        </p:spPr>
-        <p:txBody>
-          <a:bodyPr>
-            <a:normAutofit/>
-          </a:bodyPr>
-          <a:lstStyle/>
-          <a:p>
-            <a:pPr lvl="0"/>
-            <a:r>
-              <a:rPr lang="en-US" noProof="0" dirty="0"/>
-              <a:t>Implement personalized engagement strategies</a:t>
-            </a:r>
-          </a:p>
-          <a:p>
-            <a:pPr lvl="0"/>
-            <a:r>
-              <a:rPr lang="en-US" noProof="0" dirty="0"/>
-              <a:t>Tailor campaigns to resonate with specific demographics, fostering a sense of relevance and connection</a:t>
-            </a:r>
-          </a:p>
-          <a:p>
-            <a:pPr lvl="0"/>
-            <a:r>
-              <a:rPr lang="en-US" noProof="0" dirty="0"/>
-              <a:t>Collaborate with influencers and thought leaders to amplify our brand message</a:t>
-            </a:r>
-          </a:p>
-        </p:txBody>
-      </p:sp>
-    </p:spTree>
-    <p:extLst>
-      <p:ext uri="{BB962C8B-B14F-4D97-AF65-F5344CB8AC3E}">
-        <p14:creationId xmlns:p14="http://schemas.microsoft.com/office/powerpoint/2010/main" val="1014413726"/>
-      </p:ext>
-    </p:extLst>
-  </p:cSld>
-  <p:clrMapOvr>
-    <a:masterClrMapping/>
-  </p:clrMapOvr>
-</p:sld>
-</file>
-
-<file path=ppt/slides/slide9.xml><?xml version="1.0" encoding="utf-8"?>
-<p:sld xmlns:a="http://schemas.openxmlformats.org/drawingml/2006/main" xmlns:r="http://schemas.openxmlformats.org/officeDocument/2006/relationships" xmlns:p="http://schemas.openxmlformats.org/presentationml/2006/main">
-  <p:cSld>
-    <p:spTree>
-      <p:nvGrpSpPr>
-        <p:cNvPr id="1" name=""/>
-        <p:cNvGrpSpPr/>
-        <p:nvPr/>
-      </p:nvGrpSpPr>
-      <p:grpSpPr>
-        <a:xfrm>
-          <a:off x="0" y="0"/>
-          <a:ext cx="0" cy="0"/>
-          <a:chOff x="0" y="0"/>
-          <a:chExt cx="0" cy="0"/>
-        </a:xfrm>
-      </p:grpSpPr>
-      <p:sp>
-        <p:nvSpPr>
-          <p:cNvPr id="2" name="Title 1">
-            <a:extLst>
-              <a:ext uri="{FF2B5EF4-FFF2-40B4-BE49-F238E27FC236}">
-                <a16:creationId xmlns:a16="http://schemas.microsoft.com/office/drawing/2014/main" id="{4A663E25-7402-EAC9-107D-E3C80B9672C6}"/>
-              </a:ext>
-            </a:extLst>
-          </p:cNvPr>
-          <p:cNvSpPr>
-            <a:spLocks noGrp="1"/>
-          </p:cNvSpPr>
-          <p:nvPr>
-            <p:ph type="title"/>
-          </p:nvPr>
-        </p:nvSpPr>
-        <p:spPr>
-          <a:xfrm>
-            <a:off x="529935" y="924339"/>
-            <a:ext cx="3990110" cy="5009322"/>
-          </a:xfrm>
-        </p:spPr>
-        <p:txBody>
-          <a:bodyPr/>
-          <a:lstStyle/>
-          <a:p>
-            <a:pPr lvl="0"/>
-            <a:r>
-              <a:rPr lang="en-US" noProof="0" dirty="0"/>
-              <a:t>Financial overview</a:t>
-            </a:r>
-          </a:p>
-        </p:txBody>
-      </p:sp>
-      <p:sp>
-        <p:nvSpPr>
-          <p:cNvPr id="3" name="Content Placeholder 2">
-            <a:extLst>
-              <a:ext uri="{FF2B5EF4-FFF2-40B4-BE49-F238E27FC236}">
-                <a16:creationId xmlns:a16="http://schemas.microsoft.com/office/drawing/2014/main" id="{DBBD146A-879C-A0DC-7A0C-2E7729C4D125}"/>
-              </a:ext>
-            </a:extLst>
-          </p:cNvPr>
-          <p:cNvSpPr>
-            <a:spLocks noGrp="1"/>
-          </p:cNvSpPr>
-          <p:nvPr>
-            <p:ph sz="quarter" idx="10"/>
-          </p:nvPr>
-        </p:nvSpPr>
-        <p:spPr>
-          <a:xfrm>
-            <a:off x="5153836" y="1371602"/>
-            <a:ext cx="6177309" cy="1953489"/>
-          </a:xfrm>
-        </p:spPr>
-        <p:txBody>
-          <a:bodyPr/>
-          <a:lstStyle/>
-          <a:p>
-            <a:pPr lvl="0"/>
-            <a:r>
-              <a:rPr lang="en-US" noProof="0" dirty="0"/>
-              <a:t>Our financial overview reflects a robust and resilient fiscal performance.</a:t>
-            </a:r>
-          </a:p>
-          <a:p>
-            <a:pPr lvl="0"/>
-            <a:r>
-              <a:rPr lang="en-US" noProof="0" dirty="0"/>
-              <a:t>Key indicators show consistent revenue growth over the past quarter, attributed to strategic cost management and successful marketing.</a:t>
-            </a:r>
-          </a:p>
-        </p:txBody>
-      </p:sp>
-      <p:sp>
-        <p:nvSpPr>
-          <p:cNvPr id="6" name="Content Placeholder 5">
-            <a:extLst>
-              <a:ext uri="{FF2B5EF4-FFF2-40B4-BE49-F238E27FC236}">
-                <a16:creationId xmlns:a16="http://schemas.microsoft.com/office/drawing/2014/main" id="{FCAFDB5C-106E-88F6-9353-25362AF2CB86}"/>
-              </a:ext>
-            </a:extLst>
-          </p:cNvPr>
-          <p:cNvSpPr>
-            <a:spLocks noGrp="1"/>
-          </p:cNvSpPr>
-          <p:nvPr>
-            <p:ph sz="quarter" idx="11"/>
-          </p:nvPr>
-        </p:nvSpPr>
-        <p:spPr>
-          <a:xfrm>
-            <a:off x="5153836" y="3745924"/>
-            <a:ext cx="6177309" cy="2238918"/>
-          </a:xfrm>
-        </p:spPr>
-        <p:txBody>
-          <a:bodyPr/>
-          <a:lstStyle/>
-          <a:p>
-            <a:pPr lvl="0"/>
-            <a:r>
-              <a:rPr lang="en-US" noProof="0" dirty="0"/>
-              <a:t>Operating margins have improved, signaling operational efficiency, while strengthening our reserves.</a:t>
-            </a:r>
-          </a:p>
-          <a:p>
-            <a:pPr lvl="0"/>
-            <a:r>
-              <a:rPr lang="en-US" noProof="0" dirty="0"/>
-              <a:t>This underscores our commitment to financial stability, positioning us for sustained growth. </a:t>
-            </a:r>
-          </a:p>
-        </p:txBody>
-      </p:sp>
-    </p:spTree>
-    <p:extLst>
-      <p:ext uri="{BB962C8B-B14F-4D97-AF65-F5344CB8AC3E}">
-        <p14:creationId xmlns:p14="http://schemas.microsoft.com/office/powerpoint/2010/main" val="3117802180"/>
       </p:ext>
     </p:extLst>
   </p:cSld>
@@ -16417,6 +9489,15 @@
 </file>
 
 <file path=customXml/item1.xml><?xml version="1.0" encoding="utf-8"?>
+<?mso-contentType ?>
+<FormTemplates xmlns="http://schemas.microsoft.com/sharepoint/v3/contenttype/forms">
+  <Display>DocumentLibraryForm</Display>
+  <Edit>DocumentLibraryForm</Edit>
+  <New>DocumentLibraryForm</New>
+</FormTemplates>
+</file>
+
+<file path=customXml/item2.xml><?xml version="1.0" encoding="utf-8"?>
 <p:properties xmlns:p="http://schemas.microsoft.com/office/2006/metadata/properties" xmlns:xsi="http://www.w3.org/2001/XMLSchema-instance" xmlns:pc="http://schemas.microsoft.com/office/infopath/2007/PartnerControls">
   <documentManagement>
     <_ip_UnifiedCompliancePolicyUIAction xmlns="http://schemas.microsoft.com/sharepoint/v3" xsi:nil="true"/>
@@ -16434,15 +9515,6 @@
     <MediaServiceKeyPoints xmlns="71af3243-3dd4-4a8d-8c0d-dd76da1f02a5" xsi:nil="true"/>
   </documentManagement>
 </p:properties>
-</file>
-
-<file path=customXml/item2.xml><?xml version="1.0" encoding="utf-8"?>
-<?mso-contentType ?>
-<FormTemplates xmlns="http://schemas.microsoft.com/sharepoint/v3/contenttype/forms">
-  <Display>DocumentLibraryForm</Display>
-  <Edit>DocumentLibraryForm</Edit>
-  <New>DocumentLibraryForm</New>
-</FormTemplates>
 </file>
 
 <file path=customXml/item3.xml><?xml version="1.0" encoding="utf-8"?>
@@ -16758,6 +9830,14 @@
 </file>
 
 <file path=customXml/itemProps1.xml><?xml version="1.0" encoding="utf-8"?>
+<ds:datastoreItem xmlns:ds="http://schemas.openxmlformats.org/officeDocument/2006/customXml" ds:itemID="{F29F0C84-2C14-4FB8-88C2-9577181F2CC2}">
+  <ds:schemaRefs>
+    <ds:schemaRef ds:uri="http://schemas.microsoft.com/sharepoint/v3/contenttype/forms"/>
+  </ds:schemaRefs>
+</ds:datastoreItem>
+</file>
+
+<file path=customXml/itemProps2.xml><?xml version="1.0" encoding="utf-8"?>
 <ds:datastoreItem xmlns:ds="http://schemas.openxmlformats.org/officeDocument/2006/customXml" ds:itemID="{E4ACCF44-01D5-4C40-9EAC-D3C3683409FE}">
   <ds:schemaRefs>
     <ds:schemaRef ds:uri="http://schemas.microsoft.com/office/2006/metadata/properties"/>
@@ -16765,14 +9845,6 @@
     <ds:schemaRef ds:uri="http://schemas.microsoft.com/sharepoint/v3"/>
     <ds:schemaRef ds:uri="71af3243-3dd4-4a8d-8c0d-dd76da1f02a5"/>
     <ds:schemaRef ds:uri="230e9df3-be65-4c73-a93b-d1236ebd677e"/>
-  </ds:schemaRefs>
-</ds:datastoreItem>
-</file>
-
-<file path=customXml/itemProps2.xml><?xml version="1.0" encoding="utf-8"?>
-<ds:datastoreItem xmlns:ds="http://schemas.openxmlformats.org/officeDocument/2006/customXml" ds:itemID="{F29F0C84-2C14-4FB8-88C2-9577181F2CC2}">
-  <ds:schemaRefs>
-    <ds:schemaRef ds:uri="http://schemas.microsoft.com/sharepoint/v3/contenttype/forms"/>
   </ds:schemaRefs>
 </ds:datastoreItem>
 </file>
